--- a/2A/Software Dev/Main Projects/Calculate CGPA/PowerPoint/Software Platform.pptx
+++ b/2A/Software Dev/Main Projects/Calculate CGPA/PowerPoint/Software Platform.pptx
@@ -17,22 +17,23 @@
     <p:sldId id="262" r:id="rId11"/>
     <p:sldId id="263" r:id="rId12"/>
     <p:sldId id="264" r:id="rId13"/>
+    <p:sldId id="265" r:id="rId14"/>
   </p:sldIdLst>
   <p:sldSz cx="9144000" cy="5143500" type="screen16x9"/>
   <p:notesSz cx="9144000" cy="5143500"/>
   <p:embeddedFontLst>
     <p:embeddedFont>
       <p:font typeface="Titillium Web"/>
-      <p:regular r:id="rId15"/>
-      <p:bold r:id="rId16"/>
+      <p:regular r:id="rId16"/>
+      <p:bold r:id="rId17"/>
     </p:embeddedFont>
     <p:embeddedFont>
       <p:font typeface="Bungee Inline"/>
-      <p:bold r:id="rId17"/>
+      <p:bold r:id="rId18"/>
     </p:embeddedFont>
     <p:embeddedFont>
       <p:font typeface="Bungee"/>
-      <p:regular r:id="rId18"/>
+      <p:regular r:id="rId19"/>
     </p:embeddedFont>
   </p:embeddedFontLst>
   <p:custDataLst/>
@@ -496,8 +497,8 @@
         <p:nvPicPr>
           <p:cNvPr id="2" name="Picture 6">
             <a:extLst>
-              <a:ext uri="{CD65BBE6-3800-4E8C-B5E1-DA5109330961}">
-                <a16:creationId xmlns:a16="http://schemas.microsoft.com/office/drawing/2010/main" id="{31D43DD3-D4FA-4083-B72E-D0CFD484E392}"/>
+              <a:ext uri="{1519DC8A-F2C7-46FF-B1B8-E873F444A38E}">
+                <a16:creationId xmlns:a16="http://schemas.microsoft.com/office/drawing/2010/main" id="{FCA0782B-0B76-4ACC-8B09-167478F3B7A7}"/>
               </a:ext>
             </a:extLst>
           </p:cNvPr>
@@ -530,8 +531,8 @@
         <p:nvPicPr>
           <p:cNvPr id="3" name="Picture 9">
             <a:extLst>
-              <a:ext uri="{3054060A-794E-4AB0-A700-D6893DED98AD}">
-                <a16:creationId xmlns:a16="http://schemas.microsoft.com/office/drawing/2010/main" id="{251B9D1A-1FB9-4094-BCB6-AA7489943DC6}"/>
+              <a:ext uri="{C3517C8D-85F5-4035-A803-F74AD0800165}">
+                <a16:creationId xmlns:a16="http://schemas.microsoft.com/office/drawing/2010/main" id="{1E48E01E-6F95-4514-835A-000CD9FD5C9C}"/>
               </a:ext>
             </a:extLst>
           </p:cNvPr>
@@ -564,8 +565,8 @@
         <p:nvCxnSpPr>
           <p:cNvPr id="4" name="Straight Connector 11">
             <a:extLst>
-              <a:ext uri="{5C341629-33C6-40F9-ADE5-61A4D3086336}">
-                <a16:creationId xmlns:a16="http://schemas.microsoft.com/office/drawing/2010/main" id="{DC88F052-3B0D-4AAD-A254-A66CC38242AC}"/>
+              <a:ext uri="{2FABA279-396D-4BD8-B202-3FCB8F8F77CF}">
+                <a16:creationId xmlns:a16="http://schemas.microsoft.com/office/drawing/2010/main" id="{3BAD5868-3BA2-4248-8839-01F36DED6FCA}"/>
               </a:ext>
             </a:extLst>
           </p:cNvPr>
@@ -605,8 +606,8 @@
         <p:nvSpPr>
           <p:cNvPr id="5" name="Cube 12">
             <a:extLst>
-              <a:ext uri="{4573C6AB-FBC3-4C79-88A2-BADD3D916709}">
-                <a16:creationId xmlns:a16="http://schemas.microsoft.com/office/drawing/2010/main" id="{D114B5DB-0A21-4BE9-84EC-2665140C7A03}"/>
+              <a:ext uri="{CB8E261E-9B48-49E9-9918-15AA49C1E164}">
+                <a16:creationId xmlns:a16="http://schemas.microsoft.com/office/drawing/2010/main" id="{4230C5DC-E625-4E2E-A5BB-87A0F3FDE1AB}"/>
               </a:ext>
             </a:extLst>
           </p:cNvPr>
@@ -662,8 +663,8 @@
         <p:nvPicPr>
           <p:cNvPr id="6" name="Picture 13">
             <a:extLst>
-              <a:ext uri="{A5AE99AC-87C7-4F02-AE9C-C117F07589AB}">
-                <a16:creationId xmlns:a16="http://schemas.microsoft.com/office/drawing/2010/main" id="{44257AB5-D9C4-406D-A6D8-80BBF553934E}"/>
+              <a:ext uri="{492627CC-12EE-47FA-958A-3083544FB70C}">
+                <a16:creationId xmlns:a16="http://schemas.microsoft.com/office/drawing/2010/main" id="{5946BE5F-6271-4855-92A4-EA0C60BC54FB}"/>
               </a:ext>
             </a:extLst>
           </p:cNvPr>
@@ -693,8 +694,8 @@
         <p:nvGrpSpPr>
           <p:cNvPr id="7" name="Group 14">
             <a:extLst>
-              <a:ext uri="{A39CC0C0-7E13-477E-B167-ACBFD32CC8F2}">
-                <a16:creationId xmlns:a16="http://schemas.microsoft.com/office/drawing/2010/main" id="{F8600136-6AAF-439B-A20A-AA4E4E06D7E0}"/>
+              <a:ext uri="{4C61E53A-9BC9-49A1-A0CF-C4FCA7DCF6BD}">
+                <a16:creationId xmlns:a16="http://schemas.microsoft.com/office/drawing/2010/main" id="{27C2B7AC-FDE2-4095-92B5-090F45110EBA}"/>
               </a:ext>
             </a:extLst>
           </p:cNvPr>
@@ -713,8 +714,8 @@
           <p:nvCxnSpPr>
             <p:cNvPr id="8" name="Straight Connector 15">
               <a:extLst>
-                <a:ext uri="{C9B0427D-414F-4BAC-9C96-E5719EC4AB96}">
-                  <a16:creationId xmlns:a16="http://schemas.microsoft.com/office/drawing/2010/main" id="{A3DDD80E-00EF-4618-97E4-228592714619}"/>
+                <a:ext uri="{741B8DF4-852B-42CA-B9DB-1AE3D8F5C2B1}">
+                  <a16:creationId xmlns:a16="http://schemas.microsoft.com/office/drawing/2010/main" id="{5ED48D8A-6B25-47AB-9B09-C734140EADBC}"/>
                 </a:ext>
               </a:extLst>
             </p:cNvPr>
@@ -756,8 +757,8 @@
           <p:nvGrpSpPr>
             <p:cNvPr id="9" name="Group 16">
               <a:extLst>
-                <a:ext uri="{2C5CE916-298A-418D-88B0-C2E15AED8ECD}">
-                  <a16:creationId xmlns:a16="http://schemas.microsoft.com/office/drawing/2010/main" id="{0D7D7680-831C-4C4D-AFF6-DE1BBC6E5EC4}"/>
+                <a:ext uri="{6985C492-B8DB-4C6D-8119-8A31B53ACA45}">
+                  <a16:creationId xmlns:a16="http://schemas.microsoft.com/office/drawing/2010/main" id="{272E5A8D-426A-4A3A-8CB2-D0F32B970B0B}"/>
                 </a:ext>
               </a:extLst>
             </p:cNvPr>
@@ -776,8 +777,8 @@
             <p:nvSpPr>
               <p:cNvPr id="10" name="Freeform: Shape 17">
                 <a:extLst>
-                  <a:ext uri="{A85AF61A-00D3-434F-A95A-AC3970F77F14}">
-                    <a16:creationId xmlns:a16="http://schemas.microsoft.com/office/drawing/2010/main" id="{6811EBFB-CBA5-4610-8F27-ED9FDAB67D3E}"/>
+                  <a:ext uri="{B1F5B7B7-2041-41CE-B8D2-0976F13FF4A6}">
+                    <a16:creationId xmlns:a16="http://schemas.microsoft.com/office/drawing/2010/main" id="{722C8F2E-436C-46FF-B114-7BDB309056C0}"/>
                   </a:ext>
                 </a:extLst>
               </p:cNvPr>
@@ -852,8 +853,8 @@
             <p:nvSpPr>
               <p:cNvPr id="11" name="Oval 18">
                 <a:extLst>
-                  <a:ext uri="{6AD97FB5-072C-4DEC-B1A9-0D25061F8A66}">
-                    <a16:creationId xmlns:a16="http://schemas.microsoft.com/office/drawing/2010/main" id="{D1FB7168-4580-4012-A3FA-6AD04069A068}"/>
+                  <a:ext uri="{570EF783-EDC2-49A8-8293-BA48A3E8880D}">
+                    <a16:creationId xmlns:a16="http://schemas.microsoft.com/office/drawing/2010/main" id="{80DF5A13-377F-453F-998C-22BC5188CB20}"/>
                   </a:ext>
                 </a:extLst>
               </p:cNvPr>
@@ -913,8 +914,8 @@
             <p:nvSpPr>
               <p:cNvPr id="12" name="Oval 19">
                 <a:extLst>
-                  <a:ext uri="{CC182F25-DEC9-4109-9E6D-50DE5570CBCD}">
-                    <a16:creationId xmlns:a16="http://schemas.microsoft.com/office/drawing/2010/main" id="{681561F0-8466-42C6-A7F5-B21B78115570}"/>
+                  <a:ext uri="{D92CD3CA-5844-4A9F-8198-F1F0D385E736}">
+                    <a16:creationId xmlns:a16="http://schemas.microsoft.com/office/drawing/2010/main" id="{ABD320C1-95B1-4AAF-A7C7-2C7A5C3748D5}"/>
                   </a:ext>
                 </a:extLst>
               </p:cNvPr>
@@ -974,8 +975,8 @@
             <p:nvSpPr>
               <p:cNvPr id="13" name="Oval 20">
                 <a:extLst>
-                  <a:ext uri="{4080C637-F0E3-4D1F-8898-24A61D030F86}">
-                    <a16:creationId xmlns:a16="http://schemas.microsoft.com/office/drawing/2010/main" id="{2B0D31F1-E7E2-446D-8B98-C8E0F3500247}"/>
+                  <a:ext uri="{6BA02448-4A00-41D4-8181-A3BAA5C6CB3A}">
+                    <a16:creationId xmlns:a16="http://schemas.microsoft.com/office/drawing/2010/main" id="{70A78F30-8DDE-4A05-ADA7-4785C7E6649A}"/>
                   </a:ext>
                 </a:extLst>
               </p:cNvPr>
@@ -1037,8 +1038,8 @@
         <p:nvPicPr>
           <p:cNvPr descr="A close up of a card&#10;&#10;Description automatically generated" id="14" name="Picture 21">
             <a:extLst>
-              <a:ext uri="{E6F05875-97E1-44B8-B65D-0ADFF5F43071}">
-                <a16:creationId xmlns:a16="http://schemas.microsoft.com/office/drawing/2010/main" id="{7EB54428-C12B-4DA9-93EE-BEA69CF2E8EA}"/>
+              <a:ext uri="{1EB09ADD-2047-4D16-A153-A34D926745A1}">
+                <a16:creationId xmlns:a16="http://schemas.microsoft.com/office/drawing/2010/main" id="{DC4E6D4A-4BD7-483A-862A-77B5495C3416}"/>
               </a:ext>
             </a:extLst>
           </p:cNvPr>
@@ -1068,8 +1069,8 @@
         <p:nvPicPr>
           <p:cNvPr descr="A picture containing animal, light&#10;&#10;Description automatically generated" id="15" name="Picture 22">
             <a:extLst>
-              <a:ext uri="{A5C26975-E5FD-4590-B39A-0807F0F10BF6}">
-                <a16:creationId xmlns:a16="http://schemas.microsoft.com/office/drawing/2010/main" id="{BDD90A1B-9DA0-4CCD-A9B7-0B0949914325}"/>
+              <a:ext uri="{1B85B4C1-E9A0-4C33-A794-420C7CF3FD0E}">
+                <a16:creationId xmlns:a16="http://schemas.microsoft.com/office/drawing/2010/main" id="{596DA894-061D-4B79-B97D-CE8CA7DA3886}"/>
               </a:ext>
             </a:extLst>
           </p:cNvPr>
@@ -1102,8 +1103,8 @@
         <p:nvGrpSpPr>
           <p:cNvPr id="16" name="Group 23">
             <a:extLst>
-              <a:ext uri="{C93DB77E-E683-4DFD-B92F-FBE34C160153}">
-                <a16:creationId xmlns:a16="http://schemas.microsoft.com/office/drawing/2010/main" id="{E83D77B7-42D0-4EE1-B1A9-D0CC0F0990A5}"/>
+              <a:ext uri="{8E8FD2E7-5F72-4AC1-B02B-A7EDD1CEF7F2}">
+                <a16:creationId xmlns:a16="http://schemas.microsoft.com/office/drawing/2010/main" id="{47A540F1-186D-4083-950B-47D8899BFBAC}"/>
               </a:ext>
             </a:extLst>
           </p:cNvPr>
@@ -1122,8 +1123,8 @@
           <p:nvCxnSpPr>
             <p:cNvPr id="17" name="Straight Connector 24">
               <a:extLst>
-                <a:ext uri="{B3B5A23A-CEA1-49BE-B2D9-FC87F55444A3}">
-                  <a16:creationId xmlns:a16="http://schemas.microsoft.com/office/drawing/2010/main" id="{AA1A8071-A2D4-48EE-9234-A0264C96659B}"/>
+                <a:ext uri="{3CACDA2A-FB40-4187-BA47-77EDA5F8FE36}">
+                  <a16:creationId xmlns:a16="http://schemas.microsoft.com/office/drawing/2010/main" id="{8EB3F2EF-6040-4205-9435-3F8FF1E0D690}"/>
                 </a:ext>
               </a:extLst>
             </p:cNvPr>
@@ -1165,8 +1166,8 @@
           <p:nvSpPr>
             <p:cNvPr id="18" name="Freeform: Shape 25">
               <a:extLst>
-                <a:ext uri="{F440F92C-49AB-4A77-A4F1-99997D9AAEDC}">
-                  <a16:creationId xmlns:a16="http://schemas.microsoft.com/office/drawing/2010/main" id="{89996BE8-6527-4CB4-80B9-529554EE64B2}"/>
+                <a:ext uri="{DAB545C5-AE4A-419A-9850-9DB36B4BC0AF}">
+                  <a16:creationId xmlns:a16="http://schemas.microsoft.com/office/drawing/2010/main" id="{D33179BB-28DF-4C67-9C21-94F1480EF6F6}"/>
                 </a:ext>
               </a:extLst>
             </p:cNvPr>
@@ -1241,8 +1242,8 @@
           <p:nvSpPr>
             <p:cNvPr id="19" name="Oval 26">
               <a:extLst>
-                <a:ext uri="{1E114FF8-417C-4C37-A76E-631B83076818}">
-                  <a16:creationId xmlns:a16="http://schemas.microsoft.com/office/drawing/2010/main" id="{C110689F-2BF4-488F-B593-FB0E1C10D71A}"/>
+                <a:ext uri="{EFFB20D4-E82C-42E9-A4FD-74EB5394A48A}">
+                  <a16:creationId xmlns:a16="http://schemas.microsoft.com/office/drawing/2010/main" id="{9DA426EE-DE30-455B-A6E4-9AA55DCD80F2}"/>
                 </a:ext>
               </a:extLst>
             </p:cNvPr>
@@ -1302,8 +1303,8 @@
           <p:nvSpPr>
             <p:cNvPr id="20" name="Oval 27">
               <a:extLst>
-                <a:ext uri="{8B19FD1A-CF08-42AE-9740-81F31DA9066F}">
-                  <a16:creationId xmlns:a16="http://schemas.microsoft.com/office/drawing/2010/main" id="{BABBBEDC-DF20-4A11-8187-5DB80A68F2FB}"/>
+                <a:ext uri="{EF2B4A81-C5F1-4A6A-8C5C-2BF402898559}">
+                  <a16:creationId xmlns:a16="http://schemas.microsoft.com/office/drawing/2010/main" id="{1B80917E-D823-4454-989D-B00250BD996E}"/>
                 </a:ext>
               </a:extLst>
             </p:cNvPr>
@@ -1363,8 +1364,8 @@
           <p:nvSpPr>
             <p:cNvPr id="21" name="Oval 28">
               <a:extLst>
-                <a:ext uri="{D7FF9139-9976-42D2-9B1F-7181AF16F727}">
-                  <a16:creationId xmlns:a16="http://schemas.microsoft.com/office/drawing/2010/main" id="{E8A5A12A-68B3-4A69-B11D-888A55031CD3}"/>
+                <a:ext uri="{F7155F30-6F84-4852-861E-67A92674B276}">
+                  <a16:creationId xmlns:a16="http://schemas.microsoft.com/office/drawing/2010/main" id="{27C7085D-BB59-49C0-B11A-22AED821FD56}"/>
                 </a:ext>
               </a:extLst>
             </p:cNvPr>
@@ -1424,8 +1425,8 @@
           <p:nvSpPr>
             <p:cNvPr id="22" name="Freeform: Shape 29">
               <a:extLst>
-                <a:ext uri="{3E3426AF-E3AA-4621-B6E1-25D2E7256750}">
-                  <a16:creationId xmlns:a16="http://schemas.microsoft.com/office/drawing/2010/main" id="{1D0CB81E-084A-49A6-86DD-B461CE4CDE1F}"/>
+                <a:ext uri="{2E96578F-4859-4EC8-8390-4DA459085A00}">
+                  <a16:creationId xmlns:a16="http://schemas.microsoft.com/office/drawing/2010/main" id="{A87D7EE0-8996-49C3-8D24-FFA0E6C29104}"/>
                 </a:ext>
               </a:extLst>
             </p:cNvPr>
@@ -1500,8 +1501,8 @@
           <p:nvSpPr>
             <p:cNvPr id="23" name="Oval 30">
               <a:extLst>
-                <a:ext uri="{B71EF741-7A43-4D1E-B6B4-C5C779B75E2B}">
-                  <a16:creationId xmlns:a16="http://schemas.microsoft.com/office/drawing/2010/main" id="{BC496C12-C2D7-4276-91C7-FF4DD955DB42}"/>
+                <a:ext uri="{C2A53EBA-16E5-48F9-8A66-9F1B4A0E3249}">
+                  <a16:creationId xmlns:a16="http://schemas.microsoft.com/office/drawing/2010/main" id="{AAF0AB80-8D7E-42C8-AA73-36F080E4317B}"/>
                 </a:ext>
               </a:extLst>
             </p:cNvPr>
@@ -1561,8 +1562,8 @@
           <p:nvSpPr>
             <p:cNvPr id="24" name="Oval 31">
               <a:extLst>
-                <a:ext uri="{BE5838D7-5AD6-4C04-9DF8-CEF60068DA4F}">
-                  <a16:creationId xmlns:a16="http://schemas.microsoft.com/office/drawing/2010/main" id="{1713DDDF-1957-418D-AC50-0647DBA16B22}"/>
+                <a:ext uri="{B24BFF35-F859-4106-9D28-C4BC45B5872F}">
+                  <a16:creationId xmlns:a16="http://schemas.microsoft.com/office/drawing/2010/main" id="{E35A211E-D073-4564-9FDF-8BFF24E3D953}"/>
                 </a:ext>
               </a:extLst>
             </p:cNvPr>
@@ -1622,8 +1623,8 @@
           <p:nvSpPr>
             <p:cNvPr id="25" name="Oval 32">
               <a:extLst>
-                <a:ext uri="{F207049A-2987-4648-9388-52738FE7004C}">
-                  <a16:creationId xmlns:a16="http://schemas.microsoft.com/office/drawing/2010/main" id="{C84A1F95-203E-4DC2-AF25-9953FBD54BB8}"/>
+                <a:ext uri="{29151230-CAA4-4827-AE0E-1B338F5E3A0F}">
+                  <a16:creationId xmlns:a16="http://schemas.microsoft.com/office/drawing/2010/main" id="{2B8C2FFD-F1C9-46E9-8ACD-375FB9CE9806}"/>
                 </a:ext>
               </a:extLst>
             </p:cNvPr>
@@ -1684,8 +1685,8 @@
         <p:nvPicPr>
           <p:cNvPr descr="A close up of a logo&#10;&#10;Description automatically generated" id="26" name="Picture 33">
             <a:extLst>
-              <a:ext uri="{B07155D3-9EC0-42C9-A57B-6DE12DA846CB}">
-                <a16:creationId xmlns:a16="http://schemas.microsoft.com/office/drawing/2010/main" id="{0C582760-C0D3-4522-8E98-1639545BEDEB}"/>
+              <a:ext uri="{E32B4138-685E-4561-B347-417C2FED98EC}">
+                <a16:creationId xmlns:a16="http://schemas.microsoft.com/office/drawing/2010/main" id="{2C5451B8-730C-47C2-B657-3278A0B3E4B9}"/>
               </a:ext>
             </a:extLst>
           </p:cNvPr>
@@ -1715,8 +1716,8 @@
         <p:nvSpPr>
           <p:cNvPr hidden="false" id="27" name="Title 1">
             <a:extLst>
-              <a:ext uri="{6A23BDF5-3785-4BFF-86F4-A8B580F18ED5}">
-                <a16:creationId xmlns:a16="http://schemas.microsoft.com/office/drawing/2010/main" id="{0C76A606-9590-479B-A018-93C3A63FA7D1}"/>
+              <a:ext uri="{8031A7A5-F7C5-4979-B29A-CF397914ACBB}">
+                <a16:creationId xmlns:a16="http://schemas.microsoft.com/office/drawing/2010/main" id="{8B656B26-B276-43FB-AF25-0D5DDE6F00AE}"/>
               </a:ext>
             </a:extLst>
           </p:cNvPr>
@@ -1764,8 +1765,8 @@
         <p:nvSpPr>
           <p:cNvPr id="28" name="Subtitle 2">
             <a:extLst>
-              <a:ext uri="{404B708E-8EAB-4F62-AD2A-8F6B42EB9E0C}">
-                <a16:creationId xmlns:a16="http://schemas.microsoft.com/office/drawing/2010/main" id="{A72B1E6D-92B5-4EFE-8320-F79068199E20}"/>
+              <a:ext uri="{48B9FF0E-47A4-4F8B-8740-D34E4849AE84}">
+                <a16:creationId xmlns:a16="http://schemas.microsoft.com/office/drawing/2010/main" id="{F567CC51-4160-496F-8A51-613D7C866C65}"/>
               </a:ext>
             </a:extLst>
           </p:cNvPr>
@@ -1842,8 +1843,8 @@
         <p:nvSpPr>
           <p:cNvPr id="29" name="Text Placeholder 35">
             <a:extLst>
-              <a:ext uri="{FC09CCA3-0297-4C94-8AC3-EF65495B03AE}">
-                <a16:creationId xmlns:a16="http://schemas.microsoft.com/office/drawing/2010/main" id="{E773524B-EA1D-4EB5-9D2A-EC3BAB5CC312}"/>
+              <a:ext uri="{C9955DC6-9F88-4106-A7AF-E5FA610C8540}">
+                <a16:creationId xmlns:a16="http://schemas.microsoft.com/office/drawing/2010/main" id="{191F14E8-2302-4E84-9151-DD3CEAF3570C}"/>
               </a:ext>
             </a:extLst>
           </p:cNvPr>
@@ -1901,8 +1902,8 @@
         <p:nvSpPr>
           <p:cNvPr hidden="false" id="30" name="Date Placeholder 1">
             <a:extLst>
-              <a:ext uri="{9B9A6DE1-5535-4B3B-A695-1DBEE1C39439}">
-                <a16:creationId xmlns:a16="http://schemas.microsoft.com/office/drawing/2010/main" id="{32F9B771-AEEE-4841-956E-488805D681F9}"/>
+              <a:ext uri="{A35ECA93-1947-46EF-95C1-9D0535C7FF62}">
+                <a16:creationId xmlns:a16="http://schemas.microsoft.com/office/drawing/2010/main" id="{BB5D5B2F-B188-4335-8DA6-73A77AD260D3}"/>
               </a:ext>
             </a:extLst>
           </p:cNvPr>
@@ -1950,8 +1951,8 @@
         <p:nvSpPr>
           <p:cNvPr hidden="false" id="31" name="Footer Placeholder 1">
             <a:extLst>
-              <a:ext uri="{1E969D72-F3D7-40DC-9176-07247353AE11}">
-                <a16:creationId xmlns:a16="http://schemas.microsoft.com/office/drawing/2010/main" id="{7453E913-DAE5-466C-8A60-4C004ADF4B39}"/>
+              <a:ext uri="{A8942DA7-C91E-44EB-804E-6F45365D1EBB}">
+                <a16:creationId xmlns:a16="http://schemas.microsoft.com/office/drawing/2010/main" id="{4D217E39-8A57-40D1-9F95-BC2BCDC96591}"/>
               </a:ext>
             </a:extLst>
           </p:cNvPr>
@@ -1999,8 +2000,8 @@
         <p:nvSpPr>
           <p:cNvPr id="32" name="Slide Number Placeholder 7">
             <a:extLst>
-              <a:ext uri="{38FC2021-9D09-47C5-9721-62E57A41CFB6}">
-                <a16:creationId xmlns:a16="http://schemas.microsoft.com/office/drawing/2010/main" id="{61C727CF-7F65-4C86-A42B-31301DE2AF27}"/>
+              <a:ext uri="{10068142-5D78-48BD-B4C1-B9EB49364138}">
+                <a16:creationId xmlns:a16="http://schemas.microsoft.com/office/drawing/2010/main" id="{897E8D8B-3E0C-4618-840F-2C940BFBCF3C}"/>
               </a:ext>
             </a:extLst>
           </p:cNvPr>
@@ -2043,8 +2044,8 @@
       </p:sp>
     </p:spTree>
     <p:extLst>
-      <p:ext uri="{5B586505-EE9A-48C7-91DC-00F4AA0DBFE9}">
-        <p14:creationId xmlns:p14="http://schemas.microsoft.com/office/powerpoint/2010/main" val="1713420158693"/>
+      <p:ext uri="{500D73BD-8E3C-4AE6-9954-7F9EFE544286}">
+        <p14:creationId xmlns:p14="http://schemas.microsoft.com/office/powerpoint/2010/main" val="1713440222459"/>
       </p:ext>
     </p:extLst>
   </p:cSld>
@@ -2075,8 +2076,8 @@
         <p:nvPicPr>
           <p:cNvPr id="2" name="Picture 7">
             <a:extLst>
-              <a:ext uri="{CA518DAF-78A1-42DC-862E-00375354E5DA}">
-                <a16:creationId xmlns:a16="http://schemas.microsoft.com/office/drawing/2010/main" id="{D94F2A38-5152-4DDD-BD2D-CB6411A4BFAB}"/>
+              <a:ext uri="{FFE718EE-108B-4F45-B3CA-9E7570047B25}">
+                <a16:creationId xmlns:a16="http://schemas.microsoft.com/office/drawing/2010/main" id="{B3C09A04-B09E-46BE-8768-99B6BBA55697}"/>
               </a:ext>
             </a:extLst>
           </p:cNvPr>
@@ -2109,8 +2110,8 @@
         <p:nvPicPr>
           <p:cNvPr id="3" name="Picture 6">
             <a:extLst>
-              <a:ext uri="{50D1AAF9-78B5-4F47-8A06-D7E6A9FB942A}">
-                <a16:creationId xmlns:a16="http://schemas.microsoft.com/office/drawing/2010/main" id="{D352BF2A-E8A8-4874-B761-F54D22455A33}"/>
+              <a:ext uri="{A1BAD3D4-CAA8-4486-996C-EE90BCD35B0B}">
+                <a16:creationId xmlns:a16="http://schemas.microsoft.com/office/drawing/2010/main" id="{ECF96695-CC2D-44EF-8E7B-66EFC0CEBA2D}"/>
               </a:ext>
             </a:extLst>
           </p:cNvPr>
@@ -2143,8 +2144,8 @@
         <p:nvSpPr>
           <p:cNvPr id="4" name="Title 1">
             <a:extLst>
-              <a:ext uri="{D441EE74-2442-4968-AA46-B5F4C865EB9E}">
-                <a16:creationId xmlns:a16="http://schemas.microsoft.com/office/drawing/2010/main" id="{6C659D46-6697-43CC-89B8-393946DE427B}"/>
+              <a:ext uri="{7FF581AC-3163-4CD7-BEF7-CE88E8B9E44D}">
+                <a16:creationId xmlns:a16="http://schemas.microsoft.com/office/drawing/2010/main" id="{5AAD1D21-DC42-40BE-A5F5-FF80A53006E3}"/>
               </a:ext>
             </a:extLst>
           </p:cNvPr>
@@ -2186,8 +2187,8 @@
         <p:nvSpPr>
           <p:cNvPr id="5" name="Slide Number Placeholder 5">
             <a:extLst>
-              <a:ext uri="{509C1592-3853-4E83-89A1-9000DCC61B14}">
-                <a16:creationId xmlns:a16="http://schemas.microsoft.com/office/drawing/2010/main" id="{78D9535D-6830-48F2-A737-A1A4F0C94D3C}"/>
+              <a:ext uri="{9103017B-BC7B-4677-8F8E-C5D686C9D97C}">
+                <a16:creationId xmlns:a16="http://schemas.microsoft.com/office/drawing/2010/main" id="{7B5917E5-5D04-4C97-BDB6-DFD8244F4B0F}"/>
               </a:ext>
             </a:extLst>
           </p:cNvPr>
@@ -2220,7 +2221,7 @@
           </a:lstStyle>
           <a:p>
             <a:pPr/>
-            <a:fld id="{AED1F37D-C758-4CA9-B2D1-0304FFE924D2}" type="slidenum"/>
+            <a:fld id="{806BF3B7-CA33-4F98-9615-06042DDB9238}" type="slidenum"/>
             <a:endParaRPr dirty="0" lang="en-US"/>
           </a:p>
         </p:txBody>
@@ -2229,8 +2230,8 @@
         <p:nvGrpSpPr>
           <p:cNvPr id="6" name="Group 8">
             <a:extLst>
-              <a:ext uri="{FA26EFB2-02D9-4F43-AF79-AADA82BF5E3D}">
-                <a16:creationId xmlns:a16="http://schemas.microsoft.com/office/drawing/2010/main" id="{0A24C9CB-A008-4C0A-81EA-12F131419B9F}"/>
+              <a:ext uri="{DFE27444-66A1-4095-9E17-8BAC46626E9D}">
+                <a16:creationId xmlns:a16="http://schemas.microsoft.com/office/drawing/2010/main" id="{78437950-84AB-4360-A580-74E7E8CE30E8}"/>
               </a:ext>
             </a:extLst>
           </p:cNvPr>
@@ -2249,8 +2250,8 @@
           <p:nvCxnSpPr>
             <p:cNvPr id="7" name="Straight Connector 14">
               <a:extLst>
-                <a:ext uri="{04C4144C-361F-4E61-9940-1644EB174E7F}">
-                  <a16:creationId xmlns:a16="http://schemas.microsoft.com/office/drawing/2010/main" id="{00486FAF-4144-4439-A814-100248E006B9}"/>
+                <a:ext uri="{9F493960-0130-4ED7-8925-F3B7E3F56306}">
+                  <a16:creationId xmlns:a16="http://schemas.microsoft.com/office/drawing/2010/main" id="{DC9A5CFA-5F60-4784-90D4-46F290774195}"/>
                 </a:ext>
               </a:extLst>
             </p:cNvPr>
@@ -2292,8 +2293,8 @@
           <p:nvSpPr>
             <p:cNvPr id="8" name="Freeform: Shape 15">
               <a:extLst>
-                <a:ext uri="{87A68AF3-A11C-4D6E-A90C-B6EA5A6F2D37}">
-                  <a16:creationId xmlns:a16="http://schemas.microsoft.com/office/drawing/2010/main" id="{FC7F7551-0CF9-4060-B5E3-42BFFE28D244}"/>
+                <a:ext uri="{D513F030-3D14-4466-87AD-44CBAC251527}">
+                  <a16:creationId xmlns:a16="http://schemas.microsoft.com/office/drawing/2010/main" id="{5A39F3CC-7FD7-4893-8C63-0C7B370258F6}"/>
                 </a:ext>
               </a:extLst>
             </p:cNvPr>
@@ -2368,8 +2369,8 @@
           <p:nvSpPr>
             <p:cNvPr id="9" name="Oval 16">
               <a:extLst>
-                <a:ext uri="{9B98EE34-7394-4524-B3C8-F723FA2A0E89}">
-                  <a16:creationId xmlns:a16="http://schemas.microsoft.com/office/drawing/2010/main" id="{C4CB8886-EB91-4B54-BD55-3BD09647DB8C}"/>
+                <a:ext uri="{A4495B2D-2F17-4FE5-BDB6-648E619B3A67}">
+                  <a16:creationId xmlns:a16="http://schemas.microsoft.com/office/drawing/2010/main" id="{AC638EE8-608A-427C-9B61-FADDCEA47C09}"/>
                 </a:ext>
               </a:extLst>
             </p:cNvPr>
@@ -2429,8 +2430,8 @@
           <p:nvSpPr>
             <p:cNvPr id="10" name="Oval 18">
               <a:extLst>
-                <a:ext uri="{26210789-6CD6-4B55-87A5-F7E74AA781F1}">
-                  <a16:creationId xmlns:a16="http://schemas.microsoft.com/office/drawing/2010/main" id="{C1D9B52B-3A45-4882-938E-4A36BD5FD8A4}"/>
+                <a:ext uri="{C351DBE0-EECA-4AF6-A84D-983C26289E73}">
+                  <a16:creationId xmlns:a16="http://schemas.microsoft.com/office/drawing/2010/main" id="{02924F35-85DE-485B-9485-3E00CBD48EC4}"/>
                 </a:ext>
               </a:extLst>
             </p:cNvPr>
@@ -2490,8 +2491,8 @@
           <p:nvSpPr>
             <p:cNvPr id="11" name="Oval 20">
               <a:extLst>
-                <a:ext uri="{621D85E6-AA8B-4720-8EF3-6D10E531F868}">
-                  <a16:creationId xmlns:a16="http://schemas.microsoft.com/office/drawing/2010/main" id="{613EE216-004D-463A-B503-3367A059984D}"/>
+                <a:ext uri="{037DB85D-D48E-48A3-843A-0A66B5A495F5}">
+                  <a16:creationId xmlns:a16="http://schemas.microsoft.com/office/drawing/2010/main" id="{788430B5-EC6E-4D61-A78F-6D7499533998}"/>
                 </a:ext>
               </a:extLst>
             </p:cNvPr>
@@ -2551,8 +2552,8 @@
           <p:nvSpPr>
             <p:cNvPr id="12" name="Oval 21">
               <a:extLst>
-                <a:ext uri="{BF806309-1D89-4574-AD17-E82E3D83BF03}">
-                  <a16:creationId xmlns:a16="http://schemas.microsoft.com/office/drawing/2010/main" id="{779914A9-70BB-4910-9C86-06D2EEA9C963}"/>
+                <a:ext uri="{CA33306D-37C9-4C37-A39A-824AC2A13E17}">
+                  <a16:creationId xmlns:a16="http://schemas.microsoft.com/office/drawing/2010/main" id="{AD6A16B5-BB60-4B04-9C02-C00E8CDC2C2F}"/>
                 </a:ext>
               </a:extLst>
             </p:cNvPr>
@@ -2612,8 +2613,8 @@
           <p:nvPicPr>
             <p:cNvPr descr="A close up of a logo&#10;&#10;Description automatically generated" id="13" name="Picture 12">
               <a:extLst>
-                <a:ext uri="{7D19C105-9AE0-407D-BAAC-A56C9488F46C}">
-                  <a16:creationId xmlns:a16="http://schemas.microsoft.com/office/drawing/2010/main" id="{2DE16A02-4029-45DB-8249-F63DC00DCA91}"/>
+                <a:ext uri="{91B1DED0-52B8-48A2-BBD8-CE86DEE7E99F}">
+                  <a16:creationId xmlns:a16="http://schemas.microsoft.com/office/drawing/2010/main" id="{643E70C9-B4BA-411E-9499-C6086D589359}"/>
                 </a:ext>
               </a:extLst>
             </p:cNvPr>
@@ -2643,8 +2644,8 @@
           <p:nvPicPr>
             <p:cNvPr descr="A close up of a logo&#10;&#10;Description automatically generated" id="14" name="Picture 11">
               <a:extLst>
-                <a:ext uri="{27D651C7-FB0F-44A2-BB64-259CC237CF96}">
-                  <a16:creationId xmlns:a16="http://schemas.microsoft.com/office/drawing/2010/main" id="{75BB4F3E-DA6B-46F5-82BE-1D9C917B3A9D}"/>
+                <a:ext uri="{5CD83302-8C49-44E4-95E6-5BD18889002F}">
+                  <a16:creationId xmlns:a16="http://schemas.microsoft.com/office/drawing/2010/main" id="{98096ADA-8C08-42C7-8D16-72D781CF4E1A}"/>
                 </a:ext>
               </a:extLst>
             </p:cNvPr>
@@ -2675,8 +2676,8 @@
         <p:nvPicPr>
           <p:cNvPr descr="A close up of a card&#10;&#10;Description automatically generated" id="15" name="Picture 22">
             <a:extLst>
-              <a:ext uri="{BA36D2F3-2E09-40E1-A4BE-BCB88A96F702}">
-                <a16:creationId xmlns:a16="http://schemas.microsoft.com/office/drawing/2010/main" id="{61A20291-E8F7-4F71-BBFD-CC6831AC2220}"/>
+              <a:ext uri="{7B8EA743-8180-4642-9FE1-19C45D7F5341}">
+                <a16:creationId xmlns:a16="http://schemas.microsoft.com/office/drawing/2010/main" id="{5310996D-6D13-4850-8A64-022B753CA968}"/>
               </a:ext>
             </a:extLst>
           </p:cNvPr>
@@ -2706,8 +2707,8 @@
         <p:nvSpPr>
           <p:cNvPr id="16" name="Oval 23">
             <a:extLst>
-              <a:ext uri="{9058248C-A5CD-4D1C-ADDB-8E7765956106}">
-                <a16:creationId xmlns:a16="http://schemas.microsoft.com/office/drawing/2010/main" id="{C3D201E8-7E4A-498F-AA5D-7933E2C2A581}"/>
+              <a:ext uri="{37DE6E5A-6BD1-4B7B-893D-23AA8B2A36A3}">
+                <a16:creationId xmlns:a16="http://schemas.microsoft.com/office/drawing/2010/main" id="{F69172B7-57D3-48ED-9EE8-3E3D57AAA559}"/>
               </a:ext>
             </a:extLst>
           </p:cNvPr>
@@ -2767,8 +2768,8 @@
         <p:nvSpPr>
           <p:cNvPr id="17" name="Text Placeholder 4">
             <a:extLst>
-              <a:ext uri="{8AFD7165-64C8-4DC4-BBD4-6FDFE0927828}">
-                <a16:creationId xmlns:a16="http://schemas.microsoft.com/office/drawing/2010/main" id="{77C2235B-CD8D-422F-A894-3FBA8F75B7F0}"/>
+              <a:ext uri="{82B78FE1-F1F4-4669-B116-C45225236235}">
+                <a16:creationId xmlns:a16="http://schemas.microsoft.com/office/drawing/2010/main" id="{831798C9-C36D-4947-8D58-FF7E2C9CF322}"/>
               </a:ext>
             </a:extLst>
           </p:cNvPr>
@@ -2851,8 +2852,8 @@
         <p:nvSpPr>
           <p:cNvPr hidden="false" id="18" name="Date Placeholder 1">
             <a:extLst>
-              <a:ext uri="{53FBD815-6854-4106-AE6D-D96F4C5A1841}">
-                <a16:creationId xmlns:a16="http://schemas.microsoft.com/office/drawing/2010/main" id="{94C683BE-3D92-4318-9F6C-700AC6BB5510}"/>
+              <a:ext uri="{66C4BD8A-7F2F-45E6-94BC-E31BB3CE325B}">
+                <a16:creationId xmlns:a16="http://schemas.microsoft.com/office/drawing/2010/main" id="{16860CE7-27DD-4BBA-BA34-384F1FB8ED7C}"/>
               </a:ext>
             </a:extLst>
           </p:cNvPr>
@@ -2900,8 +2901,8 @@
         <p:nvSpPr>
           <p:cNvPr hidden="false" id="19" name="Footer Placeholder 1">
             <a:extLst>
-              <a:ext uri="{C45A8590-E65E-40F7-8DF7-4934EBD1FA9B}">
-                <a16:creationId xmlns:a16="http://schemas.microsoft.com/office/drawing/2010/main" id="{8A4600C3-5DF3-4F9A-8C01-3E88051E63D5}"/>
+              <a:ext uri="{93247F3C-A2FD-447F-B42B-502B5C7B3110}">
+                <a16:creationId xmlns:a16="http://schemas.microsoft.com/office/drawing/2010/main" id="{70B42936-732A-43CF-BF52-23A12CE1F31E}"/>
               </a:ext>
             </a:extLst>
           </p:cNvPr>
@@ -2947,8 +2948,8 @@
       </p:sp>
     </p:spTree>
     <p:extLst>
-      <p:ext uri="{2D8C1B29-C4D8-4A6D-8199-0737EA4BDB0A}">
-        <p14:creationId xmlns:p14="http://schemas.microsoft.com/office/powerpoint/2010/main" val="1713420158728"/>
+      <p:ext uri="{5A39EAC5-371A-4E4B-B37C-5DD435BF0E98}">
+        <p14:creationId xmlns:p14="http://schemas.microsoft.com/office/powerpoint/2010/main" val="1713440222485"/>
       </p:ext>
     </p:extLst>
   </p:cSld>
@@ -2979,8 +2980,8 @@
         <p:nvPicPr>
           <p:cNvPr id="2" name="Picture 7">
             <a:extLst>
-              <a:ext uri="{51FF6D64-0C28-4B1B-9C1F-56A07645B70C}">
-                <a16:creationId xmlns:a16="http://schemas.microsoft.com/office/drawing/2010/main" id="{0758F1F2-0223-4425-B6DE-FB9F9796F757}"/>
+              <a:ext uri="{5E0E3F9A-9465-4A21-AEEA-C51D53E3687B}">
+                <a16:creationId xmlns:a16="http://schemas.microsoft.com/office/drawing/2010/main" id="{D5C8C14E-1845-438B-B348-C075299662CB}"/>
               </a:ext>
             </a:extLst>
           </p:cNvPr>
@@ -3013,8 +3014,8 @@
         <p:nvPicPr>
           <p:cNvPr id="3" name="Picture 6">
             <a:extLst>
-              <a:ext uri="{377029F6-9F79-46A2-B0DF-FA81137827B2}">
-                <a16:creationId xmlns:a16="http://schemas.microsoft.com/office/drawing/2010/main" id="{67F308E8-9590-41EF-9BC4-367FD770AA88}"/>
+              <a:ext uri="{EF71CE4E-8145-474A-B177-0F6AD96B4256}">
+                <a16:creationId xmlns:a16="http://schemas.microsoft.com/office/drawing/2010/main" id="{7754E118-7060-4C8A-972E-608688DE8BF7}"/>
               </a:ext>
             </a:extLst>
           </p:cNvPr>
@@ -3047,8 +3048,8 @@
         <p:nvSpPr>
           <p:cNvPr id="4" name="Freeform: Shape 19">
             <a:extLst>
-              <a:ext uri="{8EA39B44-07E1-4E42-8953-3AF49C1E4F08}">
-                <a16:creationId xmlns:a16="http://schemas.microsoft.com/office/drawing/2010/main" id="{4E1CF55A-FAE8-4658-ADDC-F40C6B362D92}"/>
+              <a:ext uri="{B9AE00FA-C779-4552-8ADE-A1207824C85C}">
+                <a16:creationId xmlns:a16="http://schemas.microsoft.com/office/drawing/2010/main" id="{BF7EBBBD-2809-4B2D-B744-C19C30FD6062}"/>
               </a:ext>
             </a:extLst>
           </p:cNvPr>
@@ -3123,8 +3124,8 @@
         <p:nvSpPr>
           <p:cNvPr hidden="false" id="5" name="Title 1">
             <a:extLst>
-              <a:ext uri="{684FA0AA-706B-4095-8E46-DA81A8886AA9}">
-                <a16:creationId xmlns:a16="http://schemas.microsoft.com/office/drawing/2010/main" id="{C1D68604-1312-42D7-844F-878E56A5178B}"/>
+              <a:ext uri="{9054DDC8-4262-41BE-B3E9-201786345A18}">
+                <a16:creationId xmlns:a16="http://schemas.microsoft.com/office/drawing/2010/main" id="{2CF4D638-065E-4576-8699-42F4585011B3}"/>
               </a:ext>
             </a:extLst>
           </p:cNvPr>
@@ -3169,8 +3170,8 @@
         <p:nvSpPr>
           <p:cNvPr id="6" name="Slide Number Placeholder 5">
             <a:extLst>
-              <a:ext uri="{60DEA66E-C1C9-4C66-AE1E-2DF1CB384C59}">
-                <a16:creationId xmlns:a16="http://schemas.microsoft.com/office/drawing/2010/main" id="{41E3F3F8-6BFF-4F30-B020-BDCC3A469214}"/>
+              <a:ext uri="{62B50C87-9788-4B68-A0C7-871C71BDA070}">
+                <a16:creationId xmlns:a16="http://schemas.microsoft.com/office/drawing/2010/main" id="{3F0DB3F0-719F-4B45-8D64-14C63AAF702F}"/>
               </a:ext>
             </a:extLst>
           </p:cNvPr>
@@ -3203,7 +3204,7 @@
           </a:lstStyle>
           <a:p>
             <a:pPr/>
-            <a:fld id="{9576B4A0-6602-4ACA-AC69-57E21E56A8EB}" type="slidenum"/>
+            <a:fld id="{17A4BDA2-6ACB-4395-87B6-F5ABC15A315F}" type="slidenum"/>
             <a:endParaRPr dirty="0" lang="en-US"/>
           </a:p>
         </p:txBody>
@@ -3212,8 +3213,8 @@
         <p:nvCxnSpPr>
           <p:cNvPr id="7" name="Straight Connector 14">
             <a:extLst>
-              <a:ext uri="{7929F4CD-CBE4-477C-8EC8-E28ED35DD06A}">
-                <a16:creationId xmlns:a16="http://schemas.microsoft.com/office/drawing/2010/main" id="{D902A25D-9F10-45EE-9068-453599058C0C}"/>
+              <a:ext uri="{CAA9F4BB-2822-4F83-83F0-1F8D6C759E76}">
+                <a16:creationId xmlns:a16="http://schemas.microsoft.com/office/drawing/2010/main" id="{1614947B-3361-426A-A8ED-0D712D0B5091}"/>
               </a:ext>
             </a:extLst>
           </p:cNvPr>
@@ -3255,8 +3256,8 @@
         <p:nvSpPr>
           <p:cNvPr id="8" name="Freeform: Shape 15">
             <a:extLst>
-              <a:ext uri="{06905071-AF74-4615-9E60-3C25AACA050D}">
-                <a16:creationId xmlns:a16="http://schemas.microsoft.com/office/drawing/2010/main" id="{A8628110-5CAF-4710-89DA-B9A311F0E1D4}"/>
+              <a:ext uri="{C6F4CC0C-8CF2-4AA0-BAE8-CEDCDB3AC936}">
+                <a16:creationId xmlns:a16="http://schemas.microsoft.com/office/drawing/2010/main" id="{205A6A0C-8FF6-4BAB-84F5-176A3A5E444C}"/>
               </a:ext>
             </a:extLst>
           </p:cNvPr>
@@ -3331,8 +3332,8 @@
         <p:nvSpPr>
           <p:cNvPr id="9" name="Oval 16">
             <a:extLst>
-              <a:ext uri="{2CB71C35-8CFC-482B-B8A6-08730505E6D9}">
-                <a16:creationId xmlns:a16="http://schemas.microsoft.com/office/drawing/2010/main" id="{A6D3AA15-6315-42F4-BD3B-4A5675A5A130}"/>
+              <a:ext uri="{22386B06-C22A-41F4-8DAA-4E48440C5869}">
+                <a16:creationId xmlns:a16="http://schemas.microsoft.com/office/drawing/2010/main" id="{004E7B82-2CC2-4863-9D66-14D751B79D49}"/>
               </a:ext>
             </a:extLst>
           </p:cNvPr>
@@ -3392,8 +3393,8 @@
         <p:nvSpPr>
           <p:cNvPr id="10" name="Oval 17">
             <a:extLst>
-              <a:ext uri="{08F1E4D5-CF31-4259-A3CE-A92A8ED0F79C}">
-                <a16:creationId xmlns:a16="http://schemas.microsoft.com/office/drawing/2010/main" id="{13694DBA-C3AF-4506-9457-A55A6B82A8B5}"/>
+              <a:ext uri="{8B2A0E79-7360-4268-BBEC-913FB6580D5B}">
+                <a16:creationId xmlns:a16="http://schemas.microsoft.com/office/drawing/2010/main" id="{FC4979C8-4AB4-4854-AF31-75F5E0F7FAA3}"/>
               </a:ext>
             </a:extLst>
           </p:cNvPr>
@@ -3453,8 +3454,8 @@
         <p:nvSpPr>
           <p:cNvPr id="11" name="Oval 18">
             <a:extLst>
-              <a:ext uri="{5E4B7F40-474A-407F-B837-9C1059691F09}">
-                <a16:creationId xmlns:a16="http://schemas.microsoft.com/office/drawing/2010/main" id="{23708AAA-C2F9-43C3-8D42-A3599E311DA5}"/>
+              <a:ext uri="{488A26A5-03F0-4488-B8D6-56A5FF20CC23}">
+                <a16:creationId xmlns:a16="http://schemas.microsoft.com/office/drawing/2010/main" id="{44870D80-D742-4573-9EA5-83C72A997AEB}"/>
               </a:ext>
             </a:extLst>
           </p:cNvPr>
@@ -3514,8 +3515,8 @@
         <p:nvSpPr>
           <p:cNvPr id="12" name="Oval 20">
             <a:extLst>
-              <a:ext uri="{AFEC053A-A185-4B2E-AC6C-96A188688961}">
-                <a16:creationId xmlns:a16="http://schemas.microsoft.com/office/drawing/2010/main" id="{31041F02-A4B1-4B79-85D1-55440D2BDFB5}"/>
+              <a:ext uri="{8EF875ED-DDFA-4EF8-A060-F42111BA597A}">
+                <a16:creationId xmlns:a16="http://schemas.microsoft.com/office/drawing/2010/main" id="{D1CCA535-D691-42EA-A398-61AFC09F64B2}"/>
               </a:ext>
             </a:extLst>
           </p:cNvPr>
@@ -3575,8 +3576,8 @@
         <p:nvSpPr>
           <p:cNvPr id="13" name="Oval 21">
             <a:extLst>
-              <a:ext uri="{A0101C58-5B32-43A5-9B4F-D32EA25C8317}">
-                <a16:creationId xmlns:a16="http://schemas.microsoft.com/office/drawing/2010/main" id="{C5516BC3-AA2E-43FF-929A-7868B81127D0}"/>
+              <a:ext uri="{C5973ED0-D978-41D5-B059-DFA4DB40B424}">
+                <a16:creationId xmlns:a16="http://schemas.microsoft.com/office/drawing/2010/main" id="{77AE7BE7-9044-483A-96C9-EC6461FB24AF}"/>
               </a:ext>
             </a:extLst>
           </p:cNvPr>
@@ -3636,8 +3637,8 @@
         <p:nvSpPr>
           <p:cNvPr id="14" name="Oval 22">
             <a:extLst>
-              <a:ext uri="{D93F2866-75B2-4FF9-B2B4-E110F1662FA7}">
-                <a16:creationId xmlns:a16="http://schemas.microsoft.com/office/drawing/2010/main" id="{9E012649-F73C-46EF-A7D6-2FE234727965}"/>
+              <a:ext uri="{043B851C-E233-443E-B101-011B8309162A}">
+                <a16:creationId xmlns:a16="http://schemas.microsoft.com/office/drawing/2010/main" id="{114CCB1B-3E9B-47AC-80B4-31EA2FE1F987}"/>
               </a:ext>
             </a:extLst>
           </p:cNvPr>
@@ -3697,8 +3698,8 @@
         <p:nvPicPr>
           <p:cNvPr descr="A close up of a logo&#10;&#10;Description automatically generated" id="15" name="Picture 12">
             <a:extLst>
-              <a:ext uri="{F810BDE7-F947-484E-BFEC-401AA1D28EE8}">
-                <a16:creationId xmlns:a16="http://schemas.microsoft.com/office/drawing/2010/main" id="{3DAAAF00-DB26-4C6C-B813-2D991929C6D7}"/>
+              <a:ext uri="{4A7EC570-C426-4549-9A6F-CEEBA97E229D}">
+                <a16:creationId xmlns:a16="http://schemas.microsoft.com/office/drawing/2010/main" id="{3C2ECEC6-C3E9-4C85-9A3E-51F98AFDDD62}"/>
               </a:ext>
             </a:extLst>
           </p:cNvPr>
@@ -3728,8 +3729,8 @@
         <p:nvPicPr>
           <p:cNvPr descr="A close up of a logo&#10;&#10;Description automatically generated" id="16" name="Picture 11">
             <a:extLst>
-              <a:ext uri="{B7C1E348-54DB-4281-A79B-AEDAAE761818}">
-                <a16:creationId xmlns:a16="http://schemas.microsoft.com/office/drawing/2010/main" id="{B0752113-26BC-4D79-A2E5-1132E2020D79}"/>
+              <a:ext uri="{2D7042A5-F526-4D27-8B2A-739984B1E2DB}">
+                <a16:creationId xmlns:a16="http://schemas.microsoft.com/office/drawing/2010/main" id="{DF5E40A1-16E8-4D4A-9ADE-C128B612C5D3}"/>
               </a:ext>
             </a:extLst>
           </p:cNvPr>
@@ -3759,8 +3760,8 @@
         <p:nvSpPr>
           <p:cNvPr id="17" name="Text Placeholder 4">
             <a:extLst>
-              <a:ext uri="{A06CC6B8-E7FC-4AAD-9C2F-64B2C9797A13}">
-                <a16:creationId xmlns:a16="http://schemas.microsoft.com/office/drawing/2010/main" id="{86896136-095A-43D2-9A9E-C2CDF9ECAD1C}"/>
+              <a:ext uri="{19861176-5668-40DB-A5C3-20A7EEF68E1E}">
+                <a16:creationId xmlns:a16="http://schemas.microsoft.com/office/drawing/2010/main" id="{7406634B-E749-420A-B35B-903128F7C8D9}"/>
               </a:ext>
             </a:extLst>
           </p:cNvPr>
@@ -3843,8 +3844,8 @@
         <p:nvSpPr>
           <p:cNvPr id="18" name="Picture Placeholder 9">
             <a:extLst>
-              <a:ext uri="{B6574F37-A3FC-41CF-AA48-84D3B17F9A3E}">
-                <a16:creationId xmlns:a16="http://schemas.microsoft.com/office/drawing/2010/main" id="{ABB7334F-48B8-43F5-870A-EFD6A8DE9E73}"/>
+              <a:ext uri="{3EB8FB54-9A9C-4D7E-9322-F0BBA0B3FB5D}">
+                <a16:creationId xmlns:a16="http://schemas.microsoft.com/office/drawing/2010/main" id="{314C4AD4-05F6-4626-80F0-028757A2F56C}"/>
               </a:ext>
             </a:extLst>
           </p:cNvPr>
@@ -3886,8 +3887,8 @@
         <p:nvSpPr>
           <p:cNvPr hidden="false" id="19" name="Date Placeholder 1">
             <a:extLst>
-              <a:ext uri="{488406FE-9859-4FCE-8186-A70ED230258C}">
-                <a16:creationId xmlns:a16="http://schemas.microsoft.com/office/drawing/2010/main" id="{4C2AE545-081E-4185-AD59-890144B8AA25}"/>
+              <a:ext uri="{0DACCE9E-0F73-412D-ADEB-622CDF3C790F}">
+                <a16:creationId xmlns:a16="http://schemas.microsoft.com/office/drawing/2010/main" id="{CE803E27-703A-4A00-86A9-A35B93115D1B}"/>
               </a:ext>
             </a:extLst>
           </p:cNvPr>
@@ -3935,8 +3936,8 @@
         <p:nvSpPr>
           <p:cNvPr hidden="false" id="20" name="Footer Placeholder 1">
             <a:extLst>
-              <a:ext uri="{3A14DEBE-BA87-43AC-90EB-BEC6D9CC65BB}">
-                <a16:creationId xmlns:a16="http://schemas.microsoft.com/office/drawing/2010/main" id="{CAB59381-9EBE-4C7C-A097-2F9314B74F34}"/>
+              <a:ext uri="{2A9B232D-44C5-4A93-B3F5-A9CE01599F21}">
+                <a16:creationId xmlns:a16="http://schemas.microsoft.com/office/drawing/2010/main" id="{71C201B9-4D66-4B2C-B7B6-81362C0FBE08}"/>
               </a:ext>
             </a:extLst>
           </p:cNvPr>
@@ -3982,8 +3983,8 @@
       </p:sp>
     </p:spTree>
     <p:extLst>
-      <p:ext uri="{2F5CE4E6-A302-4FDD-9E3A-0695054B1F99}">
-        <p14:creationId xmlns:p14="http://schemas.microsoft.com/office/powerpoint/2010/main" val="1713420158731"/>
+      <p:ext uri="{7DF984F5-7FF1-4FFF-8C61-9D547DDDEBC5}">
+        <p14:creationId xmlns:p14="http://schemas.microsoft.com/office/powerpoint/2010/main" val="1713440222488"/>
       </p:ext>
     </p:extLst>
   </p:cSld>
@@ -4014,8 +4015,8 @@
         <p:nvPicPr>
           <p:cNvPr id="2" name="Picture 7">
             <a:extLst>
-              <a:ext uri="{E771FCB5-AE64-4F32-9DFC-8AECB6B62D80}">
-                <a16:creationId xmlns:a16="http://schemas.microsoft.com/office/drawing/2010/main" id="{2FE4978D-6EAF-4CBF-A69C-5B3BEADE0B1B}"/>
+              <a:ext uri="{6C5A26BF-44A8-439F-90DE-A82F98C0830A}">
+                <a16:creationId xmlns:a16="http://schemas.microsoft.com/office/drawing/2010/main" id="{715532DA-9EF4-4F2B-B399-1679DE2C972C}"/>
               </a:ext>
             </a:extLst>
           </p:cNvPr>
@@ -4048,8 +4049,8 @@
         <p:nvPicPr>
           <p:cNvPr id="3" name="Picture 8">
             <a:extLst>
-              <a:ext uri="{E8103A8E-D3C5-4F9D-A3CA-05117F7FA4A4}">
-                <a16:creationId xmlns:a16="http://schemas.microsoft.com/office/drawing/2010/main" id="{0F7348FF-064C-4224-AF72-062375EA0BE1}"/>
+              <a:ext uri="{B625E0E4-6E49-4854-9818-21A090204F70}">
+                <a16:creationId xmlns:a16="http://schemas.microsoft.com/office/drawing/2010/main" id="{95BBEBEC-3DBF-4DFB-8BB3-904B69309A1E}"/>
               </a:ext>
             </a:extLst>
           </p:cNvPr>
@@ -4082,8 +4083,8 @@
         <p:nvSpPr>
           <p:cNvPr id="4" name="Title 1">
             <a:extLst>
-              <a:ext uri="{96730AD4-53C5-405A-A544-4C0E4585F6C8}">
-                <a16:creationId xmlns:a16="http://schemas.microsoft.com/office/drawing/2010/main" id="{227F6087-132E-45EA-A1DF-37A54F5F005E}"/>
+              <a:ext uri="{3E85AAC7-1F79-433E-A5FF-8F66581F93CB}">
+                <a16:creationId xmlns:a16="http://schemas.microsoft.com/office/drawing/2010/main" id="{C5674267-2167-4056-B2CF-F683DDC91286}"/>
               </a:ext>
             </a:extLst>
           </p:cNvPr>
@@ -4123,8 +4124,8 @@
         <p:nvSpPr>
           <p:cNvPr id="5" name="Slide Number Placeholder 6">
             <a:extLst>
-              <a:ext uri="{88D07D7C-A828-4BC0-B9A3-33BD4D3CE6CC}">
-                <a16:creationId xmlns:a16="http://schemas.microsoft.com/office/drawing/2010/main" id="{9AD01347-3B0F-4841-AEA1-ECDA99FCCA95}"/>
+              <a:ext uri="{AF15D9A5-3F17-4586-9CBB-3965348D21C3}">
+                <a16:creationId xmlns:a16="http://schemas.microsoft.com/office/drawing/2010/main" id="{D7528675-BAF6-4FE4-8E9B-DB284DA7054E}"/>
               </a:ext>
             </a:extLst>
           </p:cNvPr>
@@ -4141,7 +4142,7 @@
           <a:lstStyle/>
           <a:p>
             <a:pPr/>
-            <a:fld id="{F407DA55-3487-4154-A874-F4470A85F45E}" type="slidenum"/>
+            <a:fld id="{F8291CA5-59FE-43DA-89B1-3E5F19D23361}" type="slidenum"/>
             <a:endParaRPr dirty="0" lang="en-US"/>
           </a:p>
         </p:txBody>
@@ -4150,8 +4151,8 @@
         <p:nvSpPr>
           <p:cNvPr id="6" name="Text Placeholder 10">
             <a:extLst>
-              <a:ext uri="{610A2CBC-06F3-4326-8503-3C53C654BDB5}">
-                <a16:creationId xmlns:a16="http://schemas.microsoft.com/office/drawing/2010/main" id="{A0663934-63B4-4B8E-B632-31C828863BAA}"/>
+              <a:ext uri="{CFBDC418-2D22-45EC-8CF1-F391C7B9233E}">
+                <a16:creationId xmlns:a16="http://schemas.microsoft.com/office/drawing/2010/main" id="{A6AFAEC3-FB35-4581-9DDF-678FB18BAC44}"/>
               </a:ext>
             </a:extLst>
           </p:cNvPr>
@@ -4219,8 +4220,8 @@
         <p:nvSpPr>
           <p:cNvPr id="7" name="Text Placeholder 10">
             <a:extLst>
-              <a:ext uri="{89365554-850F-4948-AF65-0C75A7213699}">
-                <a16:creationId xmlns:a16="http://schemas.microsoft.com/office/drawing/2010/main" id="{4491ACD7-80BD-4AAC-9969-A3597F561B96}"/>
+              <a:ext uri="{CB0AF50E-D4BC-4CA5-BCC1-7B92A7748D6A}">
+                <a16:creationId xmlns:a16="http://schemas.microsoft.com/office/drawing/2010/main" id="{B65FE33F-61C5-4478-B386-DFA600BB008E}"/>
               </a:ext>
             </a:extLst>
           </p:cNvPr>
@@ -4288,8 +4289,8 @@
         <p:nvSpPr>
           <p:cNvPr id="8" name="Text Placeholder 4">
             <a:extLst>
-              <a:ext uri="{4F9090AF-F14B-490C-92E8-A99BF6BD3E52}">
-                <a16:creationId xmlns:a16="http://schemas.microsoft.com/office/drawing/2010/main" id="{7092ED81-76D6-473A-AF35-35A1D7DEB31B}"/>
+              <a:ext uri="{2AD793E8-3ACC-48C5-971D-4A63E36BCE19}">
+                <a16:creationId xmlns:a16="http://schemas.microsoft.com/office/drawing/2010/main" id="{3AB1DE5A-4FD7-42C9-AA84-82304CE3B232}"/>
               </a:ext>
             </a:extLst>
           </p:cNvPr>
@@ -4372,8 +4373,8 @@
         <p:nvSpPr>
           <p:cNvPr id="9" name="Text Placeholder 4">
             <a:extLst>
-              <a:ext uri="{1E7E2D0E-7068-46CE-8E69-1F67394CE91A}">
-                <a16:creationId xmlns:a16="http://schemas.microsoft.com/office/drawing/2010/main" id="{342514C3-9D83-4AFC-B4AB-EACF41DC3EED}"/>
+              <a:ext uri="{B142FD12-FCEA-415C-8C54-36EA3A8ED911}">
+                <a16:creationId xmlns:a16="http://schemas.microsoft.com/office/drawing/2010/main" id="{E29C9EDF-32E7-406C-AD94-EFB5CAC25648}"/>
               </a:ext>
             </a:extLst>
           </p:cNvPr>
@@ -4456,8 +4457,8 @@
         <p:nvSpPr>
           <p:cNvPr hidden="false" id="10" name="Date Placeholder 1">
             <a:extLst>
-              <a:ext uri="{CCBA3C41-35CD-46EB-98A6-BC8248E6C8DE}">
-                <a16:creationId xmlns:a16="http://schemas.microsoft.com/office/drawing/2010/main" id="{5DD1B0AB-BE5B-4B64-B0A9-F4DA0EE9E1C8}"/>
+              <a:ext uri="{571399AC-1BB8-4D7D-87B7-B0E451D4AB35}">
+                <a16:creationId xmlns:a16="http://schemas.microsoft.com/office/drawing/2010/main" id="{74AFB238-0A52-4E42-87EA-DB36A31923AE}"/>
               </a:ext>
             </a:extLst>
           </p:cNvPr>
@@ -4505,8 +4506,8 @@
         <p:nvSpPr>
           <p:cNvPr hidden="false" id="11" name="Footer Placeholder 1">
             <a:extLst>
-              <a:ext uri="{9E6B38AC-F402-4757-AEEF-476ACBCA423C}">
-                <a16:creationId xmlns:a16="http://schemas.microsoft.com/office/drawing/2010/main" id="{CC49E60B-4F09-4B93-863F-C4BC615ECE1A}"/>
+              <a:ext uri="{2B293247-ED90-4C99-A2E5-10E9758CFAFB}">
+                <a16:creationId xmlns:a16="http://schemas.microsoft.com/office/drawing/2010/main" id="{D188F036-CBA2-4366-BC2C-24BE7690F8DB}"/>
               </a:ext>
             </a:extLst>
           </p:cNvPr>
@@ -4552,8 +4553,8 @@
       </p:sp>
     </p:spTree>
     <p:extLst>
-      <p:ext uri="{5D818B4A-AA19-4898-AA87-48C63209C188}">
-        <p14:creationId xmlns:p14="http://schemas.microsoft.com/office/powerpoint/2010/main" val="1713420158735"/>
+      <p:ext uri="{7E0D5323-5139-45CC-AD53-D72D61995D4D}">
+        <p14:creationId xmlns:p14="http://schemas.microsoft.com/office/powerpoint/2010/main" val="1713440222491"/>
       </p:ext>
     </p:extLst>
   </p:cSld>
@@ -4592,8 +4593,8 @@
         <p:nvPicPr>
           <p:cNvPr id="2" name="Picture 6">
             <a:extLst>
-              <a:ext uri="{D70E9770-C765-48D7-A2DB-833D09BFC88D}">
-                <a16:creationId xmlns:a16="http://schemas.microsoft.com/office/drawing/2010/main" id="{8A10AF97-781F-49FA-8C4A-DE261804E81C}"/>
+              <a:ext uri="{DC5C76DF-3D47-4AA9-B480-C070ADD02BE6}">
+                <a16:creationId xmlns:a16="http://schemas.microsoft.com/office/drawing/2010/main" id="{1A9289A7-C594-476A-A0FC-FF78C7E5ED62}"/>
               </a:ext>
             </a:extLst>
           </p:cNvPr>
@@ -4626,8 +4627,8 @@
         <p:nvPicPr>
           <p:cNvPr id="3" name="Picture 9">
             <a:extLst>
-              <a:ext uri="{285915B6-BA5C-4454-908E-B9774AB35EE1}">
-                <a16:creationId xmlns:a16="http://schemas.microsoft.com/office/drawing/2010/main" id="{8FC5899D-7148-486F-A1B3-4C8CDBD4C0B8}"/>
+              <a:ext uri="{FEC15EBB-B210-4754-B955-7024881782BC}">
+                <a16:creationId xmlns:a16="http://schemas.microsoft.com/office/drawing/2010/main" id="{E790F745-60B2-4C26-A979-065F09F70955}"/>
               </a:ext>
             </a:extLst>
           </p:cNvPr>
@@ -4660,8 +4661,8 @@
         <p:nvPicPr>
           <p:cNvPr id="4" name="Picture 13">
             <a:extLst>
-              <a:ext uri="{7F5DAA0B-B8C1-4937-8996-0477017416F0}">
-                <a16:creationId xmlns:a16="http://schemas.microsoft.com/office/drawing/2010/main" id="{986BD02D-65C9-4155-800D-6ACC22893247}"/>
+              <a:ext uri="{54B5CEEC-2A4F-4559-AFE3-4FFECD94F2C1}">
+                <a16:creationId xmlns:a16="http://schemas.microsoft.com/office/drawing/2010/main" id="{A9273CDE-1FA8-4488-AEF8-8ADA77190F7C}"/>
               </a:ext>
             </a:extLst>
           </p:cNvPr>
@@ -4691,8 +4692,8 @@
         <p:nvGrpSpPr>
           <p:cNvPr id="5" name="Group 14">
             <a:extLst>
-              <a:ext uri="{59A67EB4-46AE-495C-A4B9-9B9D4162B082}">
-                <a16:creationId xmlns:a16="http://schemas.microsoft.com/office/drawing/2010/main" id="{A191F9D3-6DD6-4BAF-8F7D-5F5DFACE6B1E}"/>
+              <a:ext uri="{9DB265B8-A82D-42E0-9972-400FAB068F46}">
+                <a16:creationId xmlns:a16="http://schemas.microsoft.com/office/drawing/2010/main" id="{0E9585D7-AFF2-445E-9550-70195D6086A2}"/>
               </a:ext>
             </a:extLst>
           </p:cNvPr>
@@ -4711,8 +4712,8 @@
           <p:nvCxnSpPr>
             <p:cNvPr id="6" name="Straight Connector 15">
               <a:extLst>
-                <a:ext uri="{2DBE3A5A-8DE0-4B34-BAA9-E37260BCDFBD}">
-                  <a16:creationId xmlns:a16="http://schemas.microsoft.com/office/drawing/2010/main" id="{C324B436-6BC4-4360-8387-95A2F98E228A}"/>
+                <a:ext uri="{B800D9D1-943C-4FC6-8011-E6DF7B3F7C90}">
+                  <a16:creationId xmlns:a16="http://schemas.microsoft.com/office/drawing/2010/main" id="{39C4C31C-8B8D-44FB-8F3C-2B5ADD27C352}"/>
                 </a:ext>
               </a:extLst>
             </p:cNvPr>
@@ -4754,8 +4755,8 @@
           <p:nvGrpSpPr>
             <p:cNvPr id="7" name="Group 16">
               <a:extLst>
-                <a:ext uri="{55041B65-E5C3-4528-AB02-3FE68093CC70}">
-                  <a16:creationId xmlns:a16="http://schemas.microsoft.com/office/drawing/2010/main" id="{E604F66E-C173-4B30-B133-52EC0E6E8CF7}"/>
+                <a:ext uri="{16E1350E-2087-495B-9B95-F774DA9B2D7E}">
+                  <a16:creationId xmlns:a16="http://schemas.microsoft.com/office/drawing/2010/main" id="{1481E6DB-8EA8-45AC-8A58-0B7DA02DC714}"/>
                 </a:ext>
               </a:extLst>
             </p:cNvPr>
@@ -4774,8 +4775,8 @@
             <p:nvSpPr>
               <p:cNvPr id="8" name="Freeform: Shape 17">
                 <a:extLst>
-                  <a:ext uri="{3BDF5F04-9523-4A6C-9383-DC8DFC57701E}">
-                    <a16:creationId xmlns:a16="http://schemas.microsoft.com/office/drawing/2010/main" id="{ADB7CAF0-02BC-40AA-B606-0A25092F6DF2}"/>
+                  <a:ext uri="{B3D5E99D-3F15-4F10-8E51-29EF7A8706D7}">
+                    <a16:creationId xmlns:a16="http://schemas.microsoft.com/office/drawing/2010/main" id="{95BD88A3-D248-4CF2-9247-04F75453CF3A}"/>
                   </a:ext>
                 </a:extLst>
               </p:cNvPr>
@@ -4850,8 +4851,8 @@
             <p:nvSpPr>
               <p:cNvPr id="9" name="Oval 18">
                 <a:extLst>
-                  <a:ext uri="{767EFB2E-6529-48D3-9035-D04D72800050}">
-                    <a16:creationId xmlns:a16="http://schemas.microsoft.com/office/drawing/2010/main" id="{16045E34-9A5B-4E1B-B0F0-F9AE1EDE0AD6}"/>
+                  <a:ext uri="{8471EB14-AA50-4599-8C03-F8B58D55DF7A}">
+                    <a16:creationId xmlns:a16="http://schemas.microsoft.com/office/drawing/2010/main" id="{E09741BB-D8A6-4049-83BC-C4E384493FE1}"/>
                   </a:ext>
                 </a:extLst>
               </p:cNvPr>
@@ -4911,8 +4912,8 @@
             <p:nvSpPr>
               <p:cNvPr id="10" name="Oval 19">
                 <a:extLst>
-                  <a:ext uri="{53312F59-422C-46AC-9B77-A19B9178F957}">
-                    <a16:creationId xmlns:a16="http://schemas.microsoft.com/office/drawing/2010/main" id="{D5E3420B-0835-4935-A6EF-F144F361C636}"/>
+                  <a:ext uri="{95272DDE-C1A3-4749-AE1C-A39A7E541C07}">
+                    <a16:creationId xmlns:a16="http://schemas.microsoft.com/office/drawing/2010/main" id="{6475915F-6CE7-4906-8D23-14E3E238A863}"/>
                   </a:ext>
                 </a:extLst>
               </p:cNvPr>
@@ -4972,8 +4973,8 @@
             <p:nvSpPr>
               <p:cNvPr id="11" name="Oval 20">
                 <a:extLst>
-                  <a:ext uri="{80A0EAFE-CDB2-427C-83EC-5CA2156837EE}">
-                    <a16:creationId xmlns:a16="http://schemas.microsoft.com/office/drawing/2010/main" id="{2C16B356-9311-40E7-8C57-F9FBF08E4248}"/>
+                  <a:ext uri="{E2D5F20B-D78C-428C-A7C8-20346496EA55}">
+                    <a16:creationId xmlns:a16="http://schemas.microsoft.com/office/drawing/2010/main" id="{7808541A-34CC-454F-89F2-68030162BAC0}"/>
                   </a:ext>
                 </a:extLst>
               </p:cNvPr>
@@ -5035,8 +5036,8 @@
         <p:nvPicPr>
           <p:cNvPr descr="A picture containing animal, light&#10;&#10;Description automatically generated" id="12" name="Picture 22">
             <a:extLst>
-              <a:ext uri="{A8482063-1547-43DD-9854-DCB0DEE69A06}">
-                <a16:creationId xmlns:a16="http://schemas.microsoft.com/office/drawing/2010/main" id="{8A6D11FB-8D42-44B6-99C0-22B0A1FCFFCC}"/>
+              <a:ext uri="{5A4E676E-78B2-4DA9-BD54-9DC71C73F8A8}">
+                <a16:creationId xmlns:a16="http://schemas.microsoft.com/office/drawing/2010/main" id="{29DB4FE1-D303-421E-89A4-7C570087484E}"/>
               </a:ext>
             </a:extLst>
           </p:cNvPr>
@@ -5069,8 +5070,8 @@
         <p:nvGrpSpPr>
           <p:cNvPr id="13" name="Group 23">
             <a:extLst>
-              <a:ext uri="{48738DA0-C926-4B39-900D-71C6FE12BCDF}">
-                <a16:creationId xmlns:a16="http://schemas.microsoft.com/office/drawing/2010/main" id="{13F24ADB-7B41-4202-9823-0E3FE0995275}"/>
+              <a:ext uri="{B25A64E7-CE1A-4280-88B8-F13BA5C3E97E}">
+                <a16:creationId xmlns:a16="http://schemas.microsoft.com/office/drawing/2010/main" id="{AB40B6E1-60AC-4837-BDD0-5237426FEFFF}"/>
               </a:ext>
             </a:extLst>
           </p:cNvPr>
@@ -5089,8 +5090,8 @@
           <p:nvCxnSpPr>
             <p:cNvPr id="14" name="Straight Connector 24">
               <a:extLst>
-                <a:ext uri="{1D267B4F-214F-4E06-83E8-31D5FFC67A20}">
-                  <a16:creationId xmlns:a16="http://schemas.microsoft.com/office/drawing/2010/main" id="{27502AA6-144E-45BB-8AD4-3FCF5BE714A4}"/>
+                <a:ext uri="{7EF96A5E-7B85-421E-BD3C-E4D6783A31DD}">
+                  <a16:creationId xmlns:a16="http://schemas.microsoft.com/office/drawing/2010/main" id="{9BB5E62A-32D0-44B3-BD86-57C5D369D10F}"/>
                 </a:ext>
               </a:extLst>
             </p:cNvPr>
@@ -5132,8 +5133,8 @@
           <p:nvSpPr>
             <p:cNvPr id="15" name="Freeform: Shape 25">
               <a:extLst>
-                <a:ext uri="{07AA2C8B-4876-4337-A8C6-4D6D19A4B377}">
-                  <a16:creationId xmlns:a16="http://schemas.microsoft.com/office/drawing/2010/main" id="{5A4EB1CD-58DB-443F-BECB-3A7ADA54BF7C}"/>
+                <a:ext uri="{FE6A3FF2-736D-431B-854F-21C0CF848D3B}">
+                  <a16:creationId xmlns:a16="http://schemas.microsoft.com/office/drawing/2010/main" id="{CF056AC5-59B6-413E-9C5B-7B281DEC4E80}"/>
                 </a:ext>
               </a:extLst>
             </p:cNvPr>
@@ -5208,8 +5209,8 @@
           <p:nvSpPr>
             <p:cNvPr id="16" name="Oval 26">
               <a:extLst>
-                <a:ext uri="{C0CE376F-50FB-408B-8424-18552C75C424}">
-                  <a16:creationId xmlns:a16="http://schemas.microsoft.com/office/drawing/2010/main" id="{2504512D-66A1-4418-B5DF-1937E804A8F7}"/>
+                <a:ext uri="{FA7AAF41-AA73-4D53-8DDB-F11C043A5AFE}">
+                  <a16:creationId xmlns:a16="http://schemas.microsoft.com/office/drawing/2010/main" id="{00CA6CF8-591B-452C-A50E-1D5411DED9E3}"/>
                 </a:ext>
               </a:extLst>
             </p:cNvPr>
@@ -5269,8 +5270,8 @@
           <p:nvSpPr>
             <p:cNvPr id="17" name="Oval 27">
               <a:extLst>
-                <a:ext uri="{57C675D0-BA6F-47B7-80BE-5BFEF9CC7918}">
-                  <a16:creationId xmlns:a16="http://schemas.microsoft.com/office/drawing/2010/main" id="{3EC9CB1E-FC69-4686-A52F-E8F8039F3E1F}"/>
+                <a:ext uri="{5A8D074D-4127-41B6-B069-6FBD70FAB012}">
+                  <a16:creationId xmlns:a16="http://schemas.microsoft.com/office/drawing/2010/main" id="{A5C4B228-ED0A-43DB-B6F6-435FCCC0A1B0}"/>
                 </a:ext>
               </a:extLst>
             </p:cNvPr>
@@ -5330,8 +5331,8 @@
           <p:nvSpPr>
             <p:cNvPr id="18" name="Oval 28">
               <a:extLst>
-                <a:ext uri="{54049A5A-287A-425A-8853-E60ADDBDA108}">
-                  <a16:creationId xmlns:a16="http://schemas.microsoft.com/office/drawing/2010/main" id="{C54DEA8E-7D16-484A-921E-8038D698E8FD}"/>
+                <a:ext uri="{7607BA66-A3CA-4748-8D66-00A62DE8501A}">
+                  <a16:creationId xmlns:a16="http://schemas.microsoft.com/office/drawing/2010/main" id="{2AA7D50A-DA56-4DB4-BEE4-6BED098C955A}"/>
                 </a:ext>
               </a:extLst>
             </p:cNvPr>
@@ -5391,8 +5392,8 @@
           <p:nvSpPr>
             <p:cNvPr id="19" name="Freeform: Shape 29">
               <a:extLst>
-                <a:ext uri="{F2B7D11D-B6B4-4D19-B327-35E93CBED6B0}">
-                  <a16:creationId xmlns:a16="http://schemas.microsoft.com/office/drawing/2010/main" id="{FA6726C1-EF04-484F-8B02-B272AA8909AB}"/>
+                <a:ext uri="{387E6A72-6CF0-4631-AD29-D1216EDEDFB8}">
+                  <a16:creationId xmlns:a16="http://schemas.microsoft.com/office/drawing/2010/main" id="{5739B615-7CE9-4025-9589-5EB87AC3109E}"/>
                 </a:ext>
               </a:extLst>
             </p:cNvPr>
@@ -5467,8 +5468,8 @@
           <p:nvSpPr>
             <p:cNvPr id="20" name="Oval 30">
               <a:extLst>
-                <a:ext uri="{18236058-9B97-404D-886D-FF9C8FDA60B4}">
-                  <a16:creationId xmlns:a16="http://schemas.microsoft.com/office/drawing/2010/main" id="{A6CDFB44-F213-4C01-93F5-B4B19118A70C}"/>
+                <a:ext uri="{4A50B097-BAC6-4D83-9A96-8F0AAAF7918F}">
+                  <a16:creationId xmlns:a16="http://schemas.microsoft.com/office/drawing/2010/main" id="{4FE31FD0-57C3-4EEB-ADCD-58EABA64DABB}"/>
                 </a:ext>
               </a:extLst>
             </p:cNvPr>
@@ -5528,8 +5529,8 @@
           <p:nvSpPr>
             <p:cNvPr id="21" name="Oval 31">
               <a:extLst>
-                <a:ext uri="{240150F1-BDFC-4789-BF0B-04A0024922DC}">
-                  <a16:creationId xmlns:a16="http://schemas.microsoft.com/office/drawing/2010/main" id="{4E2A52BA-418B-4184-8CFB-C60AC649B30C}"/>
+                <a:ext uri="{FA780460-E979-490C-A237-A7ABE5345F9F}">
+                  <a16:creationId xmlns:a16="http://schemas.microsoft.com/office/drawing/2010/main" id="{1BE4BDEF-BB4D-47C0-B7A4-3BA3AF2131C8}"/>
                 </a:ext>
               </a:extLst>
             </p:cNvPr>
@@ -5589,8 +5590,8 @@
           <p:nvSpPr>
             <p:cNvPr id="22" name="Oval 32">
               <a:extLst>
-                <a:ext uri="{6478D3B2-11C1-4237-9390-99967383E5D6}">
-                  <a16:creationId xmlns:a16="http://schemas.microsoft.com/office/drawing/2010/main" id="{0600A434-73A6-4C71-9AB0-443B2A71B2EB}"/>
+                <a:ext uri="{0E76F11B-0DCA-4770-80D0-2D50F8A53E4A}">
+                  <a16:creationId xmlns:a16="http://schemas.microsoft.com/office/drawing/2010/main" id="{8661B257-85E5-46C0-BDEA-8CA80C489A55}"/>
                 </a:ext>
               </a:extLst>
             </p:cNvPr>
@@ -5651,8 +5652,8 @@
         <p:nvPicPr>
           <p:cNvPr descr="A close up of a logo&#10;&#10;Description automatically generated" id="23" name="Picture 33">
             <a:extLst>
-              <a:ext uri="{B49AC1D1-FEB9-40A2-82AE-99A941193622}">
-                <a16:creationId xmlns:a16="http://schemas.microsoft.com/office/drawing/2010/main" id="{2E145D36-0CC6-432A-A19E-D5A469D5CF0E}"/>
+              <a:ext uri="{9E4314D0-1F3E-4ED0-8BED-D7B369B714A3}">
+                <a16:creationId xmlns:a16="http://schemas.microsoft.com/office/drawing/2010/main" id="{27E73FF0-E2FA-4944-BDBA-C1C68FAA5C19}"/>
               </a:ext>
             </a:extLst>
           </p:cNvPr>
@@ -5682,8 +5683,8 @@
         <p:nvSpPr>
           <p:cNvPr id="24" name="Title 1">
             <a:extLst>
-              <a:ext uri="{62A5E10D-9E96-43C1-BCE6-5458302A0EBE}">
-                <a16:creationId xmlns:a16="http://schemas.microsoft.com/office/drawing/2010/main" id="{ACE040DC-F698-41EB-A711-7CFAFA7E1D82}"/>
+              <a:ext uri="{B50BBD8F-807E-4BF9-90EE-77CE597A58C1}">
+                <a16:creationId xmlns:a16="http://schemas.microsoft.com/office/drawing/2010/main" id="{39893FCD-0FEF-4DED-AC9E-98393EBB84AA}"/>
               </a:ext>
             </a:extLst>
           </p:cNvPr>
@@ -5728,8 +5729,8 @@
         <p:nvSpPr>
           <p:cNvPr id="25" name="Subtitle 2">
             <a:extLst>
-              <a:ext uri="{E20B7522-68B8-462C-B703-8FEFE543821B}">
-                <a16:creationId xmlns:a16="http://schemas.microsoft.com/office/drawing/2010/main" id="{E7A5E174-DA2C-4F22-8B9D-4258C137D61F}"/>
+              <a:ext uri="{C4465B68-BF32-4423-AFB5-7529121D6A68}">
+                <a16:creationId xmlns:a16="http://schemas.microsoft.com/office/drawing/2010/main" id="{43B16BBB-FD72-48E4-9D39-631ACC8B4D2B}"/>
               </a:ext>
             </a:extLst>
           </p:cNvPr>
@@ -5806,8 +5807,8 @@
         <p:nvPicPr>
           <p:cNvPr descr="A close up of a logo&#10;&#10;Description automatically generated" id="26" name="Picture 4">
             <a:extLst>
-              <a:ext uri="{954DE808-6BBD-4D7F-ADCE-8F48CA2040D9}">
-                <a16:creationId xmlns:a16="http://schemas.microsoft.com/office/drawing/2010/main" id="{FB20A28F-8F39-4CBA-AF60-10B9D95CDEC1}"/>
+              <a:ext uri="{2AC5B1EB-FFA3-4F58-B886-7C2C7699FB05}">
+                <a16:creationId xmlns:a16="http://schemas.microsoft.com/office/drawing/2010/main" id="{9B73520B-7E23-4623-B2E2-417AB8E95987}"/>
               </a:ext>
             </a:extLst>
           </p:cNvPr>
@@ -5837,8 +5838,8 @@
         <p:nvPicPr>
           <p:cNvPr id="27" name="Picture 7">
             <a:extLst>
-              <a:ext uri="{F7596D59-B64F-4AF0-B796-AC4E60E3BF3D}">
-                <a16:creationId xmlns:a16="http://schemas.microsoft.com/office/drawing/2010/main" id="{A2DDAA45-9296-4FEC-B4F2-6820A60CDA8B}"/>
+              <a:ext uri="{BF5DB878-D99C-41DD-B7EE-676FBE1EB5D3}">
+                <a16:creationId xmlns:a16="http://schemas.microsoft.com/office/drawing/2010/main" id="{145B5AB3-48AC-4403-9DC5-4205628BF5E4}"/>
               </a:ext>
             </a:extLst>
           </p:cNvPr>
@@ -5868,8 +5869,8 @@
         <p:nvSpPr>
           <p:cNvPr hidden="false" id="28" name="Date Placeholder 1">
             <a:extLst>
-              <a:ext uri="{A11A9B5E-D933-45DA-AABC-26D25E36F20C}">
-                <a16:creationId xmlns:a16="http://schemas.microsoft.com/office/drawing/2010/main" id="{1A16C2CC-5F8F-4695-B11D-97601868DEF2}"/>
+              <a:ext uri="{72D37453-9966-42BB-A20D-D5371535F2A2}">
+                <a16:creationId xmlns:a16="http://schemas.microsoft.com/office/drawing/2010/main" id="{FF515F3A-D788-4082-95B7-62FB0BDD847C}"/>
               </a:ext>
             </a:extLst>
           </p:cNvPr>
@@ -5917,8 +5918,8 @@
         <p:nvSpPr>
           <p:cNvPr hidden="false" id="29" name="Footer Placeholder 1">
             <a:extLst>
-              <a:ext uri="{C32A1E8F-9CD6-4994-9CA4-DD000FA43117}">
-                <a16:creationId xmlns:a16="http://schemas.microsoft.com/office/drawing/2010/main" id="{0B464E2C-95D8-450B-99B8-D2BA62DF5259}"/>
+              <a:ext uri="{3FB5C6B0-27BD-45C6-BD58-476E11BC4643}">
+                <a16:creationId xmlns:a16="http://schemas.microsoft.com/office/drawing/2010/main" id="{60DCEE8C-C45E-4800-844C-A41350AA579F}"/>
               </a:ext>
             </a:extLst>
           </p:cNvPr>
@@ -5966,8 +5967,8 @@
         <p:nvSpPr>
           <p:cNvPr id="30" name="Slide Number Placeholder 7">
             <a:extLst>
-              <a:ext uri="{65C19DD0-E955-4993-A668-FB17EF1EB1A0}">
-                <a16:creationId xmlns:a16="http://schemas.microsoft.com/office/drawing/2010/main" id="{0BEAF060-2321-4B8F-BFEF-E29906B2AB86}"/>
+              <a:ext uri="{6EF21513-9596-4303-B168-952E80C527BC}">
+                <a16:creationId xmlns:a16="http://schemas.microsoft.com/office/drawing/2010/main" id="{729E26D4-2BE6-414C-BC22-4DEA9A5D523B}"/>
               </a:ext>
             </a:extLst>
           </p:cNvPr>
@@ -6010,8 +6011,8 @@
       </p:sp>
     </p:spTree>
     <p:extLst>
-      <p:ext uri="{B3AE711D-E8E2-43EA-BE61-C9C8BF36EF34}">
-        <p14:creationId xmlns:p14="http://schemas.microsoft.com/office/powerpoint/2010/main" val="1713420158738"/>
+      <p:ext uri="{9C9FE672-F197-4E7D-A1DE-24B3A8BFEC1D}">
+        <p14:creationId xmlns:p14="http://schemas.microsoft.com/office/powerpoint/2010/main" val="1713440222493"/>
       </p:ext>
     </p:extLst>
   </p:cSld>
@@ -6042,8 +6043,8 @@
         <p:nvPicPr>
           <p:cNvPr id="2" name="Picture 7">
             <a:extLst>
-              <a:ext uri="{B8B869C9-9315-48A7-8653-42B9E68D0F94}">
-                <a16:creationId xmlns:a16="http://schemas.microsoft.com/office/drawing/2010/main" id="{300D084E-E448-4E42-B8EE-D0043073E891}"/>
+              <a:ext uri="{B7C43F17-B121-4340-B9D6-91A490B2AF35}">
+                <a16:creationId xmlns:a16="http://schemas.microsoft.com/office/drawing/2010/main" id="{B421D6F8-09EF-4E78-AB52-1159F67FED86}"/>
               </a:ext>
             </a:extLst>
           </p:cNvPr>
@@ -6076,8 +6077,8 @@
         <p:nvPicPr>
           <p:cNvPr id="3" name="Picture 8">
             <a:extLst>
-              <a:ext uri="{CA7CA7E4-F82C-4B9A-83B8-67032D7C15A2}">
-                <a16:creationId xmlns:a16="http://schemas.microsoft.com/office/drawing/2010/main" id="{D3CDF289-D560-46AA-9CA4-0174B99351CF}"/>
+              <a:ext uri="{F3F55F74-0A7B-40FA-A9FE-A9B7719D8BF1}">
+                <a16:creationId xmlns:a16="http://schemas.microsoft.com/office/drawing/2010/main" id="{C77D1F0E-1B8E-4893-9064-D2B1CD73E8B6}"/>
               </a:ext>
             </a:extLst>
           </p:cNvPr>
@@ -6110,8 +6111,8 @@
         <p:nvSpPr>
           <p:cNvPr id="4" name="Title 1">
             <a:extLst>
-              <a:ext uri="{F6AC7D85-E99A-4990-90A2-C22DFFA99252}">
-                <a16:creationId xmlns:a16="http://schemas.microsoft.com/office/drawing/2010/main" id="{70B0A78B-48C1-4BAA-A989-C381AAEC145F}"/>
+              <a:ext uri="{B1FA5003-4A89-423B-A546-75141B6A469F}">
+                <a16:creationId xmlns:a16="http://schemas.microsoft.com/office/drawing/2010/main" id="{1354470D-1B81-4BF4-89DF-9C8BA3B70F72}"/>
               </a:ext>
             </a:extLst>
           </p:cNvPr>
@@ -6151,8 +6152,8 @@
         <p:nvSpPr>
           <p:cNvPr id="5" name="Slide Number Placeholder 6">
             <a:extLst>
-              <a:ext uri="{847BE31B-C31B-4510-BDFD-6E245BD0F334}">
-                <a16:creationId xmlns:a16="http://schemas.microsoft.com/office/drawing/2010/main" id="{1E7D1110-228C-458E-B092-632F43A0AA31}"/>
+              <a:ext uri="{9BB8DD39-701F-4D78-A72D-7D244104E420}">
+                <a16:creationId xmlns:a16="http://schemas.microsoft.com/office/drawing/2010/main" id="{BEC9C41C-4B62-4E06-9AF6-74353ADD09D7}"/>
               </a:ext>
             </a:extLst>
           </p:cNvPr>
@@ -6169,7 +6170,7 @@
           <a:lstStyle/>
           <a:p>
             <a:pPr/>
-            <a:fld id="{D844B5E5-1BE9-4A39-BAA9-961E991D1E73}" type="slidenum"/>
+            <a:fld id="{0F0D4C0F-45DB-491A-A2E3-970570C2544E}" type="slidenum"/>
             <a:endParaRPr dirty="0" lang="en-US"/>
           </a:p>
         </p:txBody>
@@ -6178,8 +6179,8 @@
         <p:nvSpPr>
           <p:cNvPr id="6" name="Text Placeholder 10">
             <a:extLst>
-              <a:ext uri="{277E6EF4-7909-4F61-8D42-75E4FAFADF57}">
-                <a16:creationId xmlns:a16="http://schemas.microsoft.com/office/drawing/2010/main" id="{4231CF78-9C63-4CFD-B15A-3787695BAADD}"/>
+              <a:ext uri="{92B22B8F-CAF2-480B-A652-BE0FCAE181D0}">
+                <a16:creationId xmlns:a16="http://schemas.microsoft.com/office/drawing/2010/main" id="{FF87772A-0B58-4632-9614-6AC6D6409E57}"/>
               </a:ext>
             </a:extLst>
           </p:cNvPr>
@@ -6247,8 +6248,8 @@
         <p:nvSpPr>
           <p:cNvPr id="7" name="Chart Placeholder 5">
             <a:extLst>
-              <a:ext uri="{65C9365F-7173-4ED1-8FE8-91D370A91755}">
-                <a16:creationId xmlns:a16="http://schemas.microsoft.com/office/drawing/2010/main" id="{DADE9EE4-9FAF-4855-9C22-F2268EC41048}"/>
+              <a:ext uri="{4A826ABE-3A9A-43B6-AB56-001C20A3F455}">
+                <a16:creationId xmlns:a16="http://schemas.microsoft.com/office/drawing/2010/main" id="{7C557E87-7B2C-4F23-9021-508F042577FC}"/>
               </a:ext>
             </a:extLst>
           </p:cNvPr>
@@ -6287,8 +6288,8 @@
         <p:nvSpPr>
           <p:cNvPr id="8" name="Text Placeholder 4">
             <a:extLst>
-              <a:ext uri="{8449F40E-1CAA-4445-818E-838F15EED3AD}">
-                <a16:creationId xmlns:a16="http://schemas.microsoft.com/office/drawing/2010/main" id="{45F96E00-6DCB-4E36-B832-375A9B6C3947}"/>
+              <a:ext uri="{0A3913B4-1DF8-4570-BD7F-5307F6A56D4A}">
+                <a16:creationId xmlns:a16="http://schemas.microsoft.com/office/drawing/2010/main" id="{FE0DCC9E-1219-49BF-B99A-6E8FAFEF32DF}"/>
               </a:ext>
             </a:extLst>
           </p:cNvPr>
@@ -6371,8 +6372,8 @@
         <p:nvSpPr>
           <p:cNvPr hidden="false" id="9" name="Date Placeholder 1">
             <a:extLst>
-              <a:ext uri="{A225AD19-CF49-480A-AAF2-3E0C20A44ACB}">
-                <a16:creationId xmlns:a16="http://schemas.microsoft.com/office/drawing/2010/main" id="{9B761FCB-6987-4ACF-AC07-F017F60C1156}"/>
+              <a:ext uri="{39CF5470-8DDE-4348-B99B-EB503218CA50}">
+                <a16:creationId xmlns:a16="http://schemas.microsoft.com/office/drawing/2010/main" id="{2C39FABF-47A7-4045-9A93-A88EF78DC3DA}"/>
               </a:ext>
             </a:extLst>
           </p:cNvPr>
@@ -6420,8 +6421,8 @@
         <p:nvSpPr>
           <p:cNvPr hidden="false" id="10" name="Footer Placeholder 1">
             <a:extLst>
-              <a:ext uri="{013C7B90-9F7B-432A-8DF6-65A6EFE69B73}">
-                <a16:creationId xmlns:a16="http://schemas.microsoft.com/office/drawing/2010/main" id="{D64296EA-4513-4483-AA4C-7B0476CA1203}"/>
+              <a:ext uri="{270F33BD-3E48-43B3-BF0B-5B3EEC948D97}">
+                <a16:creationId xmlns:a16="http://schemas.microsoft.com/office/drawing/2010/main" id="{D53B2D0B-950C-4ABC-9D10-998E1180660A}"/>
               </a:ext>
             </a:extLst>
           </p:cNvPr>
@@ -6467,8 +6468,8 @@
       </p:sp>
     </p:spTree>
     <p:extLst>
-      <p:ext uri="{328B57DE-4FE4-4B0E-818A-67F2A5EB0ACE}">
-        <p14:creationId xmlns:p14="http://schemas.microsoft.com/office/powerpoint/2010/main" val="1713420158742"/>
+      <p:ext uri="{30CB8583-F37C-4F00-99B9-9313AB57F8E2}">
+        <p14:creationId xmlns:p14="http://schemas.microsoft.com/office/powerpoint/2010/main" val="1713440222496"/>
       </p:ext>
     </p:extLst>
   </p:cSld>
@@ -6499,8 +6500,8 @@
         <p:nvPicPr>
           <p:cNvPr id="2" name="Picture 6">
             <a:extLst>
-              <a:ext uri="{4B0AC904-1DE1-4E8A-97A2-AE105BFE1D87}">
-                <a16:creationId xmlns:a16="http://schemas.microsoft.com/office/drawing/2010/main" id="{09477505-3EB8-457E-ADA0-2D8E812D21E7}"/>
+              <a:ext uri="{8F4523AF-57B7-4837-871E-3E511DF5A451}">
+                <a16:creationId xmlns:a16="http://schemas.microsoft.com/office/drawing/2010/main" id="{4CA0C101-F6E5-4CD5-8018-9852122E77AF}"/>
               </a:ext>
             </a:extLst>
           </p:cNvPr>
@@ -6533,8 +6534,8 @@
         <p:nvPicPr>
           <p:cNvPr id="3" name="Picture 7">
             <a:extLst>
-              <a:ext uri="{05D26B6E-9AE1-406F-8843-1810E26E3178}">
-                <a16:creationId xmlns:a16="http://schemas.microsoft.com/office/drawing/2010/main" id="{A8C5077A-E3A0-42A8-9BEB-99B40F50B834}"/>
+              <a:ext uri="{8D3094E6-6B34-41B0-A216-8B9240985DEA}">
+                <a16:creationId xmlns:a16="http://schemas.microsoft.com/office/drawing/2010/main" id="{46B6CA6C-50E2-4FD7-93C7-681E3637C177}"/>
               </a:ext>
             </a:extLst>
           </p:cNvPr>
@@ -6567,8 +6568,8 @@
         <p:nvSpPr>
           <p:cNvPr hidden="false" id="4" name="Title 1">
             <a:extLst>
-              <a:ext uri="{D6343D66-D631-4B9A-AD3F-1D5704A553B0}">
-                <a16:creationId xmlns:a16="http://schemas.microsoft.com/office/drawing/2010/main" id="{0433FE43-C04C-4B87-BEB4-49409ED48E14}"/>
+              <a:ext uri="{A3593CBA-FE0B-4C9C-B055-14414A622519}">
+                <a16:creationId xmlns:a16="http://schemas.microsoft.com/office/drawing/2010/main" id="{C8DFF0A7-1CFE-4E3B-8916-5CE10848D840}"/>
               </a:ext>
             </a:extLst>
           </p:cNvPr>
@@ -6608,8 +6609,8 @@
         <p:nvSpPr>
           <p:cNvPr id="5" name="Slide Number Placeholder 5">
             <a:extLst>
-              <a:ext uri="{5B9DF92E-6447-4504-998C-20F11B8410F2}">
-                <a16:creationId xmlns:a16="http://schemas.microsoft.com/office/drawing/2010/main" id="{B6AA59C2-F36F-4D49-A1FD-54E812CFA879}"/>
+              <a:ext uri="{12056D43-79C4-4448-B1DB-AA70F5AFC28B}">
+                <a16:creationId xmlns:a16="http://schemas.microsoft.com/office/drawing/2010/main" id="{7492ADC0-0F2B-4428-836E-E7625030867E}"/>
               </a:ext>
             </a:extLst>
           </p:cNvPr>
@@ -6634,7 +6635,7 @@
           <a:lstStyle/>
           <a:p>
             <a:pPr/>
-            <a:fld id="{71DB0D33-6FF9-4B56-AD0B-50C001B17534}" type="slidenum"/>
+            <a:fld id="{D5AD64C3-9C7C-481C-9BEC-F628A4D1B2D7}" type="slidenum"/>
             <a:endParaRPr dirty="0" lang="en-US"/>
           </a:p>
         </p:txBody>
@@ -6643,8 +6644,8 @@
         <p:nvCxnSpPr>
           <p:cNvPr id="6" name="Straight Connector 9">
             <a:extLst>
-              <a:ext uri="{E7DD5AA2-AFF4-494E-BE80-D7E3B7BD1E72}">
-                <a16:creationId xmlns:a16="http://schemas.microsoft.com/office/drawing/2010/main" id="{5071C291-4208-4633-BAFA-93084FD03F7F}"/>
+              <a:ext uri="{0EF3A3F6-5818-41B2-A127-41747C536467}">
+                <a16:creationId xmlns:a16="http://schemas.microsoft.com/office/drawing/2010/main" id="{E32042AF-88E2-47E6-BAB6-0A33E2ED30EA}"/>
               </a:ext>
             </a:extLst>
           </p:cNvPr>
@@ -6685,8 +6686,8 @@
         <p:nvSpPr>
           <p:cNvPr id="7" name="Text Placeholder 17">
             <a:extLst>
-              <a:ext uri="{99D3E40B-EEB1-4CB3-98CE-CA240277411D}">
-                <a16:creationId xmlns:a16="http://schemas.microsoft.com/office/drawing/2010/main" id="{A7DAAD4A-B715-4A7D-A696-09E320C5F1C4}"/>
+              <a:ext uri="{7544C1B1-FA4A-4D0F-9CF5-0000997B2DDE}">
+                <a16:creationId xmlns:a16="http://schemas.microsoft.com/office/drawing/2010/main" id="{50EF1AF3-A190-4336-BDFE-56BF35838B43}"/>
               </a:ext>
             </a:extLst>
           </p:cNvPr>
@@ -6741,8 +6742,8 @@
         <p:nvSpPr>
           <p:cNvPr id="8" name="Text Placeholder 17">
             <a:extLst>
-              <a:ext uri="{3E82B2EA-E470-4959-BAD0-0EFDBE370DD6}">
-                <a16:creationId xmlns:a16="http://schemas.microsoft.com/office/drawing/2010/main" id="{4A75DCEB-B515-4F6A-96F5-F9E5C236C78E}"/>
+              <a:ext uri="{7BC58328-F12F-4F6D-B8AD-C917D2BA608A}">
+                <a16:creationId xmlns:a16="http://schemas.microsoft.com/office/drawing/2010/main" id="{78DB20A5-59C2-406B-9069-655C501513F4}"/>
               </a:ext>
             </a:extLst>
           </p:cNvPr>
@@ -6797,8 +6798,8 @@
         <p:nvPicPr>
           <p:cNvPr descr="A close up of a logo&#10;&#10;Description automatically generated" id="9" name="Picture 11">
             <a:extLst>
-              <a:ext uri="{9A8E5962-5778-468B-80F9-EE76E9E499A1}">
-                <a16:creationId xmlns:a16="http://schemas.microsoft.com/office/drawing/2010/main" id="{39BAF90D-487D-494D-A742-4DEBEA346C5F}"/>
+              <a:ext uri="{11ECE4BA-75DD-4A0C-95B4-48D7B8ABF8F5}">
+                <a16:creationId xmlns:a16="http://schemas.microsoft.com/office/drawing/2010/main" id="{91BDFCD7-0B9B-4C58-B1E5-1D03BD56D96C}"/>
               </a:ext>
             </a:extLst>
           </p:cNvPr>
@@ -6828,8 +6829,8 @@
         <p:nvSpPr>
           <p:cNvPr id="10" name="Text Placeholder 17">
             <a:extLst>
-              <a:ext uri="{F1DA198B-D91B-49A0-8A61-9CD97C24CC64}">
-                <a16:creationId xmlns:a16="http://schemas.microsoft.com/office/drawing/2010/main" id="{439E430F-5CF2-48AE-9237-70A249706440}"/>
+              <a:ext uri="{097942DD-29D8-4925-A5AE-B7FBB4AE5F8B}">
+                <a16:creationId xmlns:a16="http://schemas.microsoft.com/office/drawing/2010/main" id="{9E759D81-0C92-4C38-A329-D416720A4CB4}"/>
               </a:ext>
             </a:extLst>
           </p:cNvPr>
@@ -6884,8 +6885,8 @@
         <p:nvSpPr>
           <p:cNvPr id="11" name="Text Placeholder 17">
             <a:extLst>
-              <a:ext uri="{E785D54B-4D75-41CC-B226-938AD6D9825D}">
-                <a16:creationId xmlns:a16="http://schemas.microsoft.com/office/drawing/2010/main" id="{26FC0064-9C15-4D8F-8339-107ACBFBE323}"/>
+              <a:ext uri="{9E75E62E-C88A-48B3-9769-98452B77A4F7}">
+                <a16:creationId xmlns:a16="http://schemas.microsoft.com/office/drawing/2010/main" id="{9389A11C-8648-4F5A-84D2-754B20FB27C4}"/>
               </a:ext>
             </a:extLst>
           </p:cNvPr>
@@ -6940,8 +6941,8 @@
         <p:nvPicPr>
           <p:cNvPr descr="A close up of a logo&#10;&#10;Description automatically generated" id="12" name="Picture 27">
             <a:extLst>
-              <a:ext uri="{FB1538A4-C679-485D-A919-312279C26B46}">
-                <a16:creationId xmlns:a16="http://schemas.microsoft.com/office/drawing/2010/main" id="{48806E2E-7340-4FF0-82F9-C509F12A2A19}"/>
+              <a:ext uri="{D22E69D0-B4F6-494F-AFD2-02FA371FCA0C}">
+                <a16:creationId xmlns:a16="http://schemas.microsoft.com/office/drawing/2010/main" id="{78E8A2E9-266B-49F3-B9F1-5A204143A4A3}"/>
               </a:ext>
             </a:extLst>
           </p:cNvPr>
@@ -6971,8 +6972,8 @@
         <p:nvSpPr>
           <p:cNvPr id="13" name="Text Placeholder 17">
             <a:extLst>
-              <a:ext uri="{EC35A376-CF2A-4CB0-89C2-0E089F02A742}">
-                <a16:creationId xmlns:a16="http://schemas.microsoft.com/office/drawing/2010/main" id="{9B18C8A9-9290-4346-B035-5BE60E77E695}"/>
+              <a:ext uri="{2FB831DD-242A-4F7C-BFDD-2D90267AFAA3}">
+                <a16:creationId xmlns:a16="http://schemas.microsoft.com/office/drawing/2010/main" id="{6D99D491-BE6A-4776-B484-94DC3EDF7413}"/>
               </a:ext>
             </a:extLst>
           </p:cNvPr>
@@ -7027,8 +7028,8 @@
         <p:nvSpPr>
           <p:cNvPr id="14" name="Text Placeholder 17">
             <a:extLst>
-              <a:ext uri="{C1025606-2B59-4BD0-91F1-6524DB303FAE}">
-                <a16:creationId xmlns:a16="http://schemas.microsoft.com/office/drawing/2010/main" id="{4C61F207-7C08-4375-8A41-595E2692A6FD}"/>
+              <a:ext uri="{7A0B30B4-6D33-4932-9811-74BAB98E33C3}">
+                <a16:creationId xmlns:a16="http://schemas.microsoft.com/office/drawing/2010/main" id="{783F91AC-27E3-4ECC-B886-BAB55F6E63BB}"/>
               </a:ext>
             </a:extLst>
           </p:cNvPr>
@@ -7083,8 +7084,8 @@
         <p:nvPicPr>
           <p:cNvPr descr="A close up of a logo&#10;&#10;Description automatically generated" id="15" name="Picture 32">
             <a:extLst>
-              <a:ext uri="{040AB758-2466-4FF9-A899-F9D06F229BB3}">
-                <a16:creationId xmlns:a16="http://schemas.microsoft.com/office/drawing/2010/main" id="{2753B202-594B-4365-A583-B6B32E634157}"/>
+              <a:ext uri="{BA3B79E8-9E47-45F6-8D8F-987D467C88E5}">
+                <a16:creationId xmlns:a16="http://schemas.microsoft.com/office/drawing/2010/main" id="{6A1F7E16-318B-4760-88FF-E13FE86C3D90}"/>
               </a:ext>
             </a:extLst>
           </p:cNvPr>
@@ -7114,8 +7115,8 @@
         <p:nvSpPr>
           <p:cNvPr id="16" name="Picture Placeholder 4">
             <a:extLst>
-              <a:ext uri="{0407D7DC-455F-4C2D-809F-9CAF259DCD25}">
-                <a16:creationId xmlns:a16="http://schemas.microsoft.com/office/drawing/2010/main" id="{29253371-3480-4078-B67A-25BB354570CA}"/>
+              <a:ext uri="{90E1EA7A-8B4D-4BE6-B5F1-3D63168BC02C}">
+                <a16:creationId xmlns:a16="http://schemas.microsoft.com/office/drawing/2010/main" id="{27F4EFCD-EC94-4A18-96F8-E405B6DD57BA}"/>
               </a:ext>
             </a:extLst>
           </p:cNvPr>
@@ -7158,8 +7159,8 @@
         <p:nvSpPr>
           <p:cNvPr id="17" name="Picture Placeholder 4">
             <a:extLst>
-              <a:ext uri="{43C26DD9-D931-44F9-8F8B-9A589C05A2AD}">
-                <a16:creationId xmlns:a16="http://schemas.microsoft.com/office/drawing/2010/main" id="{E512F4F9-4C27-470B-8100-8594EB8E708C}"/>
+              <a:ext uri="{28332F28-338B-4719-8DE2-01575059B7AE}">
+                <a16:creationId xmlns:a16="http://schemas.microsoft.com/office/drawing/2010/main" id="{11742FC6-84B5-4329-BE90-695209318FAE}"/>
               </a:ext>
             </a:extLst>
           </p:cNvPr>
@@ -7202,8 +7203,8 @@
         <p:nvSpPr>
           <p:cNvPr id="18" name="Picture Placeholder 4">
             <a:extLst>
-              <a:ext uri="{2DE66471-DDA3-471C-8912-80EE477EB67A}">
-                <a16:creationId xmlns:a16="http://schemas.microsoft.com/office/drawing/2010/main" id="{04AE144E-7A75-40FA-BBAF-DF5B2CF449CC}"/>
+              <a:ext uri="{9FAEE4BC-BA36-47EA-8CDF-62F0D349D0E5}">
+                <a16:creationId xmlns:a16="http://schemas.microsoft.com/office/drawing/2010/main" id="{9D9FA68E-E3CE-4622-8B95-8D8178D9062D}"/>
               </a:ext>
             </a:extLst>
           </p:cNvPr>
@@ -7246,8 +7247,8 @@
         <p:nvSpPr>
           <p:cNvPr hidden="false" id="19" name="Date Placeholder 1">
             <a:extLst>
-              <a:ext uri="{4DF21DA1-ED59-4C0A-BF7D-8B382921F711}">
-                <a16:creationId xmlns:a16="http://schemas.microsoft.com/office/drawing/2010/main" id="{0AA60F7B-417F-46EE-816B-9728559E9060}"/>
+              <a:ext uri="{83F3D9C8-5ED8-4AED-B8C9-79C46BC5AFEA}">
+                <a16:creationId xmlns:a16="http://schemas.microsoft.com/office/drawing/2010/main" id="{5F5E2023-045F-4A93-9BC5-6B774C937B43}"/>
               </a:ext>
             </a:extLst>
           </p:cNvPr>
@@ -7295,8 +7296,8 @@
         <p:nvSpPr>
           <p:cNvPr hidden="false" id="20" name="Footer Placeholder 1">
             <a:extLst>
-              <a:ext uri="{F4A09D38-B3EF-4E43-AF2A-BDEC68D89A4E}">
-                <a16:creationId xmlns:a16="http://schemas.microsoft.com/office/drawing/2010/main" id="{0EA580FE-BBC2-46E0-9F18-4D9AB29512B5}"/>
+              <a:ext uri="{5E34C1BB-1438-426F-A2EA-691CCAEF74BB}">
+                <a16:creationId xmlns:a16="http://schemas.microsoft.com/office/drawing/2010/main" id="{C6366A8D-1C1C-48D8-8443-32DC82C73BDB}"/>
               </a:ext>
             </a:extLst>
           </p:cNvPr>
@@ -7342,8 +7343,8 @@
       </p:sp>
     </p:spTree>
     <p:extLst>
-      <p:ext uri="{D74981B6-10E5-4A85-9DEA-E4420E6640BE}">
-        <p14:creationId xmlns:p14="http://schemas.microsoft.com/office/powerpoint/2010/main" val="1713420158744"/>
+      <p:ext uri="{8E094092-BC53-430D-9089-20FCBA7E3930}">
+        <p14:creationId xmlns:p14="http://schemas.microsoft.com/office/powerpoint/2010/main" val="1713440222498"/>
       </p:ext>
     </p:extLst>
   </p:cSld>
@@ -7374,8 +7375,8 @@
         <p:nvSpPr>
           <p:cNvPr id="2" name="Rectangle 21">
             <a:extLst>
-              <a:ext uri="{2736BD19-2713-4C7F-9E94-C3C5AC1EAD13}">
-                <a16:creationId xmlns:a16="http://schemas.microsoft.com/office/drawing/2010/main" id="{FB813ED1-3FD1-4BA1-9A32-1E4E59B25F93}"/>
+              <a:ext uri="{898B5CD2-4395-487A-A981-9166BF0EE65D}">
+                <a16:creationId xmlns:a16="http://schemas.microsoft.com/office/drawing/2010/main" id="{DA3C5538-FCA0-4210-A22E-6972803E2CA1}"/>
               </a:ext>
             </a:extLst>
           </p:cNvPr>
@@ -7431,8 +7432,8 @@
         <p:nvPicPr>
           <p:cNvPr id="3" name="Picture 20">
             <a:extLst>
-              <a:ext uri="{F312C25B-2080-4A5C-8A3E-A005E3ACAD68}">
-                <a16:creationId xmlns:a16="http://schemas.microsoft.com/office/drawing/2010/main" id="{4F36B533-FD0E-471A-A2FC-C8756476F889}"/>
+              <a:ext uri="{C584F819-5473-43F5-8996-3D296C00A43D}">
+                <a16:creationId xmlns:a16="http://schemas.microsoft.com/office/drawing/2010/main" id="{36C2234E-537E-4E01-B64B-74402C2F638A}"/>
               </a:ext>
             </a:extLst>
           </p:cNvPr>
@@ -7465,8 +7466,8 @@
         <p:nvSpPr>
           <p:cNvPr id="4" name="Title 1">
             <a:extLst>
-              <a:ext uri="{3377AD7D-2118-4E75-9835-C09606EECAD9}">
-                <a16:creationId xmlns:a16="http://schemas.microsoft.com/office/drawing/2010/main" id="{81CC72A1-E526-4CBD-A55A-8552828B10CA}"/>
+              <a:ext uri="{80580363-4FEB-49BA-BFDD-574CCC173E41}">
+                <a16:creationId xmlns:a16="http://schemas.microsoft.com/office/drawing/2010/main" id="{D1EC395A-392B-415E-8A99-72669F50C4D3}"/>
               </a:ext>
             </a:extLst>
           </p:cNvPr>
@@ -7509,8 +7510,8 @@
         <p:nvSpPr>
           <p:cNvPr id="5" name="Slide Number Placeholder 5">
             <a:extLst>
-              <a:ext uri="{6C9DE811-85A3-4C9C-9892-37B1DA152C7D}">
-                <a16:creationId xmlns:a16="http://schemas.microsoft.com/office/drawing/2010/main" id="{3F583776-F2FE-434A-9F67-CB57CA54E7BB}"/>
+              <a:ext uri="{28EC32BD-DE72-4BA2-A0BB-36ACB11C8324}">
+                <a16:creationId xmlns:a16="http://schemas.microsoft.com/office/drawing/2010/main" id="{3C29FBDB-767C-4339-B3A7-2A841DA5381D}"/>
               </a:ext>
             </a:extLst>
           </p:cNvPr>
@@ -7543,7 +7544,7 @@
           </a:lstStyle>
           <a:p>
             <a:pPr/>
-            <a:fld id="{0BE9EA5E-FB6C-4654-8303-915CE79AD4FA}" type="slidenum"/>
+            <a:fld id="{807DAA06-4A9F-4573-A05D-03D6111C8BF1}" type="slidenum"/>
             <a:endParaRPr dirty="0" lang="en-US"/>
           </a:p>
         </p:txBody>
@@ -7552,8 +7553,8 @@
         <p:nvPicPr>
           <p:cNvPr id="6" name="Picture 34">
             <a:extLst>
-              <a:ext uri="{663F3819-2968-4728-A2B5-CD8CE469B106}">
-                <a16:creationId xmlns:a16="http://schemas.microsoft.com/office/drawing/2010/main" id="{DB799E86-AAD3-40E4-A66F-36AA774DFDF6}"/>
+              <a:ext uri="{608AEA05-118C-4F78-8B14-ED2B08EA21CE}">
+                <a16:creationId xmlns:a16="http://schemas.microsoft.com/office/drawing/2010/main" id="{F905B9DF-A304-434C-988F-4FE988C7C22E}"/>
               </a:ext>
             </a:extLst>
           </p:cNvPr>
@@ -7586,8 +7587,8 @@
         <p:nvSpPr>
           <p:cNvPr id="7" name="Text Placeholder 4">
             <a:extLst>
-              <a:ext uri="{D1AB0032-7A9E-4E67-90E6-FDBEA8ABD3C0}">
-                <a16:creationId xmlns:a16="http://schemas.microsoft.com/office/drawing/2010/main" id="{802F7C68-457C-4063-A825-918E29A75B95}"/>
+              <a:ext uri="{4E426D57-7960-4A3F-A676-F95E16B54BA4}">
+                <a16:creationId xmlns:a16="http://schemas.microsoft.com/office/drawing/2010/main" id="{3FFA9E86-7214-4C88-BC4E-61745D53A29A}"/>
               </a:ext>
             </a:extLst>
           </p:cNvPr>
@@ -7662,8 +7663,8 @@
         <p:nvSpPr>
           <p:cNvPr id="8" name="Picture Placeholder 4">
             <a:extLst>
-              <a:ext uri="{50CC55B2-0531-432F-88A9-F3749D3AF003}">
-                <a16:creationId xmlns:a16="http://schemas.microsoft.com/office/drawing/2010/main" id="{45B3157B-0593-44E1-AB77-5EFE4B6B935C}"/>
+              <a:ext uri="{D728F0D5-CCA7-4B5F-8764-11D312FEABE3}">
+                <a16:creationId xmlns:a16="http://schemas.microsoft.com/office/drawing/2010/main" id="{38555448-CD12-4A16-B14A-8C8538F9798B}"/>
               </a:ext>
             </a:extLst>
           </p:cNvPr>
@@ -7703,8 +7704,8 @@
         <p:nvSpPr>
           <p:cNvPr id="9" name="Picture Placeholder 4">
             <a:extLst>
-              <a:ext uri="{F0060B96-6452-4D46-982C-38F69D179DB5}">
-                <a16:creationId xmlns:a16="http://schemas.microsoft.com/office/drawing/2010/main" id="{F49A1C44-3E24-4B1E-B877-84A893469E60}"/>
+              <a:ext uri="{45572234-D6E4-4194-A185-8E6429A4910C}">
+                <a16:creationId xmlns:a16="http://schemas.microsoft.com/office/drawing/2010/main" id="{F7C01A7D-D738-4918-99B9-7576C6746E51}"/>
               </a:ext>
             </a:extLst>
           </p:cNvPr>
@@ -7744,8 +7745,8 @@
         <p:nvSpPr>
           <p:cNvPr id="10" name="Picture Placeholder 4">
             <a:extLst>
-              <a:ext uri="{A3D44C06-C346-441D-87C4-6A269B817149}">
-                <a16:creationId xmlns:a16="http://schemas.microsoft.com/office/drawing/2010/main" id="{CB988661-6556-4E31-8DE5-1669DB25D7F9}"/>
+              <a:ext uri="{27DC9ED7-2C99-443F-8A89-29E1CDA5E2AE}">
+                <a16:creationId xmlns:a16="http://schemas.microsoft.com/office/drawing/2010/main" id="{C14B5CB7-F8AB-4401-8CEA-656F2954DA74}"/>
               </a:ext>
             </a:extLst>
           </p:cNvPr>
@@ -7785,8 +7786,8 @@
         <p:nvSpPr>
           <p:cNvPr hidden="false" id="11" name="Date Placeholder 1">
             <a:extLst>
-              <a:ext uri="{71B6327E-CBD8-4E22-9C53-F434CF170907}">
-                <a16:creationId xmlns:a16="http://schemas.microsoft.com/office/drawing/2010/main" id="{14A68510-10AB-45AB-B999-34867D2FEF51}"/>
+              <a:ext uri="{C7796045-B9FA-4733-B31E-228BF15A47F5}">
+                <a16:creationId xmlns:a16="http://schemas.microsoft.com/office/drawing/2010/main" id="{5CBE03B1-F2F6-4193-BEB6-4755FF408E7C}"/>
               </a:ext>
             </a:extLst>
           </p:cNvPr>
@@ -7834,8 +7835,8 @@
         <p:nvSpPr>
           <p:cNvPr hidden="false" id="12" name="Footer Placeholder 1">
             <a:extLst>
-              <a:ext uri="{F26767F3-A9A0-4E71-A334-2A3B2E9FB0A0}">
-                <a16:creationId xmlns:a16="http://schemas.microsoft.com/office/drawing/2010/main" id="{C124DA12-5146-4501-B2D5-E8A8CFC10589}"/>
+              <a:ext uri="{2D830584-20E2-40EB-8325-94B08DA07EF0}">
+                <a16:creationId xmlns:a16="http://schemas.microsoft.com/office/drawing/2010/main" id="{4A5D949E-CEED-45C0-B255-99481D2BD6AF}"/>
               </a:ext>
             </a:extLst>
           </p:cNvPr>
@@ -7881,8 +7882,8 @@
       </p:sp>
     </p:spTree>
     <p:extLst>
-      <p:ext uri="{4B79917C-3610-411B-A57B-4607DB571255}">
-        <p14:creationId xmlns:p14="http://schemas.microsoft.com/office/powerpoint/2010/main" val="1713420158747"/>
+      <p:ext uri="{4AB9CAEE-9217-4028-976A-EED52EE03E90}">
+        <p14:creationId xmlns:p14="http://schemas.microsoft.com/office/powerpoint/2010/main" val="1713440222501"/>
       </p:ext>
     </p:extLst>
   </p:cSld>
@@ -7913,8 +7914,8 @@
         <p:nvPicPr>
           <p:cNvPr id="2" name="Picture 6">
             <a:extLst>
-              <a:ext uri="{175C2C8D-83CF-4BE9-BAB0-AF782C21E373}">
-                <a16:creationId xmlns:a16="http://schemas.microsoft.com/office/drawing/2010/main" id="{7DC4CDA1-AEEB-4DBF-BE0F-38F396B31C8B}"/>
+              <a:ext uri="{49587599-3753-4AB9-8495-0DF7C34A4A66}">
+                <a16:creationId xmlns:a16="http://schemas.microsoft.com/office/drawing/2010/main" id="{F3404CF8-D06B-430B-81F6-A9BDFE6D71D2}"/>
               </a:ext>
             </a:extLst>
           </p:cNvPr>
@@ -7947,8 +7948,8 @@
         <p:nvPicPr>
           <p:cNvPr id="3" name="Picture 7">
             <a:extLst>
-              <a:ext uri="{99DB3E45-EC5C-42A7-9D4A-2AAADD37B742}">
-                <a16:creationId xmlns:a16="http://schemas.microsoft.com/office/drawing/2010/main" id="{6AF7B264-257C-4A82-8D47-6AF0E7EB0048}"/>
+              <a:ext uri="{F13E96F8-93E3-4BA1-AE70-91FA74E56336}">
+                <a16:creationId xmlns:a16="http://schemas.microsoft.com/office/drawing/2010/main" id="{B640534B-45AF-4E8A-9AA2-03C8A4FCE5E8}"/>
               </a:ext>
             </a:extLst>
           </p:cNvPr>
@@ -7981,8 +7982,8 @@
         <p:nvSpPr>
           <p:cNvPr hidden="false" id="4" name="Title 1">
             <a:extLst>
-              <a:ext uri="{CEDA28C2-9B2C-4B71-81B3-6D2AC583B4A3}">
-                <a16:creationId xmlns:a16="http://schemas.microsoft.com/office/drawing/2010/main" id="{084EA593-54D0-4A8F-BEC3-8DB14DC64F90}"/>
+              <a:ext uri="{7E2DB4FB-9CB9-4E29-9197-0DE99D798EED}">
+                <a16:creationId xmlns:a16="http://schemas.microsoft.com/office/drawing/2010/main" id="{A16E641F-1A6E-4697-B424-947B8C8C14D4}"/>
               </a:ext>
             </a:extLst>
           </p:cNvPr>
@@ -8022,8 +8023,8 @@
         <p:nvSpPr>
           <p:cNvPr id="5" name="Slide Number Placeholder 5">
             <a:extLst>
-              <a:ext uri="{F8D60DDD-89B7-4E42-AEAC-A96DD08018ED}">
-                <a16:creationId xmlns:a16="http://schemas.microsoft.com/office/drawing/2010/main" id="{396EEBC8-C043-4658-91C4-DF11EE3ACB4C}"/>
+              <a:ext uri="{776B38AB-34D6-4A47-B9E5-21386B9A4F3B}">
+                <a16:creationId xmlns:a16="http://schemas.microsoft.com/office/drawing/2010/main" id="{3826B604-3648-4D21-B405-932E6B89C52D}"/>
               </a:ext>
             </a:extLst>
           </p:cNvPr>
@@ -8048,7 +8049,7 @@
           <a:lstStyle/>
           <a:p>
             <a:pPr/>
-            <a:fld id="{9B34477D-2C5D-463B-BB82-E534AFE33A06}" type="slidenum"/>
+            <a:fld id="{0605E4C2-F8EA-43E5-8BB2-4E2C0D563444}" type="slidenum"/>
             <a:endParaRPr dirty="0" lang="en-US"/>
           </a:p>
         </p:txBody>
@@ -8057,8 +8058,8 @@
         <p:nvCxnSpPr>
           <p:cNvPr id="6" name="Straight Connector 9">
             <a:extLst>
-              <a:ext uri="{0724902B-050D-4964-AA96-23C409805220}">
-                <a16:creationId xmlns:a16="http://schemas.microsoft.com/office/drawing/2010/main" id="{951ECA19-BB6D-415A-9DB4-09EBF70D86BC}"/>
+              <a:ext uri="{4CD0C7B5-59E9-40AA-9756-C51C6EB7A42C}">
+                <a16:creationId xmlns:a16="http://schemas.microsoft.com/office/drawing/2010/main" id="{DE6891F7-5B59-4ABB-99DC-493B1FEE3C27}"/>
               </a:ext>
             </a:extLst>
           </p:cNvPr>
@@ -8099,8 +8100,8 @@
         <p:nvSpPr>
           <p:cNvPr id="7" name="Text Placeholder 17">
             <a:extLst>
-              <a:ext uri="{DFA67AF2-456B-49C7-B3F2-AED66076F9B7}">
-                <a16:creationId xmlns:a16="http://schemas.microsoft.com/office/drawing/2010/main" id="{105E0BC0-B149-4C78-918B-AA5F2323638B}"/>
+              <a:ext uri="{4CE3F9E0-6104-4884-B630-11A71D1C62CC}">
+                <a16:creationId xmlns:a16="http://schemas.microsoft.com/office/drawing/2010/main" id="{11E58012-B6FA-43C0-94A8-02A781921F20}"/>
               </a:ext>
             </a:extLst>
           </p:cNvPr>
@@ -8155,8 +8156,8 @@
         <p:nvSpPr>
           <p:cNvPr id="8" name="Text Placeholder 17">
             <a:extLst>
-              <a:ext uri="{4267366A-A062-4F10-BD41-4847B3862C49}">
-                <a16:creationId xmlns:a16="http://schemas.microsoft.com/office/drawing/2010/main" id="{0DB4A572-7B63-451E-B6AF-34A6400F8720}"/>
+              <a:ext uri="{59A09DEC-B74C-4C16-94C6-D8DEF0F018C0}">
+                <a16:creationId xmlns:a16="http://schemas.microsoft.com/office/drawing/2010/main" id="{C059CC7E-C42F-460E-B01D-6E4FE2792512}"/>
               </a:ext>
             </a:extLst>
           </p:cNvPr>
@@ -8211,8 +8212,8 @@
         <p:nvPicPr>
           <p:cNvPr descr="A close up of a logo&#10;&#10;Description automatically generated" id="9" name="Picture 11">
             <a:extLst>
-              <a:ext uri="{22E766F5-AFF8-45E0-A0DB-4CCE8FBF8B9D}">
-                <a16:creationId xmlns:a16="http://schemas.microsoft.com/office/drawing/2010/main" id="{75619742-AC21-4B3E-B55E-ADD642ECB3FC}"/>
+              <a:ext uri="{3ECCABDF-FC49-42BF-9CB9-D5CE0749596C}">
+                <a16:creationId xmlns:a16="http://schemas.microsoft.com/office/drawing/2010/main" id="{7D917985-C00F-4D81-82F7-BDB7B66DFB47}"/>
               </a:ext>
             </a:extLst>
           </p:cNvPr>
@@ -8242,8 +8243,8 @@
         <p:nvSpPr>
           <p:cNvPr id="10" name="Text Placeholder 4">
             <a:extLst>
-              <a:ext uri="{7D75346F-0C8D-4AC0-B62E-947CDC28EEA1}">
-                <a16:creationId xmlns:a16="http://schemas.microsoft.com/office/drawing/2010/main" id="{B933AFB3-50C3-4B5A-B5BC-69A6ECCA3D4D}"/>
+              <a:ext uri="{C7C563AB-CBC2-4C6C-81CC-680182782832}">
+                <a16:creationId xmlns:a16="http://schemas.microsoft.com/office/drawing/2010/main" id="{F49CA5CF-F39F-48F5-9A8E-5405CC909148}"/>
               </a:ext>
             </a:extLst>
           </p:cNvPr>
@@ -8298,8 +8299,8 @@
         <p:nvGrpSpPr>
           <p:cNvPr id="11" name="Group 8">
             <a:extLst>
-              <a:ext uri="{82B53C1D-9F71-4C63-9C4E-10B81FBEAD39}">
-                <a16:creationId xmlns:a16="http://schemas.microsoft.com/office/drawing/2010/main" id="{1E10469F-E9C6-49AB-97C7-E8CAD8C7F05F}"/>
+              <a:ext uri="{384EBEA0-4E49-41C5-B68F-EF7C4725CAA1}">
+                <a16:creationId xmlns:a16="http://schemas.microsoft.com/office/drawing/2010/main" id="{4DE7AD71-9AC2-4471-9440-B48B27249C4B}"/>
               </a:ext>
             </a:extLst>
           </p:cNvPr>
@@ -8318,8 +8319,8 @@
           <p:nvCxnSpPr>
             <p:cNvPr id="12" name="Straight Connector 3">
               <a:extLst>
-                <a:ext uri="{E089D95B-66B3-4B63-A436-01CBBCDF7F0C}">
-                  <a16:creationId xmlns:a16="http://schemas.microsoft.com/office/drawing/2010/main" id="{13AAA91C-6B1C-4BFA-B691-ACAB39114169}"/>
+                <a:ext uri="{FF808AE5-1AE1-4CE0-A122-E538AD8ADED1}">
+                  <a16:creationId xmlns:a16="http://schemas.microsoft.com/office/drawing/2010/main" id="{5E118D56-B41C-4DAE-8E54-ABB3C034D79B}"/>
                 </a:ext>
               </a:extLst>
             </p:cNvPr>
@@ -8359,8 +8360,8 @@
           <p:nvSpPr>
             <p:cNvPr id="13" name="Oval 4">
               <a:extLst>
-                <a:ext uri="{252ED2AC-312F-41AC-88C6-0496536B5EE0}">
-                  <a16:creationId xmlns:a16="http://schemas.microsoft.com/office/drawing/2010/main" id="{C34A4571-EC27-46FB-ACF1-A56C5A86C57F}"/>
+                <a:ext uri="{553C38F1-FFCA-422B-BF7D-30449D06854D}">
+                  <a16:creationId xmlns:a16="http://schemas.microsoft.com/office/drawing/2010/main" id="{B4BF2E7D-824B-4DE7-97CD-FC0CF4D4FDDC}"/>
                 </a:ext>
               </a:extLst>
             </p:cNvPr>
@@ -8417,8 +8418,8 @@
         <p:nvSpPr>
           <p:cNvPr id="14" name="Picture Placeholder 13">
             <a:extLst>
-              <a:ext uri="{63A07DC8-23BE-43AE-9618-F815D1C0189C}">
-                <a16:creationId xmlns:a16="http://schemas.microsoft.com/office/drawing/2010/main" id="{23EDD8CF-0244-42A6-9322-01EA9F843B39}"/>
+              <a:ext uri="{4BF14DA8-0A8F-4257-B105-3F03A0348F92}">
+                <a16:creationId xmlns:a16="http://schemas.microsoft.com/office/drawing/2010/main" id="{FE171C89-3B9C-48AB-9F24-237421BE5323}"/>
               </a:ext>
             </a:extLst>
           </p:cNvPr>
@@ -8460,8 +8461,8 @@
         <p:nvSpPr>
           <p:cNvPr id="15" name="Text Placeholder 17">
             <a:extLst>
-              <a:ext uri="{DB8A3538-D19F-4A45-9D93-576D97A6F916}">
-                <a16:creationId xmlns:a16="http://schemas.microsoft.com/office/drawing/2010/main" id="{254610C0-20E3-4BDD-B178-A32D3A12F8AD}"/>
+              <a:ext uri="{C3506E40-98E1-40D0-8BF0-F68585C32006}">
+                <a16:creationId xmlns:a16="http://schemas.microsoft.com/office/drawing/2010/main" id="{FF35D124-9E0E-4C48-A8BC-9B72F1E38352}"/>
               </a:ext>
             </a:extLst>
           </p:cNvPr>
@@ -8516,8 +8517,8 @@
         <p:nvSpPr>
           <p:cNvPr id="16" name="Text Placeholder 17">
             <a:extLst>
-              <a:ext uri="{924C1876-C2F2-4869-BAA7-4DC808DF5425}">
-                <a16:creationId xmlns:a16="http://schemas.microsoft.com/office/drawing/2010/main" id="{E6CFE11C-84D1-40C6-A6DB-E796604BFF14}"/>
+              <a:ext uri="{C3F91724-7CA9-4D03-B0CC-A29CE415F811}">
+                <a16:creationId xmlns:a16="http://schemas.microsoft.com/office/drawing/2010/main" id="{C705D068-9DDC-4412-B178-1AC85EC56B2B}"/>
               </a:ext>
             </a:extLst>
           </p:cNvPr>
@@ -8572,8 +8573,8 @@
         <p:nvPicPr>
           <p:cNvPr descr="A close up of a logo&#10;&#10;Description automatically generated" id="17" name="Picture 61">
             <a:extLst>
-              <a:ext uri="{03F9896B-213A-4018-A331-91ADF784378C}">
-                <a16:creationId xmlns:a16="http://schemas.microsoft.com/office/drawing/2010/main" id="{639FD34F-1B53-4440-8805-63AB4CBDDF54}"/>
+              <a:ext uri="{FA32C505-F193-4CC6-BC85-60072BD8DE8E}">
+                <a16:creationId xmlns:a16="http://schemas.microsoft.com/office/drawing/2010/main" id="{98E7F5A3-8666-4F50-AF68-91804403B4B0}"/>
               </a:ext>
             </a:extLst>
           </p:cNvPr>
@@ -8603,8 +8604,8 @@
         <p:nvGrpSpPr>
           <p:cNvPr id="18" name="Group 62">
             <a:extLst>
-              <a:ext uri="{3F9F86E1-DD78-467B-83D5-3E4E275694AE}">
-                <a16:creationId xmlns:a16="http://schemas.microsoft.com/office/drawing/2010/main" id="{9A86BB2E-EADD-436D-8CCD-31E92336F036}"/>
+              <a:ext uri="{38C12D57-B926-44B5-81FA-50755760F6A0}">
+                <a16:creationId xmlns:a16="http://schemas.microsoft.com/office/drawing/2010/main" id="{DD0ABBFE-F836-418E-AE0C-431E35EEAB0F}"/>
               </a:ext>
             </a:extLst>
           </p:cNvPr>
@@ -8623,8 +8624,8 @@
           <p:nvCxnSpPr>
             <p:cNvPr id="19" name="Straight Connector 63">
               <a:extLst>
-                <a:ext uri="{495A8497-7CB6-4037-9337-735238AF8F9A}">
-                  <a16:creationId xmlns:a16="http://schemas.microsoft.com/office/drawing/2010/main" id="{F43E139E-D54D-431F-9624-C741B56BE214}"/>
+                <a:ext uri="{A905CD92-7AED-4885-83E1-90AF6052E1EB}">
+                  <a16:creationId xmlns:a16="http://schemas.microsoft.com/office/drawing/2010/main" id="{5390CFA4-4EC4-497D-9307-23AC31B47F89}"/>
                 </a:ext>
               </a:extLst>
             </p:cNvPr>
@@ -8664,8 +8665,8 @@
           <p:nvSpPr>
             <p:cNvPr id="20" name="Oval 64">
               <a:extLst>
-                <a:ext uri="{211F5786-C223-4D90-BCDE-F40462EF5B26}">
-                  <a16:creationId xmlns:a16="http://schemas.microsoft.com/office/drawing/2010/main" id="{7B938458-0B69-4B12-A061-17CA824F36B6}"/>
+                <a:ext uri="{4D25C9C6-2A4A-4A54-92FF-6EDB6DAEB2B0}">
+                  <a16:creationId xmlns:a16="http://schemas.microsoft.com/office/drawing/2010/main" id="{D787C156-DC3D-4E5A-B4FF-3A276DC11042}"/>
                 </a:ext>
               </a:extLst>
             </p:cNvPr>
@@ -8722,8 +8723,8 @@
         <p:nvSpPr>
           <p:cNvPr id="21" name="Picture Placeholder 13">
             <a:extLst>
-              <a:ext uri="{FC9A9166-BFF0-4799-A630-D7DFFA8C04D3}">
-                <a16:creationId xmlns:a16="http://schemas.microsoft.com/office/drawing/2010/main" id="{0EB18EAC-86CD-411A-9F58-2523BAAD542A}"/>
+              <a:ext uri="{84A05B3D-4D80-4927-99FF-10738431B2F7}">
+                <a16:creationId xmlns:a16="http://schemas.microsoft.com/office/drawing/2010/main" id="{F8BB77E2-9D2F-41F1-AB7C-6E62576E64EA}"/>
               </a:ext>
             </a:extLst>
           </p:cNvPr>
@@ -8765,8 +8766,8 @@
         <p:nvSpPr>
           <p:cNvPr id="22" name="Text Placeholder 17">
             <a:extLst>
-              <a:ext uri="{E921AAFD-4554-4502-9A1C-FA2CFA6A4371}">
-                <a16:creationId xmlns:a16="http://schemas.microsoft.com/office/drawing/2010/main" id="{8E9D4DE3-E795-47D0-B030-30004D5DF979}"/>
+              <a:ext uri="{25C44F36-2BDC-4CD5-BEB5-E2F6E1E5E9D3}">
+                <a16:creationId xmlns:a16="http://schemas.microsoft.com/office/drawing/2010/main" id="{8F73176F-8294-4889-A5AA-82C57B630468}"/>
               </a:ext>
             </a:extLst>
           </p:cNvPr>
@@ -8821,8 +8822,8 @@
         <p:nvSpPr>
           <p:cNvPr id="23" name="Text Placeholder 17">
             <a:extLst>
-              <a:ext uri="{1558D951-1527-4C77-9F25-78A6EE5807B2}">
-                <a16:creationId xmlns:a16="http://schemas.microsoft.com/office/drawing/2010/main" id="{10F929D9-CA69-43F3-B5E6-0498CD38B2EC}"/>
+              <a:ext uri="{E74633E0-1D26-478B-972B-49383145D736}">
+                <a16:creationId xmlns:a16="http://schemas.microsoft.com/office/drawing/2010/main" id="{BAF8A474-75AA-4B8B-A5B5-24CA99D2C43D}"/>
               </a:ext>
             </a:extLst>
           </p:cNvPr>
@@ -8877,8 +8878,8 @@
         <p:nvPicPr>
           <p:cNvPr descr="A close up of a logo&#10;&#10;Description automatically generated" id="24" name="Picture 68">
             <a:extLst>
-              <a:ext uri="{2AB81F00-8CD0-4361-9440-9D7F3D53E572}">
-                <a16:creationId xmlns:a16="http://schemas.microsoft.com/office/drawing/2010/main" id="{C1A82772-DB0A-4681-838A-DD2157183F0E}"/>
+              <a:ext uri="{F9F8134D-B092-4809-9B1C-51A6BF75BCDC}">
+                <a16:creationId xmlns:a16="http://schemas.microsoft.com/office/drawing/2010/main" id="{12E9243F-66E7-4101-B793-BD1437CE2BEC}"/>
               </a:ext>
             </a:extLst>
           </p:cNvPr>
@@ -8908,8 +8909,8 @@
         <p:nvGrpSpPr>
           <p:cNvPr id="25" name="Group 69">
             <a:extLst>
-              <a:ext uri="{0B0F3A30-EA7F-40C8-83FD-A09D4057A61B}">
-                <a16:creationId xmlns:a16="http://schemas.microsoft.com/office/drawing/2010/main" id="{03C2943A-9299-4D73-95CA-CEF24D145B99}"/>
+              <a:ext uri="{8FB1C7D4-81D2-4819-8E09-26B7968A9E46}">
+                <a16:creationId xmlns:a16="http://schemas.microsoft.com/office/drawing/2010/main" id="{EA8AEE1E-E8BF-4B92-94BE-C78F74C52510}"/>
               </a:ext>
             </a:extLst>
           </p:cNvPr>
@@ -8928,8 +8929,8 @@
           <p:nvCxnSpPr>
             <p:cNvPr id="26" name="Straight Connector 70">
               <a:extLst>
-                <a:ext uri="{C4F17311-A8B4-4DEC-90C4-C57D56357D6D}">
-                  <a16:creationId xmlns:a16="http://schemas.microsoft.com/office/drawing/2010/main" id="{929277B7-E326-4922-B55E-76EAD5F2AF1B}"/>
+                <a:ext uri="{48AA71C2-20BC-4DA8-BDF3-F400CCA27873}">
+                  <a16:creationId xmlns:a16="http://schemas.microsoft.com/office/drawing/2010/main" id="{C21EAF0C-70FD-404B-BE3E-5D044574D23F}"/>
                 </a:ext>
               </a:extLst>
             </p:cNvPr>
@@ -8969,8 +8970,8 @@
           <p:nvSpPr>
             <p:cNvPr id="27" name="Oval 71">
               <a:extLst>
-                <a:ext uri="{B102E573-F3E3-4E4B-BD3A-6F7625BE7054}">
-                  <a16:creationId xmlns:a16="http://schemas.microsoft.com/office/drawing/2010/main" id="{B79E8E5E-39B0-4335-B86C-19EC50D4A4D8}"/>
+                <a:ext uri="{A9802FDD-0BD3-4874-89E1-229C19565883}">
+                  <a16:creationId xmlns:a16="http://schemas.microsoft.com/office/drawing/2010/main" id="{ACCB1E0F-6EE4-4CBE-AB81-E25D669595C0}"/>
                 </a:ext>
               </a:extLst>
             </p:cNvPr>
@@ -9027,8 +9028,8 @@
         <p:nvSpPr>
           <p:cNvPr id="28" name="Picture Placeholder 13">
             <a:extLst>
-              <a:ext uri="{B4E99A70-1916-43CD-803E-3AA6293DE952}">
-                <a16:creationId xmlns:a16="http://schemas.microsoft.com/office/drawing/2010/main" id="{A163176C-73B6-4C3A-9C3E-3FBC69A08C44}"/>
+              <a:ext uri="{8ED3EB76-0132-46E9-B766-525FC402DB87}">
+                <a16:creationId xmlns:a16="http://schemas.microsoft.com/office/drawing/2010/main" id="{85C3E471-E65A-4AF0-BFE1-B535174C3AEB}"/>
               </a:ext>
             </a:extLst>
           </p:cNvPr>
@@ -9070,8 +9071,8 @@
         <p:nvSpPr>
           <p:cNvPr id="29" name="Text Placeholder 17">
             <a:extLst>
-              <a:ext uri="{7232215E-2FD0-41F5-8C29-0D66AF023341}">
-                <a16:creationId xmlns:a16="http://schemas.microsoft.com/office/drawing/2010/main" id="{5B0C5937-CFB6-4B7D-BDE8-9FDACBBF35FA}"/>
+              <a:ext uri="{3F41946C-03FD-4C1B-977B-753D7D343AF5}">
+                <a16:creationId xmlns:a16="http://schemas.microsoft.com/office/drawing/2010/main" id="{10CF839A-8FB9-42D8-AE1C-66D29EF3FE7E}"/>
               </a:ext>
             </a:extLst>
           </p:cNvPr>
@@ -9126,8 +9127,8 @@
         <p:nvSpPr>
           <p:cNvPr id="30" name="Text Placeholder 17">
             <a:extLst>
-              <a:ext uri="{EC38103E-CF02-4FA9-92F5-5996A22CAA05}">
-                <a16:creationId xmlns:a16="http://schemas.microsoft.com/office/drawing/2010/main" id="{4BC976E9-47AD-4219-A9A3-6C1A9496F3AE}"/>
+              <a:ext uri="{DBBFD914-8988-4C3F-8DAF-31CD7C4FF739}">
+                <a16:creationId xmlns:a16="http://schemas.microsoft.com/office/drawing/2010/main" id="{F47A05D9-8CDF-4F5F-B750-695D5D6EBAA6}"/>
               </a:ext>
             </a:extLst>
           </p:cNvPr>
@@ -9182,8 +9183,8 @@
         <p:nvPicPr>
           <p:cNvPr descr="A close up of a logo&#10;&#10;Description automatically generated" id="31" name="Picture 75">
             <a:extLst>
-              <a:ext uri="{15BD06B6-E9FC-49B4-954C-6D88F348147C}">
-                <a16:creationId xmlns:a16="http://schemas.microsoft.com/office/drawing/2010/main" id="{47427578-B5B8-47AB-A7B6-A298F1A437C3}"/>
+              <a:ext uri="{DBC32960-7154-4C9C-8820-692D3CC6882A}">
+                <a16:creationId xmlns:a16="http://schemas.microsoft.com/office/drawing/2010/main" id="{37A4E2D8-8685-44ED-834F-D4F103D8310F}"/>
               </a:ext>
             </a:extLst>
           </p:cNvPr>
@@ -9213,8 +9214,8 @@
         <p:nvGrpSpPr>
           <p:cNvPr id="32" name="Group 76">
             <a:extLst>
-              <a:ext uri="{5B3B9938-E82F-4176-B235-2643A89CA216}">
-                <a16:creationId xmlns:a16="http://schemas.microsoft.com/office/drawing/2010/main" id="{4645325C-1F58-45AE-A5A5-EE9A8ABC4CFC}"/>
+              <a:ext uri="{F36286D8-6843-4E00-B479-2A77444D0810}">
+                <a16:creationId xmlns:a16="http://schemas.microsoft.com/office/drawing/2010/main" id="{F8B11B4A-4385-4441-A512-0D37C9B43A14}"/>
               </a:ext>
             </a:extLst>
           </p:cNvPr>
@@ -9233,8 +9234,8 @@
           <p:nvCxnSpPr>
             <p:cNvPr id="33" name="Straight Connector 77">
               <a:extLst>
-                <a:ext uri="{A1984225-CDA4-4C9D-A795-3D73639634B5}">
-                  <a16:creationId xmlns:a16="http://schemas.microsoft.com/office/drawing/2010/main" id="{7E3EEA03-CAB6-4FE2-8850-C35A431E7917}"/>
+                <a:ext uri="{46427960-F8F3-4021-A662-B6E5E2CC4446}">
+                  <a16:creationId xmlns:a16="http://schemas.microsoft.com/office/drawing/2010/main" id="{2D259ED8-7A32-49EE-8D98-F09038F66E4D}"/>
                 </a:ext>
               </a:extLst>
             </p:cNvPr>
@@ -9274,8 +9275,8 @@
           <p:nvSpPr>
             <p:cNvPr id="34" name="Oval 78">
               <a:extLst>
-                <a:ext uri="{B1EC3C46-FC99-4862-A24A-AEDD3787C855}">
-                  <a16:creationId xmlns:a16="http://schemas.microsoft.com/office/drawing/2010/main" id="{ED6E2591-2AFD-4122-A2E4-D8E7DDC72C76}"/>
+                <a:ext uri="{7EEBA800-69A6-4101-984D-CB705ECEF168}">
+                  <a16:creationId xmlns:a16="http://schemas.microsoft.com/office/drawing/2010/main" id="{059EA4AC-E09D-49DE-92EA-E5C54774E5FF}"/>
                 </a:ext>
               </a:extLst>
             </p:cNvPr>
@@ -9332,8 +9333,8 @@
         <p:nvSpPr>
           <p:cNvPr id="35" name="Picture Placeholder 13">
             <a:extLst>
-              <a:ext uri="{250C93DE-1515-4C01-84A1-7D47B001F4DE}">
-                <a16:creationId xmlns:a16="http://schemas.microsoft.com/office/drawing/2010/main" id="{71FAD84F-63CB-4D67-8098-F91E4CF7DC60}"/>
+              <a:ext uri="{D6D81B80-172A-40EB-B3DE-5FA02A23046A}">
+                <a16:creationId xmlns:a16="http://schemas.microsoft.com/office/drawing/2010/main" id="{1C6867DB-5E43-4C52-923E-09638A8C3E9D}"/>
               </a:ext>
             </a:extLst>
           </p:cNvPr>
@@ -9375,8 +9376,8 @@
         <p:nvSpPr>
           <p:cNvPr id="36" name="Text Placeholder 17">
             <a:extLst>
-              <a:ext uri="{92A0B4AA-BF11-4CE1-85B8-7977FCBFCA69}">
-                <a16:creationId xmlns:a16="http://schemas.microsoft.com/office/drawing/2010/main" id="{A119C10A-79CB-407E-9E6D-783B792CD58F}"/>
+              <a:ext uri="{20BB2E45-E33A-4D0E-A740-4DD2228077B5}">
+                <a16:creationId xmlns:a16="http://schemas.microsoft.com/office/drawing/2010/main" id="{D86BE06F-EC51-47D8-A84E-13CF73FC1286}"/>
               </a:ext>
             </a:extLst>
           </p:cNvPr>
@@ -9431,8 +9432,8 @@
         <p:nvSpPr>
           <p:cNvPr id="37" name="Text Placeholder 17">
             <a:extLst>
-              <a:ext uri="{B84890F9-B62E-4822-9462-BBE8F50B4D5C}">
-                <a16:creationId xmlns:a16="http://schemas.microsoft.com/office/drawing/2010/main" id="{666FEBEF-1F8B-483D-AE74-C5F50D907560}"/>
+              <a:ext uri="{B453ECEE-62B8-44B7-8A48-B9E38EE585EC}">
+                <a16:creationId xmlns:a16="http://schemas.microsoft.com/office/drawing/2010/main" id="{11CC86B8-9E66-4260-883B-668A68C95239}"/>
               </a:ext>
             </a:extLst>
           </p:cNvPr>
@@ -9487,8 +9488,8 @@
         <p:nvPicPr>
           <p:cNvPr descr="A close up of a logo&#10;&#10;Description automatically generated" id="38" name="Picture 82">
             <a:extLst>
-              <a:ext uri="{7EF1F9C7-B64A-41A6-9CDB-412472D73AB1}">
-                <a16:creationId xmlns:a16="http://schemas.microsoft.com/office/drawing/2010/main" id="{89572998-49C7-4734-B9BB-3AA4F51E41A5}"/>
+              <a:ext uri="{53E43267-5D3F-44FE-BAC2-8C78725906FB}">
+                <a16:creationId xmlns:a16="http://schemas.microsoft.com/office/drawing/2010/main" id="{51391CDD-7AA1-4751-A73B-700ED1215E9B}"/>
               </a:ext>
             </a:extLst>
           </p:cNvPr>
@@ -9518,8 +9519,8 @@
         <p:nvGrpSpPr>
           <p:cNvPr id="39" name="Group 83">
             <a:extLst>
-              <a:ext uri="{93620F27-52BB-498E-8BE4-F7D3A6E52594}">
-                <a16:creationId xmlns:a16="http://schemas.microsoft.com/office/drawing/2010/main" id="{B2595910-8BFD-46AC-A157-4E7AB3A08BF0}"/>
+              <a:ext uri="{77212FB6-1684-4238-A83D-E78776E7690F}">
+                <a16:creationId xmlns:a16="http://schemas.microsoft.com/office/drawing/2010/main" id="{F94B273C-857A-49DE-A328-D0B693B40F42}"/>
               </a:ext>
             </a:extLst>
           </p:cNvPr>
@@ -9538,8 +9539,8 @@
           <p:nvCxnSpPr>
             <p:cNvPr id="40" name="Straight Connector 84">
               <a:extLst>
-                <a:ext uri="{44A8040E-2CD2-4DE2-B0CE-F484609FEF2D}">
-                  <a16:creationId xmlns:a16="http://schemas.microsoft.com/office/drawing/2010/main" id="{46C9695E-B84E-423A-A257-49842B413594}"/>
+                <a:ext uri="{DCA7C55E-715A-49AD-8D86-0EB812361E66}">
+                  <a16:creationId xmlns:a16="http://schemas.microsoft.com/office/drawing/2010/main" id="{4C1FF3C1-6C01-4FDE-8D77-FCFCA8A0E3D8}"/>
                 </a:ext>
               </a:extLst>
             </p:cNvPr>
@@ -9579,8 +9580,8 @@
           <p:nvSpPr>
             <p:cNvPr id="41" name="Oval 85">
               <a:extLst>
-                <a:ext uri="{4034B6B4-C1EB-486F-9131-7C93BFDC3C18}">
-                  <a16:creationId xmlns:a16="http://schemas.microsoft.com/office/drawing/2010/main" id="{BC7143DB-9741-4DEF-A09C-DA0FA6A239E1}"/>
+                <a:ext uri="{C7E06D56-D3A2-4230-8251-DF9C0768528B}">
+                  <a16:creationId xmlns:a16="http://schemas.microsoft.com/office/drawing/2010/main" id="{19DF3FF1-11F2-40F1-8B75-421EEB319B64}"/>
                 </a:ext>
               </a:extLst>
             </p:cNvPr>
@@ -9637,8 +9638,8 @@
         <p:nvSpPr>
           <p:cNvPr id="42" name="Picture Placeholder 13">
             <a:extLst>
-              <a:ext uri="{3F0D72FE-4570-4DC2-8BBC-AA55B016B154}">
-                <a16:creationId xmlns:a16="http://schemas.microsoft.com/office/drawing/2010/main" id="{B0454F31-CB04-40D0-A66B-C013CEA5D817}"/>
+              <a:ext uri="{9002445B-D28C-4CC6-B3A7-802E0BE95A6A}">
+                <a16:creationId xmlns:a16="http://schemas.microsoft.com/office/drawing/2010/main" id="{723DE83F-9A9F-4B0F-90B4-004593AC180F}"/>
               </a:ext>
             </a:extLst>
           </p:cNvPr>
@@ -9680,8 +9681,8 @@
         <p:nvSpPr>
           <p:cNvPr hidden="false" id="43" name="Date Placeholder 1">
             <a:extLst>
-              <a:ext uri="{A0831517-BFDB-4053-9AEE-7C08AE15CAE1}">
-                <a16:creationId xmlns:a16="http://schemas.microsoft.com/office/drawing/2010/main" id="{0730B71F-216C-45D1-91A0-89BDA864A408}"/>
+              <a:ext uri="{0565DD79-0EF8-4C07-AAD9-04BD56305673}">
+                <a16:creationId xmlns:a16="http://schemas.microsoft.com/office/drawing/2010/main" id="{F04A9952-9FCA-4F84-B138-06BD33DB296B}"/>
               </a:ext>
             </a:extLst>
           </p:cNvPr>
@@ -9729,8 +9730,8 @@
         <p:nvSpPr>
           <p:cNvPr hidden="false" id="44" name="Footer Placeholder 1">
             <a:extLst>
-              <a:ext uri="{BDFE9F33-BC97-48AB-A5CC-6699EE11FC01}">
-                <a16:creationId xmlns:a16="http://schemas.microsoft.com/office/drawing/2010/main" id="{780F9596-445A-4A68-A0EE-B33D9F0CAB01}"/>
+              <a:ext uri="{ACE7AE53-1614-4299-91F5-E3B96E7DDE1E}">
+                <a16:creationId xmlns:a16="http://schemas.microsoft.com/office/drawing/2010/main" id="{99494E34-A712-4343-9A99-4E500059C395}"/>
               </a:ext>
             </a:extLst>
           </p:cNvPr>
@@ -9776,8 +9777,8 @@
       </p:sp>
     </p:spTree>
     <p:extLst>
-      <p:ext uri="{181D3CBF-9ADB-4515-8E41-B4466A99ABA6}">
-        <p14:creationId xmlns:p14="http://schemas.microsoft.com/office/powerpoint/2010/main" val="1713420158751"/>
+      <p:ext uri="{D511987C-9EFE-4057-B1F7-EE50758AA885}">
+        <p14:creationId xmlns:p14="http://schemas.microsoft.com/office/powerpoint/2010/main" val="1713440222504"/>
       </p:ext>
     </p:extLst>
   </p:cSld>
@@ -9808,8 +9809,8 @@
         <p:nvSpPr>
           <p:cNvPr id="2" name="Rectangle 6">
             <a:extLst>
-              <a:ext uri="{7D2F008C-35BE-40D3-88D5-7B567CBA35B3}">
-                <a16:creationId xmlns:a16="http://schemas.microsoft.com/office/drawing/2010/main" id="{9F3582EE-E8B4-4589-917A-80D65D217FAF}"/>
+              <a:ext uri="{2924E651-0BE4-4401-8B10-F6CCB0C3104D}">
+                <a16:creationId xmlns:a16="http://schemas.microsoft.com/office/drawing/2010/main" id="{6DE366F5-1E55-414B-A09A-BE45F1C7A518}"/>
               </a:ext>
             </a:extLst>
           </p:cNvPr>
@@ -9865,8 +9866,8 @@
         <p:nvPicPr>
           <p:cNvPr descr="A picture containing animal, light&#10;&#10;Description automatically generated" id="3" name="Picture 24">
             <a:extLst>
-              <a:ext uri="{4AE81CF8-7DEC-4057-9BE0-1991E9C86508}">
-                <a16:creationId xmlns:a16="http://schemas.microsoft.com/office/drawing/2010/main" id="{6F20DEA2-74CD-436E-AF0C-0A112B5E33A4}"/>
+              <a:ext uri="{4893C1E5-55E3-4A31-AB00-A59334ED8826}">
+                <a16:creationId xmlns:a16="http://schemas.microsoft.com/office/drawing/2010/main" id="{BC37E8FE-7435-4C7F-B448-66C434B370EC}"/>
               </a:ext>
             </a:extLst>
           </p:cNvPr>
@@ -9899,8 +9900,8 @@
         <p:nvPicPr>
           <p:cNvPr id="4" name="Picture 9">
             <a:extLst>
-              <a:ext uri="{B1B89FC2-2AD6-427F-AE03-4A198C121839}">
-                <a16:creationId xmlns:a16="http://schemas.microsoft.com/office/drawing/2010/main" id="{1B92A69F-90F6-4CC3-BE97-7FA61C13EEC3}"/>
+              <a:ext uri="{BEAAF831-3347-4EFE-A309-088AEA4C3E8E}">
+                <a16:creationId xmlns:a16="http://schemas.microsoft.com/office/drawing/2010/main" id="{BB866054-E8C7-4167-9C1C-BD1CC344BDED}"/>
               </a:ext>
             </a:extLst>
           </p:cNvPr>
@@ -9933,8 +9934,8 @@
         <p:nvSpPr>
           <p:cNvPr hidden="false" id="5" name="Title 1">
             <a:extLst>
-              <a:ext uri="{AE09344D-E69D-4724-AE85-5EF8BE772AE3}">
-                <a16:creationId xmlns:a16="http://schemas.microsoft.com/office/drawing/2010/main" id="{0AEEBFB3-0FFA-47F4-9BD1-1EDBD39CD10C}"/>
+              <a:ext uri="{80E061E4-59D8-4B35-AE97-C4D4E8F239A7}">
+                <a16:creationId xmlns:a16="http://schemas.microsoft.com/office/drawing/2010/main" id="{D1964C5E-B3D9-4A76-B27C-138B472717C5}"/>
               </a:ext>
             </a:extLst>
           </p:cNvPr>
@@ -9979,8 +9980,8 @@
         <p:nvSpPr>
           <p:cNvPr id="6" name="Text Placeholder 22">
             <a:extLst>
-              <a:ext uri="{E23FBDFC-1A6A-43DC-BF4B-795518291A5F}">
-                <a16:creationId xmlns:a16="http://schemas.microsoft.com/office/drawing/2010/main" id="{D431333E-9497-4D55-838B-74DF9C07DE2C}"/>
+              <a:ext uri="{8AA13EEF-2370-4D65-8228-EF021E65042A}">
+                <a16:creationId xmlns:a16="http://schemas.microsoft.com/office/drawing/2010/main" id="{F8379887-30F2-40CA-80E9-8013B076A705}"/>
               </a:ext>
             </a:extLst>
           </p:cNvPr>
@@ -10071,8 +10072,8 @@
         <p:nvSpPr>
           <p:cNvPr id="7" name="Slide Number Placeholder 2">
             <a:extLst>
-              <a:ext uri="{9B6A49E6-224C-4FBB-AEC0-79E7728EA5BB}">
-                <a16:creationId xmlns:a16="http://schemas.microsoft.com/office/drawing/2010/main" id="{766253BB-08FA-4672-BB4F-DBF5D454604A}"/>
+              <a:ext uri="{56D5327B-5262-4F31-B501-3FE04428162A}">
+                <a16:creationId xmlns:a16="http://schemas.microsoft.com/office/drawing/2010/main" id="{B55D4AEF-96C9-4634-B810-033F1AB9B6E9}"/>
               </a:ext>
             </a:extLst>
           </p:cNvPr>
@@ -10097,7 +10098,7 @@
           <a:lstStyle/>
           <a:p>
             <a:pPr/>
-            <a:fld id="{A51DC253-0856-4189-8AB1-3BEA8E06BCCC}" type="slidenum"/>
+            <a:fld id="{9DB2E7A7-68B5-4F8F-A0E5-B4E4A35024AD}" type="slidenum"/>
             <a:endParaRPr dirty="0" lang="en-US"/>
           </a:p>
         </p:txBody>
@@ -10106,8 +10107,8 @@
         <p:nvSpPr>
           <p:cNvPr id="8" name="Text Placeholder 22">
             <a:extLst>
-              <a:ext uri="{650C033C-BF32-44A5-8427-79FF1D4778DB}">
-                <a16:creationId xmlns:a16="http://schemas.microsoft.com/office/drawing/2010/main" id="{4EC9BF83-7E2D-4D9B-B7FC-27A4EE2C3F4D}"/>
+              <a:ext uri="{CB9AA4FF-A08E-4B48-80F3-800064D2114B}">
+                <a16:creationId xmlns:a16="http://schemas.microsoft.com/office/drawing/2010/main" id="{63C493EA-817B-4171-B51F-656C15368A9A}"/>
               </a:ext>
             </a:extLst>
           </p:cNvPr>
@@ -10198,8 +10199,8 @@
         <p:nvSpPr>
           <p:cNvPr id="9" name="Text Placeholder 22">
             <a:extLst>
-              <a:ext uri="{256C828E-91EE-4B7D-A642-A08131409FAB}">
-                <a16:creationId xmlns:a16="http://schemas.microsoft.com/office/drawing/2010/main" id="{19C9E124-D7B8-43AD-B48F-18486E99CF53}"/>
+              <a:ext uri="{5A4B93D6-2BAE-4838-B069-AC4B7F099B45}">
+                <a16:creationId xmlns:a16="http://schemas.microsoft.com/office/drawing/2010/main" id="{73F21310-3657-40F0-92F7-C8EB7401BA9C}"/>
               </a:ext>
             </a:extLst>
           </p:cNvPr>
@@ -10290,8 +10291,8 @@
         <p:nvSpPr>
           <p:cNvPr id="10" name="Text Placeholder 22">
             <a:extLst>
-              <a:ext uri="{8ABA0BB5-745F-4707-B2E8-D1089EE20C16}">
-                <a16:creationId xmlns:a16="http://schemas.microsoft.com/office/drawing/2010/main" id="{217534F9-4922-4276-BFD2-FC9550A4630D}"/>
+              <a:ext uri="{9AF37DC7-42D2-4F63-8209-32F6BC9E26AE}">
+                <a16:creationId xmlns:a16="http://schemas.microsoft.com/office/drawing/2010/main" id="{657D046A-1DCD-46B1-A1A7-F29AACBE6A75}"/>
               </a:ext>
             </a:extLst>
           </p:cNvPr>
@@ -10382,8 +10383,8 @@
         <p:nvSpPr>
           <p:cNvPr id="11" name="Text Placeholder 22">
             <a:extLst>
-              <a:ext uri="{A4D1F82A-409D-426F-A341-73AF0F8AF26D}">
-                <a16:creationId xmlns:a16="http://schemas.microsoft.com/office/drawing/2010/main" id="{3DFF61D6-9760-4FFC-B298-37776E9D4522}"/>
+              <a:ext uri="{9E1F0841-6BF3-4AA3-B67A-2485D021923E}">
+                <a16:creationId xmlns:a16="http://schemas.microsoft.com/office/drawing/2010/main" id="{86CF92B0-6A76-40D8-BB14-B2486ECB990A}"/>
               </a:ext>
             </a:extLst>
           </p:cNvPr>
@@ -10474,8 +10475,8 @@
         <p:nvSpPr>
           <p:cNvPr id="12" name="Text Placeholder 22">
             <a:extLst>
-              <a:ext uri="{85DF495E-59E3-41BE-81D4-665AF1B238C7}">
-                <a16:creationId xmlns:a16="http://schemas.microsoft.com/office/drawing/2010/main" id="{901B2607-3AC3-4889-ACC9-0F534010B322}"/>
+              <a:ext uri="{52864DB4-11FC-4035-BF51-82F1F237D0E8}">
+                <a16:creationId xmlns:a16="http://schemas.microsoft.com/office/drawing/2010/main" id="{5F40C47F-4B14-431C-82E3-C342669D35F9}"/>
               </a:ext>
             </a:extLst>
           </p:cNvPr>
@@ -10566,8 +10567,8 @@
         <p:nvSpPr>
           <p:cNvPr id="13" name="Text Placeholder 22">
             <a:extLst>
-              <a:ext uri="{6909602A-AABB-4A14-931F-52661E4AF1AE}">
-                <a16:creationId xmlns:a16="http://schemas.microsoft.com/office/drawing/2010/main" id="{DFB6CF66-3175-4BAE-8615-99EF6134E2A7}"/>
+              <a:ext uri="{016EDDA2-D4D3-489A-8696-7A0998612C3A}">
+                <a16:creationId xmlns:a16="http://schemas.microsoft.com/office/drawing/2010/main" id="{2063B3B2-25EF-4DAF-9E12-3DD9918CF5BF}"/>
               </a:ext>
             </a:extLst>
           </p:cNvPr>
@@ -10658,8 +10659,8 @@
         <p:nvSpPr>
           <p:cNvPr id="14" name="Text Placeholder 22">
             <a:extLst>
-              <a:ext uri="{EE77808A-756D-4618-BFDC-4BC254371880}">
-                <a16:creationId xmlns:a16="http://schemas.microsoft.com/office/drawing/2010/main" id="{B35677B0-292A-4A46-BCE8-311D4D71AA11}"/>
+              <a:ext uri="{ABD81918-1673-432D-86AC-16D18F11C15E}">
+                <a16:creationId xmlns:a16="http://schemas.microsoft.com/office/drawing/2010/main" id="{482203B0-7B85-41F6-BE84-E479A1B3DB7D}"/>
               </a:ext>
             </a:extLst>
           </p:cNvPr>
@@ -10751,8 +10752,8 @@
         <p:nvSpPr>
           <p:cNvPr id="15" name="Picture Placeholder 5">
             <a:extLst>
-              <a:ext uri="{F53C8701-4A75-4FD3-8A8A-827C3462F6D0}">
-                <a16:creationId xmlns:a16="http://schemas.microsoft.com/office/drawing/2010/main" id="{3C88FD8C-21D3-479B-B1B7-CBFEA32BC546}"/>
+              <a:ext uri="{C0F6B7B9-3505-429B-80C5-421927D968D8}">
+                <a16:creationId xmlns:a16="http://schemas.microsoft.com/office/drawing/2010/main" id="{3858D24B-BD7E-499D-BEB3-5EC644893B13}"/>
               </a:ext>
             </a:extLst>
           </p:cNvPr>
@@ -10786,8 +10787,8 @@
         <p:nvSpPr>
           <p:cNvPr id="16" name="Picture Placeholder 5">
             <a:extLst>
-              <a:ext uri="{581EF347-A34C-4631-8A19-DEB0316032A3}">
-                <a16:creationId xmlns:a16="http://schemas.microsoft.com/office/drawing/2010/main" id="{BD568343-0A67-4A02-9323-B7EA0F402D36}"/>
+              <a:ext uri="{47602702-A049-4ADA-9918-3C3CC90E98BF}">
+                <a16:creationId xmlns:a16="http://schemas.microsoft.com/office/drawing/2010/main" id="{79CCB11D-3F41-473D-8A1C-3401888DAC67}"/>
               </a:ext>
             </a:extLst>
           </p:cNvPr>
@@ -10821,8 +10822,8 @@
         <p:nvSpPr>
           <p:cNvPr id="17" name="Picture Placeholder 5">
             <a:extLst>
-              <a:ext uri="{DB6A5959-AE92-4EF4-BC29-A72517854ADA}">
-                <a16:creationId xmlns:a16="http://schemas.microsoft.com/office/drawing/2010/main" id="{73063015-53A1-4BAB-9C82-DE323CD7BF52}"/>
+              <a:ext uri="{348A7AE9-F012-441F-B98F-EB3C80BE85E0}">
+                <a16:creationId xmlns:a16="http://schemas.microsoft.com/office/drawing/2010/main" id="{A063AFA6-7077-47BA-89CA-5F743F06E41D}"/>
               </a:ext>
             </a:extLst>
           </p:cNvPr>
@@ -10856,8 +10857,8 @@
         <p:nvSpPr>
           <p:cNvPr hidden="false" id="18" name="Date Placeholder 1">
             <a:extLst>
-              <a:ext uri="{788FA1B3-B39E-4877-BAF1-FA605A2CD77E}">
-                <a16:creationId xmlns:a16="http://schemas.microsoft.com/office/drawing/2010/main" id="{CA83BD72-21FF-4665-9004-75DB516F9969}"/>
+              <a:ext uri="{42869649-056D-47D8-B3A8-D3ECEAD6B215}">
+                <a16:creationId xmlns:a16="http://schemas.microsoft.com/office/drawing/2010/main" id="{710DA7EA-8A7C-4C07-A723-8B6C9B4027D6}"/>
               </a:ext>
             </a:extLst>
           </p:cNvPr>
@@ -10905,8 +10906,8 @@
         <p:nvSpPr>
           <p:cNvPr hidden="false" id="19" name="Footer Placeholder 1">
             <a:extLst>
-              <a:ext uri="{6596C4B7-0FA2-4236-97C7-9D5709199A65}">
-                <a16:creationId xmlns:a16="http://schemas.microsoft.com/office/drawing/2010/main" id="{7299992E-D137-4532-AE4B-ED1877F24976}"/>
+              <a:ext uri="{FD75C7A6-7CC6-4395-B8A0-4474A2791442}">
+                <a16:creationId xmlns:a16="http://schemas.microsoft.com/office/drawing/2010/main" id="{233A2765-591A-4173-A482-84074C324CB6}"/>
               </a:ext>
             </a:extLst>
           </p:cNvPr>
@@ -10952,8 +10953,8 @@
       </p:sp>
     </p:spTree>
     <p:extLst>
-      <p:ext uri="{B970EFF6-0C92-4062-86B3-2C6319C12F3E}">
-        <p14:creationId xmlns:p14="http://schemas.microsoft.com/office/powerpoint/2010/main" val="1713420158755"/>
+      <p:ext uri="{71568FCA-A3FE-4A80-A1C6-4C62D9AF91F3}">
+        <p14:creationId xmlns:p14="http://schemas.microsoft.com/office/powerpoint/2010/main" val="1713440222508"/>
       </p:ext>
     </p:extLst>
   </p:cSld>
@@ -10984,8 +10985,8 @@
         <p:nvPicPr>
           <p:cNvPr descr="A picture containing animal, light&#10;&#10;Description automatically generated" id="2" name="Picture 24">
             <a:extLst>
-              <a:ext uri="{11B506F3-6E0F-477B-9CDC-887A6E20235E}">
-                <a16:creationId xmlns:a16="http://schemas.microsoft.com/office/drawing/2010/main" id="{BD8AA25F-6B11-46F9-9570-E91756B037F7}"/>
+              <a:ext uri="{237C55A9-41A6-47F4-8330-AF17CBE2F6E2}">
+                <a16:creationId xmlns:a16="http://schemas.microsoft.com/office/drawing/2010/main" id="{9F46CBAD-0F30-4193-81BE-2A05259E489C}"/>
               </a:ext>
             </a:extLst>
           </p:cNvPr>
@@ -11018,8 +11019,8 @@
         <p:nvSpPr>
           <p:cNvPr id="3" name="Rectangle 6">
             <a:extLst>
-              <a:ext uri="{DB7BCD7E-5B5B-4E1C-9B9A-18A57270A582}">
-                <a16:creationId xmlns:a16="http://schemas.microsoft.com/office/drawing/2010/main" id="{D73D2009-2C21-42FB-8C9C-B62DD98A5463}"/>
+              <a:ext uri="{0466C409-1871-47C7-ACD0-B1AA5629FC24}">
+                <a16:creationId xmlns:a16="http://schemas.microsoft.com/office/drawing/2010/main" id="{F6D4AF4A-DFF5-423A-A2D3-BA512E8B8331}"/>
               </a:ext>
             </a:extLst>
           </p:cNvPr>
@@ -11075,8 +11076,8 @@
         <p:nvPicPr>
           <p:cNvPr id="4" name="Picture 9">
             <a:extLst>
-              <a:ext uri="{7A901412-5697-42C5-B82A-E9028423D8FB}">
-                <a16:creationId xmlns:a16="http://schemas.microsoft.com/office/drawing/2010/main" id="{9E5791BB-F5F3-494A-A7A0-24C81D48F706}"/>
+              <a:ext uri="{CE563E5F-8688-45E9-883A-A41A360BB051}">
+                <a16:creationId xmlns:a16="http://schemas.microsoft.com/office/drawing/2010/main" id="{8888972C-20E3-443F-A43A-C4C962D708BD}"/>
               </a:ext>
             </a:extLst>
           </p:cNvPr>
@@ -11109,8 +11110,8 @@
         <p:nvGrpSpPr>
           <p:cNvPr id="5" name="Group 10">
             <a:extLst>
-              <a:ext uri="{EDF1AA0F-B37E-4340-957C-5AB5AF4AF358}">
-                <a16:creationId xmlns:a16="http://schemas.microsoft.com/office/drawing/2010/main" id="{4A4832E5-855C-4D3C-A225-A0BFB83E58AC}"/>
+              <a:ext uri="{EF159EE6-44DB-41EF-914E-75C91BB75BE5}">
+                <a16:creationId xmlns:a16="http://schemas.microsoft.com/office/drawing/2010/main" id="{FFEA378B-E12D-40BB-9C13-B5BE78571EFD}"/>
               </a:ext>
             </a:extLst>
           </p:cNvPr>
@@ -11129,8 +11130,8 @@
           <p:nvCxnSpPr>
             <p:cNvPr id="6" name="Straight Connector 11">
               <a:extLst>
-                <a:ext uri="{87929ABB-EFD3-4C34-B3FA-23E5C073793A}">
-                  <a16:creationId xmlns:a16="http://schemas.microsoft.com/office/drawing/2010/main" id="{A9C6D90F-E9E7-42F6-8C22-184CCC8DAF12}"/>
+                <a:ext uri="{7D391F80-B760-42F6-BE5C-B5F6AD2112CA}">
+                  <a16:creationId xmlns:a16="http://schemas.microsoft.com/office/drawing/2010/main" id="{0B860D02-9A5E-4927-8281-C9C0E4420EDF}"/>
                 </a:ext>
               </a:extLst>
             </p:cNvPr>
@@ -11172,8 +11173,8 @@
           <p:nvSpPr>
             <p:cNvPr id="7" name="Freeform: Shape 12">
               <a:extLst>
-                <a:ext uri="{00D308F5-3AA0-4E33-BE29-1683AF0ED356}">
-                  <a16:creationId xmlns:a16="http://schemas.microsoft.com/office/drawing/2010/main" id="{E9533DAE-040C-4F4D-ABEE-647A5416D55C}"/>
+                <a:ext uri="{12C5C49F-E7D8-49A3-BC9D-7845B759991D}">
+                  <a16:creationId xmlns:a16="http://schemas.microsoft.com/office/drawing/2010/main" id="{D5B40792-7F13-405D-A797-30D97682AC19}"/>
                 </a:ext>
               </a:extLst>
             </p:cNvPr>
@@ -11248,8 +11249,8 @@
           <p:nvSpPr>
             <p:cNvPr id="8" name="Oval 13">
               <a:extLst>
-                <a:ext uri="{100D1133-0CDB-45F0-B95F-D34B7AA2B16D}">
-                  <a16:creationId xmlns:a16="http://schemas.microsoft.com/office/drawing/2010/main" id="{E2E14DC3-4317-4E49-A401-D0CD30001AFF}"/>
+                <a:ext uri="{8F95D639-C572-486F-A14F-F4846695DC00}">
+                  <a16:creationId xmlns:a16="http://schemas.microsoft.com/office/drawing/2010/main" id="{B2B96D8B-DDE6-497B-A602-F4C9384B399A}"/>
                 </a:ext>
               </a:extLst>
             </p:cNvPr>
@@ -11309,8 +11310,8 @@
           <p:nvSpPr>
             <p:cNvPr id="9" name="Oval 14">
               <a:extLst>
-                <a:ext uri="{6E3E5FEB-4610-41E0-AC23-74841E654DC3}">
-                  <a16:creationId xmlns:a16="http://schemas.microsoft.com/office/drawing/2010/main" id="{1D35D243-C58D-48D7-8A63-23F480B1BC1D}"/>
+                <a:ext uri="{EF18D058-9487-430F-B7CE-AF036BA84C86}">
+                  <a16:creationId xmlns:a16="http://schemas.microsoft.com/office/drawing/2010/main" id="{5CF7AEEE-F92B-44D8-B8C5-142E9E95931D}"/>
                 </a:ext>
               </a:extLst>
             </p:cNvPr>
@@ -11370,8 +11371,8 @@
           <p:nvSpPr>
             <p:cNvPr id="10" name="Oval 15">
               <a:extLst>
-                <a:ext uri="{014C02CE-E4D2-420B-8DD4-7DB95D1EFAEA}">
-                  <a16:creationId xmlns:a16="http://schemas.microsoft.com/office/drawing/2010/main" id="{9F99416A-71BA-496C-96E5-89D1A7BA5316}"/>
+                <a:ext uri="{97CC3CC1-07CE-401B-9215-EA903D4BDD1B}">
+                  <a16:creationId xmlns:a16="http://schemas.microsoft.com/office/drawing/2010/main" id="{EE3B64DC-E91C-46A7-941D-B3993A02777D}"/>
                 </a:ext>
               </a:extLst>
             </p:cNvPr>
@@ -11431,8 +11432,8 @@
           <p:nvSpPr>
             <p:cNvPr id="11" name="Freeform: Shape 16">
               <a:extLst>
-                <a:ext uri="{B3189ECF-6986-4EEF-B0C1-BC4989A15B24}">
-                  <a16:creationId xmlns:a16="http://schemas.microsoft.com/office/drawing/2010/main" id="{7E761782-D5F2-490D-93A8-875893F7897C}"/>
+                <a:ext uri="{31AE9A06-D3C3-4CF0-8E91-F8BE1BE7DD10}">
+                  <a16:creationId xmlns:a16="http://schemas.microsoft.com/office/drawing/2010/main" id="{A146FD75-5435-4510-84DD-69F579CE4824}"/>
                 </a:ext>
               </a:extLst>
             </p:cNvPr>
@@ -11507,8 +11508,8 @@
           <p:nvSpPr>
             <p:cNvPr id="12" name="Oval 17">
               <a:extLst>
-                <a:ext uri="{FA88BB75-7E3C-41C5-B3B9-78EF64AD06BF}">
-                  <a16:creationId xmlns:a16="http://schemas.microsoft.com/office/drawing/2010/main" id="{9E63DFA5-6DC8-4EFB-83B6-25728E94FEB3}"/>
+                <a:ext uri="{F9AFC93F-7BDD-4CF0-9DD3-ADD3589ADB90}">
+                  <a16:creationId xmlns:a16="http://schemas.microsoft.com/office/drawing/2010/main" id="{23ECA129-9172-4737-BB63-A9767247C827}"/>
                 </a:ext>
               </a:extLst>
             </p:cNvPr>
@@ -11568,8 +11569,8 @@
           <p:nvSpPr>
             <p:cNvPr id="13" name="Oval 18">
               <a:extLst>
-                <a:ext uri="{CED42255-D5CC-4AE3-B4C8-C4F9FFECD4AE}">
-                  <a16:creationId xmlns:a16="http://schemas.microsoft.com/office/drawing/2010/main" id="{1FB2B125-A3C9-47F0-ADB5-20EAEFE23856}"/>
+                <a:ext uri="{108BA1CE-E49C-4D22-93AC-CF282310AD77}">
+                  <a16:creationId xmlns:a16="http://schemas.microsoft.com/office/drawing/2010/main" id="{DAA54F5D-90C3-4610-8E07-A8EF9AEA0EBD}"/>
                 </a:ext>
               </a:extLst>
             </p:cNvPr>
@@ -11629,8 +11630,8 @@
           <p:nvSpPr>
             <p:cNvPr id="14" name="Oval 19">
               <a:extLst>
-                <a:ext uri="{92E5A4A3-92D9-4C0A-903F-9CB241D11E1F}">
-                  <a16:creationId xmlns:a16="http://schemas.microsoft.com/office/drawing/2010/main" id="{F2033A67-FC8E-45E3-A400-FCC6625DBE61}"/>
+                <a:ext uri="{F0D198E9-336C-466E-A6DE-7620CA49EF19}">
+                  <a16:creationId xmlns:a16="http://schemas.microsoft.com/office/drawing/2010/main" id="{141D04E5-53F2-4423-9FAD-41447789210D}"/>
                 </a:ext>
               </a:extLst>
             </p:cNvPr>
@@ -11691,8 +11692,8 @@
         <p:nvPicPr>
           <p:cNvPr descr="A picture containing brick&#10;&#10;Description automatically generated" id="15" name="Picture 20">
             <a:extLst>
-              <a:ext uri="{602F052F-7C53-4D31-BE0B-8338D3D45FBF}">
-                <a16:creationId xmlns:a16="http://schemas.microsoft.com/office/drawing/2010/main" id="{C1F42720-8933-4B1C-844A-7C513D9AA81D}"/>
+              <a:ext uri="{EEDCAA3B-8F81-4423-9467-71C93961E58C}">
+                <a16:creationId xmlns:a16="http://schemas.microsoft.com/office/drawing/2010/main" id="{182E3D9E-5521-4901-9A11-FACB66578756}"/>
               </a:ext>
             </a:extLst>
           </p:cNvPr>
@@ -11722,8 +11723,8 @@
         <p:nvSpPr>
           <p:cNvPr id="16" name="Title 1">
             <a:extLst>
-              <a:ext uri="{E3E7F154-EAF2-4F26-BB57-7E622F6965D1}">
-                <a16:creationId xmlns:a16="http://schemas.microsoft.com/office/drawing/2010/main" id="{DD4CA104-0650-41F4-8F24-E6CE1C78D7CB}"/>
+              <a:ext uri="{248ACEF0-B991-4D82-B679-8FCCFAC21A08}">
+                <a16:creationId xmlns:a16="http://schemas.microsoft.com/office/drawing/2010/main" id="{6DD6E762-C89F-4BCB-9938-0EBF7A509BCA}"/>
               </a:ext>
             </a:extLst>
           </p:cNvPr>
@@ -11768,8 +11769,8 @@
         <p:nvSpPr>
           <p:cNvPr id="17" name="Text Placeholder 22">
             <a:extLst>
-              <a:ext uri="{15E952A9-F3A7-43F4-9893-76953345B494}">
-                <a16:creationId xmlns:a16="http://schemas.microsoft.com/office/drawing/2010/main" id="{5D3A7F79-267C-4841-B523-8F5FDF2F3554}"/>
+              <a:ext uri="{270AA203-690E-4186-844F-512844F3EDCF}">
+                <a16:creationId xmlns:a16="http://schemas.microsoft.com/office/drawing/2010/main" id="{5570FD0F-69BC-40FE-A15A-749FEAEAC59C}"/>
               </a:ext>
             </a:extLst>
           </p:cNvPr>
@@ -11879,8 +11880,8 @@
         <p:nvSpPr>
           <p:cNvPr id="18" name="Slide Number Placeholder 2">
             <a:extLst>
-              <a:ext uri="{FFF5D8BB-22A7-4261-802A-13E45F59EEE4}">
-                <a16:creationId xmlns:a16="http://schemas.microsoft.com/office/drawing/2010/main" id="{98EFF0D4-F9FF-4090-B818-295224C07629}"/>
+              <a:ext uri="{A618AC04-D807-473C-A418-135FA222F366}">
+                <a16:creationId xmlns:a16="http://schemas.microsoft.com/office/drawing/2010/main" id="{28534CBB-7008-44DA-AFDF-B830C989BB08}"/>
               </a:ext>
             </a:extLst>
           </p:cNvPr>
@@ -11905,7 +11906,7 @@
           <a:lstStyle/>
           <a:p>
             <a:pPr/>
-            <a:fld id="{79612BCA-895A-4E03-BAFF-AA4AB4C55D1F}" type="slidenum"/>
+            <a:fld id="{BB79FDF9-61F6-4F05-B512-B2D595CE1E83}" type="slidenum"/>
             <a:endParaRPr dirty="0" lang="en-US"/>
           </a:p>
         </p:txBody>
@@ -11914,8 +11915,8 @@
         <p:nvSpPr>
           <p:cNvPr hidden="false" id="19" name="Date Placeholder 1">
             <a:extLst>
-              <a:ext uri="{18223173-791C-4E80-A1EE-4C51C6CBB00A}">
-                <a16:creationId xmlns:a16="http://schemas.microsoft.com/office/drawing/2010/main" id="{E01CA064-ED1A-4AE1-9137-137CA4AFA00D}"/>
+              <a:ext uri="{4DD60F44-71B1-492D-B44D-43D28C5AF5DB}">
+                <a16:creationId xmlns:a16="http://schemas.microsoft.com/office/drawing/2010/main" id="{8BF9AD14-4AA1-4CE1-AC74-8D5CFE3262DE}"/>
               </a:ext>
             </a:extLst>
           </p:cNvPr>
@@ -11963,8 +11964,8 @@
         <p:nvSpPr>
           <p:cNvPr hidden="false" id="20" name="Footer Placeholder 1">
             <a:extLst>
-              <a:ext uri="{7B089515-DBAA-4DA4-9BD7-D14ABC1D64C2}">
-                <a16:creationId xmlns:a16="http://schemas.microsoft.com/office/drawing/2010/main" id="{79FC8F34-172A-49C8-AB8F-84875D2406F7}"/>
+              <a:ext uri="{EAA6E3FB-21E0-40DE-99D8-90E13BD8A1A2}">
+                <a16:creationId xmlns:a16="http://schemas.microsoft.com/office/drawing/2010/main" id="{D8416BCE-3974-44D3-87E0-3FD9611F14CB}"/>
               </a:ext>
             </a:extLst>
           </p:cNvPr>
@@ -12010,8 +12011,8 @@
       </p:sp>
     </p:spTree>
     <p:extLst>
-      <p:ext uri="{E3574EF3-B177-4532-B459-75FC676E724A}">
-        <p14:creationId xmlns:p14="http://schemas.microsoft.com/office/powerpoint/2010/main" val="1713420158697"/>
+      <p:ext uri="{E8CE2843-7D41-4564-83C2-4A703A1B2B2D}">
+        <p14:creationId xmlns:p14="http://schemas.microsoft.com/office/powerpoint/2010/main" val="1713440222462"/>
       </p:ext>
     </p:extLst>
   </p:cSld>
@@ -12042,8 +12043,8 @@
         <p:nvPicPr>
           <p:cNvPr id="2" name="Picture 7">
             <a:extLst>
-              <a:ext uri="{57B85515-F89D-44F2-9B8D-743CEBAA021C}">
-                <a16:creationId xmlns:a16="http://schemas.microsoft.com/office/drawing/2010/main" id="{5CDD311D-B825-494E-924E-BA0A959B52E5}"/>
+              <a:ext uri="{7F2CEA65-4DCF-480A-B059-B7DE015C7279}">
+                <a16:creationId xmlns:a16="http://schemas.microsoft.com/office/drawing/2010/main" id="{2C65A63B-9A83-4A63-8424-E99EA2799E12}"/>
               </a:ext>
             </a:extLst>
           </p:cNvPr>
@@ -12076,8 +12077,8 @@
         <p:nvPicPr>
           <p:cNvPr id="3" name="Picture 6">
             <a:extLst>
-              <a:ext uri="{54A0536C-ACAB-43BE-8C58-B59D5CE2AEC8}">
-                <a16:creationId xmlns:a16="http://schemas.microsoft.com/office/drawing/2010/main" id="{1C9D6F79-ED10-4159-B98E-E545C1C24E02}"/>
+              <a:ext uri="{056180F9-0C8D-428D-B84D-8BB660987763}">
+                <a16:creationId xmlns:a16="http://schemas.microsoft.com/office/drawing/2010/main" id="{4A839484-9022-4A2E-B101-DCF18042F4EA}"/>
               </a:ext>
             </a:extLst>
           </p:cNvPr>
@@ -12110,8 +12111,8 @@
         <p:nvSpPr>
           <p:cNvPr id="4" name="Freeform: Shape 19">
             <a:extLst>
-              <a:ext uri="{87661888-B680-4DD5-86E8-3CB6DD1797D4}">
-                <a16:creationId xmlns:a16="http://schemas.microsoft.com/office/drawing/2010/main" id="{84D7B081-A876-4F46-A739-394AA7C6ABED}"/>
+              <a:ext uri="{8C0461C5-6558-4CD7-882F-3F4FB227B4E5}">
+                <a16:creationId xmlns:a16="http://schemas.microsoft.com/office/drawing/2010/main" id="{D7B747D3-CC73-4E43-8EDB-A12BF3928587}"/>
               </a:ext>
             </a:extLst>
           </p:cNvPr>
@@ -12186,8 +12187,8 @@
         <p:nvSpPr>
           <p:cNvPr id="5" name="Title 1">
             <a:extLst>
-              <a:ext uri="{8F82D907-E5EF-48E1-904D-18393AF17878}">
-                <a16:creationId xmlns:a16="http://schemas.microsoft.com/office/drawing/2010/main" id="{6AF66A15-9732-469F-A69B-E2B74EA80C58}"/>
+              <a:ext uri="{EAF17F1C-7D91-4E61-9B27-FF7D2339F2B2}">
+                <a16:creationId xmlns:a16="http://schemas.microsoft.com/office/drawing/2010/main" id="{8864CB7B-64BE-4C20-920F-5272A240AD3E}"/>
               </a:ext>
             </a:extLst>
           </p:cNvPr>
@@ -12232,8 +12233,8 @@
         <p:nvSpPr>
           <p:cNvPr id="6" name="Slide Number Placeholder 5">
             <a:extLst>
-              <a:ext uri="{B618DF31-F928-4D7E-9E03-C71A10EE8C6D}">
-                <a16:creationId xmlns:a16="http://schemas.microsoft.com/office/drawing/2010/main" id="{9D66274F-DDEB-4A95-9D54-759E4A11F783}"/>
+              <a:ext uri="{B4EC56D6-63BE-433B-BEAC-EA8A1161D3A4}">
+                <a16:creationId xmlns:a16="http://schemas.microsoft.com/office/drawing/2010/main" id="{787FF59D-E4BD-4BF8-A180-C96ADB1E4E8E}"/>
               </a:ext>
             </a:extLst>
           </p:cNvPr>
@@ -12266,7 +12267,7 @@
           </a:lstStyle>
           <a:p>
             <a:pPr/>
-            <a:fld id="{CB04214A-9DD7-4A35-8F0F-E6D47084FE1F}" type="slidenum"/>
+            <a:fld id="{115EC241-A44F-4A7A-80A7-951160ADA6F5}" type="slidenum"/>
             <a:endParaRPr dirty="0" lang="en-US"/>
           </a:p>
         </p:txBody>
@@ -12275,8 +12276,8 @@
         <p:nvPicPr>
           <p:cNvPr descr="A close up of a logo&#10;&#10;Description automatically generated" id="7" name="Picture 9">
             <a:extLst>
-              <a:ext uri="{C74608B2-84BA-4F5F-AA46-D2116F8782AE}">
-                <a16:creationId xmlns:a16="http://schemas.microsoft.com/office/drawing/2010/main" id="{BC1D2B98-A0F6-4CD9-B0B0-CDBC53CD1B2F}"/>
+              <a:ext uri="{A8541097-372D-4491-97CE-0C66EEC9ECCB}">
+                <a16:creationId xmlns:a16="http://schemas.microsoft.com/office/drawing/2010/main" id="{C83BD425-9C87-4631-9E01-6BD9B0850967}"/>
               </a:ext>
             </a:extLst>
           </p:cNvPr>
@@ -12306,8 +12307,8 @@
         <p:nvCxnSpPr>
           <p:cNvPr id="8" name="Straight Connector 14">
             <a:extLst>
-              <a:ext uri="{7B3E4107-35B0-42A9-9710-D777C051C0FD}">
-                <a16:creationId xmlns:a16="http://schemas.microsoft.com/office/drawing/2010/main" id="{EBF0B3AE-1107-458A-82EF-19B8A9D5B2CB}"/>
+              <a:ext uri="{BFECB856-AD9F-4503-9C4C-525DA620FD72}">
+                <a16:creationId xmlns:a16="http://schemas.microsoft.com/office/drawing/2010/main" id="{06AD66DC-BF70-4DCB-989F-B95A828BF94F}"/>
               </a:ext>
             </a:extLst>
           </p:cNvPr>
@@ -12349,8 +12350,8 @@
         <p:nvSpPr>
           <p:cNvPr id="9" name="Freeform: Shape 15">
             <a:extLst>
-              <a:ext uri="{17BED436-356B-4850-8984-068ACB8B68EE}">
-                <a16:creationId xmlns:a16="http://schemas.microsoft.com/office/drawing/2010/main" id="{10FB7A28-C594-4AEA-993C-E8D423C509A5}"/>
+              <a:ext uri="{2C2250D5-695F-4C71-ACC8-2256371B7B5C}">
+                <a16:creationId xmlns:a16="http://schemas.microsoft.com/office/drawing/2010/main" id="{75C7821F-233C-4000-AEEC-E1AA1333355B}"/>
               </a:ext>
             </a:extLst>
           </p:cNvPr>
@@ -12425,8 +12426,8 @@
         <p:nvSpPr>
           <p:cNvPr id="10" name="Oval 16">
             <a:extLst>
-              <a:ext uri="{C344473D-42DC-46BA-8838-56FFCA209090}">
-                <a16:creationId xmlns:a16="http://schemas.microsoft.com/office/drawing/2010/main" id="{0745091C-B044-446A-9CCB-294CC7ED4929}"/>
+              <a:ext uri="{F6B4071A-EB7C-4AD0-BE84-79C87FC84E68}">
+                <a16:creationId xmlns:a16="http://schemas.microsoft.com/office/drawing/2010/main" id="{AEEF15BE-B1F6-401B-97E0-8C6A2171A6CC}"/>
               </a:ext>
             </a:extLst>
           </p:cNvPr>
@@ -12486,8 +12487,8 @@
         <p:nvSpPr>
           <p:cNvPr id="11" name="Oval 17">
             <a:extLst>
-              <a:ext uri="{6DE6F5DD-D0AC-485A-AAD8-477ABBAAD870}">
-                <a16:creationId xmlns:a16="http://schemas.microsoft.com/office/drawing/2010/main" id="{57FBA68C-472A-4CCF-8B3A-302C7EDFF2F0}"/>
+              <a:ext uri="{CD1D019C-09E4-4A0B-BA73-3AD9B01898F4}">
+                <a16:creationId xmlns:a16="http://schemas.microsoft.com/office/drawing/2010/main" id="{C82E7AC3-7E57-4C86-8D75-A9E27C8096F7}"/>
               </a:ext>
             </a:extLst>
           </p:cNvPr>
@@ -12547,8 +12548,8 @@
         <p:nvSpPr>
           <p:cNvPr id="12" name="Oval 18">
             <a:extLst>
-              <a:ext uri="{398BB17B-2DBE-498C-802B-55D467C45BC4}">
-                <a16:creationId xmlns:a16="http://schemas.microsoft.com/office/drawing/2010/main" id="{4FF14C03-9E4C-49FB-A85C-C6C8492CC242}"/>
+              <a:ext uri="{F26B2A3E-13F0-46EF-81D8-86FCB4DF08EA}">
+                <a16:creationId xmlns:a16="http://schemas.microsoft.com/office/drawing/2010/main" id="{D8BA3601-5E68-450E-9B17-56FBBFED40A8}"/>
               </a:ext>
             </a:extLst>
           </p:cNvPr>
@@ -12608,8 +12609,8 @@
         <p:nvSpPr>
           <p:cNvPr id="13" name="Oval 20">
             <a:extLst>
-              <a:ext uri="{C3DA01E0-F053-4F00-840E-D49EED6E4E38}">
-                <a16:creationId xmlns:a16="http://schemas.microsoft.com/office/drawing/2010/main" id="{525F848D-6B5A-4F54-9E76-E22F567CA86A}"/>
+              <a:ext uri="{27AE4EB6-273D-415E-B3A5-20D37C166822}">
+                <a16:creationId xmlns:a16="http://schemas.microsoft.com/office/drawing/2010/main" id="{6E0EB8E5-FAC8-4A3D-B28A-0674723AFC63}"/>
               </a:ext>
             </a:extLst>
           </p:cNvPr>
@@ -12669,8 +12670,8 @@
         <p:nvSpPr>
           <p:cNvPr id="14" name="Oval 21">
             <a:extLst>
-              <a:ext uri="{1B92403D-7EF7-4FEC-971C-1B6ECC8416D9}">
-                <a16:creationId xmlns:a16="http://schemas.microsoft.com/office/drawing/2010/main" id="{FEFEA44C-E938-4A6F-AF5B-A39A9591589B}"/>
+              <a:ext uri="{2B115815-9D8F-4DC0-8FD4-CF31319016E9}">
+                <a16:creationId xmlns:a16="http://schemas.microsoft.com/office/drawing/2010/main" id="{5F6B1C5D-0BB2-4002-8505-2AE847D149FD}"/>
               </a:ext>
             </a:extLst>
           </p:cNvPr>
@@ -12730,8 +12731,8 @@
         <p:nvSpPr>
           <p:cNvPr id="15" name="Oval 22">
             <a:extLst>
-              <a:ext uri="{83BDDEA3-07E4-4535-9077-70CB5AF2C67F}">
-                <a16:creationId xmlns:a16="http://schemas.microsoft.com/office/drawing/2010/main" id="{B75C05BF-E043-4A78-BB20-CF06BE5A08B8}"/>
+              <a:ext uri="{B72D826C-3951-445A-9349-35797916FAB5}">
+                <a16:creationId xmlns:a16="http://schemas.microsoft.com/office/drawing/2010/main" id="{CFF30AAD-9456-40FD-A49C-D6D716E2F72C}"/>
               </a:ext>
             </a:extLst>
           </p:cNvPr>
@@ -12791,8 +12792,8 @@
         <p:nvPicPr>
           <p:cNvPr descr="A close up of a logo&#10;&#10;Description automatically generated" id="16" name="Picture 12">
             <a:extLst>
-              <a:ext uri="{C769EAD8-2635-4E6D-A3B7-A4ED39F86BCA}">
-                <a16:creationId xmlns:a16="http://schemas.microsoft.com/office/drawing/2010/main" id="{E8829EAA-18DE-4760-A6B5-33A82B907D8D}"/>
+              <a:ext uri="{302577A3-BFE6-4CE0-B986-6740424F3A54}">
+                <a16:creationId xmlns:a16="http://schemas.microsoft.com/office/drawing/2010/main" id="{B1F4D31B-B9F9-40B7-BAB4-61C1BA268BB7}"/>
               </a:ext>
             </a:extLst>
           </p:cNvPr>
@@ -12822,8 +12823,8 @@
         <p:nvPicPr>
           <p:cNvPr descr="A close up of a logo&#10;&#10;Description automatically generated" id="17" name="Picture 11">
             <a:extLst>
-              <a:ext uri="{28EC129D-423E-4A47-B5AD-4E2B131AE06B}">
-                <a16:creationId xmlns:a16="http://schemas.microsoft.com/office/drawing/2010/main" id="{5B1B5C76-E7BD-4BF1-9D70-28D4FED307BF}"/>
+              <a:ext uri="{CC191F29-018D-4C36-A9EC-278B5772D6EC}">
+                <a16:creationId xmlns:a16="http://schemas.microsoft.com/office/drawing/2010/main" id="{AEFF7A93-3029-45FA-8380-084170890A86}"/>
               </a:ext>
             </a:extLst>
           </p:cNvPr>
@@ -12853,8 +12854,8 @@
         <p:nvSpPr>
           <p:cNvPr id="18" name="Text Placeholder 4">
             <a:extLst>
-              <a:ext uri="{D7ED295D-74A7-4ECB-9816-C478AC719768}">
-                <a16:creationId xmlns:a16="http://schemas.microsoft.com/office/drawing/2010/main" id="{7AF77837-3821-4BF5-9DAA-527A5282A53E}"/>
+              <a:ext uri="{8765F19E-E8D5-40FB-BE3F-93CF4DB88BF5}">
+                <a16:creationId xmlns:a16="http://schemas.microsoft.com/office/drawing/2010/main" id="{95054731-9835-46C4-AC0F-AD02F6BCC5B3}"/>
               </a:ext>
             </a:extLst>
           </p:cNvPr>
@@ -12937,8 +12938,8 @@
         <p:nvSpPr>
           <p:cNvPr hidden="false" id="19" name="Date Placeholder 1">
             <a:extLst>
-              <a:ext uri="{33D09E82-D9B0-48AA-8596-E486EF21F195}">
-                <a16:creationId xmlns:a16="http://schemas.microsoft.com/office/drawing/2010/main" id="{EFAA2E83-9810-4EF4-B37F-E238B410D516}"/>
+              <a:ext uri="{76DDF668-4F6A-4295-AC2A-31B688912C5E}">
+                <a16:creationId xmlns:a16="http://schemas.microsoft.com/office/drawing/2010/main" id="{B157FCF2-863D-4FAA-B5F8-0FB7713E60BF}"/>
               </a:ext>
             </a:extLst>
           </p:cNvPr>
@@ -12986,8 +12987,8 @@
         <p:nvSpPr>
           <p:cNvPr hidden="false" id="20" name="Footer Placeholder 1">
             <a:extLst>
-              <a:ext uri="{1962E579-87C4-498E-A4BE-FB6F6C39BB0E}">
-                <a16:creationId xmlns:a16="http://schemas.microsoft.com/office/drawing/2010/main" id="{0B331538-E071-4D41-A003-C1D4635ED58C}"/>
+              <a:ext uri="{1A468B0D-949A-43EA-9EF1-F554DD0A3650}">
+                <a16:creationId xmlns:a16="http://schemas.microsoft.com/office/drawing/2010/main" id="{58CA9269-860A-4F65-8EEB-87EFF7A54366}"/>
               </a:ext>
             </a:extLst>
           </p:cNvPr>
@@ -13033,8 +13034,8 @@
       </p:sp>
     </p:spTree>
     <p:extLst>
-      <p:ext uri="{6ECA6E9E-35BB-4BCA-9586-C5D658294ECF}">
-        <p14:creationId xmlns:p14="http://schemas.microsoft.com/office/powerpoint/2010/main" val="1713420158701"/>
+      <p:ext uri="{80999BCC-643D-43BB-BA3C-24820AB898FF}">
+        <p14:creationId xmlns:p14="http://schemas.microsoft.com/office/powerpoint/2010/main" val="1713440222465"/>
       </p:ext>
     </p:extLst>
   </p:cSld>
@@ -13065,8 +13066,8 @@
         <p:nvSpPr>
           <p:cNvPr id="2" name="Picture Placeholder 3">
             <a:extLst>
-              <a:ext uri="{C373FDB9-4FF0-4FCD-A069-6976127549EC}">
-                <a16:creationId xmlns:a16="http://schemas.microsoft.com/office/drawing/2010/main" id="{9C4F09CB-B215-43B6-99A7-E1E0FF154FC4}"/>
+              <a:ext uri="{BA981971-CCA3-4D5A-909F-A24458B1AE80}">
+                <a16:creationId xmlns:a16="http://schemas.microsoft.com/office/drawing/2010/main" id="{9B0C69CF-793D-4094-A058-045DB2BBE4B0}"/>
               </a:ext>
             </a:extLst>
           </p:cNvPr>
@@ -13105,8 +13106,8 @@
         <p:nvSpPr>
           <p:cNvPr id="3" name="Rectangle 9">
             <a:extLst>
-              <a:ext uri="{B810D71A-4A38-4E2A-9BB7-E835A88F2580}">
-                <a16:creationId xmlns:a16="http://schemas.microsoft.com/office/drawing/2010/main" id="{8D8B7F91-5630-4E42-8C4B-232E65095D46}"/>
+              <a:ext uri="{60AE625C-B58D-460E-9DEA-B3A5CDAE9C46}">
+                <a16:creationId xmlns:a16="http://schemas.microsoft.com/office/drawing/2010/main" id="{A432891A-20B5-43E5-8C67-DCF15C34038F}"/>
               </a:ext>
             </a:extLst>
           </p:cNvPr>
@@ -13162,8 +13163,8 @@
         <p:nvPicPr>
           <p:cNvPr id="4" name="Picture 7">
             <a:extLst>
-              <a:ext uri="{8A156716-5019-4718-9C85-6DDCE1B3EA1F}">
-                <a16:creationId xmlns:a16="http://schemas.microsoft.com/office/drawing/2010/main" id="{F2C0B29E-A70A-4136-BCEF-43F2F8ECB11A}"/>
+              <a:ext uri="{DE7ADFAB-DC02-42DC-9A3B-B78A833FA237}">
+                <a16:creationId xmlns:a16="http://schemas.microsoft.com/office/drawing/2010/main" id="{4AED58EF-8894-4776-A224-C7E9336771E8}"/>
               </a:ext>
             </a:extLst>
           </p:cNvPr>
@@ -13196,8 +13197,8 @@
         <p:nvSpPr>
           <p:cNvPr hidden="false" id="5" name="Title 1">
             <a:extLst>
-              <a:ext uri="{9D335A98-D358-4166-B5F7-D8BA45302354}">
-                <a16:creationId xmlns:a16="http://schemas.microsoft.com/office/drawing/2010/main" id="{F86AF39D-28DE-4579-8DD0-AC9EAC358F88}"/>
+              <a:ext uri="{59955E39-3D0D-4F10-8828-CBFEDA29B383}">
+                <a16:creationId xmlns:a16="http://schemas.microsoft.com/office/drawing/2010/main" id="{EC1DB5FC-7F87-4209-B31E-46468EFA0CE3}"/>
               </a:ext>
             </a:extLst>
           </p:cNvPr>
@@ -13237,8 +13238,8 @@
         <p:nvSpPr>
           <p:cNvPr id="6" name="Slide Number Placeholder 5">
             <a:extLst>
-              <a:ext uri="{EE656E85-B1AC-492A-8690-2D5CA556A5EF}">
-                <a16:creationId xmlns:a16="http://schemas.microsoft.com/office/drawing/2010/main" id="{F9CA1DF0-3C5F-44C6-8926-59AF13AA696D}"/>
+              <a:ext uri="{EFBE7BA8-9A48-4802-8587-80C72C94E2C5}">
+                <a16:creationId xmlns:a16="http://schemas.microsoft.com/office/drawing/2010/main" id="{7F9D8DBB-450D-40AB-9E38-60AAB9D4D77F}"/>
               </a:ext>
             </a:extLst>
           </p:cNvPr>
@@ -13271,7 +13272,7 @@
           </a:lstStyle>
           <a:p>
             <a:pPr/>
-            <a:fld id="{382B71CC-0323-4955-A947-031D6CD82E12}" type="slidenum"/>
+            <a:fld id="{CED34252-22FB-42A6-8AA1-AEF1BECDEBC1}" type="slidenum"/>
             <a:endParaRPr dirty="0" lang="en-US"/>
           </a:p>
         </p:txBody>
@@ -13280,8 +13281,8 @@
         <p:nvSpPr>
           <p:cNvPr id="7" name="Text Placeholder 13">
             <a:extLst>
-              <a:ext uri="{D3F4854C-DBF1-4694-A937-CFE5CBDD579E}">
-                <a16:creationId xmlns:a16="http://schemas.microsoft.com/office/drawing/2010/main" id="{347A1951-DBDC-4DF0-9459-30A050A91413}"/>
+              <a:ext uri="{4783B519-EB85-4731-9496-7079705B8234}">
+                <a16:creationId xmlns:a16="http://schemas.microsoft.com/office/drawing/2010/main" id="{B35839CC-2DE5-42A9-A3EB-D72FDEB27A10}"/>
               </a:ext>
             </a:extLst>
           </p:cNvPr>
@@ -13356,8 +13357,8 @@
         <p:nvPicPr>
           <p:cNvPr descr="A picture containing animal, light&#10;&#10;Description automatically generated" id="8" name="Picture 19">
             <a:extLst>
-              <a:ext uri="{E0B5F585-9289-4E96-8B53-6DB7F35C3B30}">
-                <a16:creationId xmlns:a16="http://schemas.microsoft.com/office/drawing/2010/main" id="{389BA433-F364-4EF5-8A8E-8E19920594C4}"/>
+              <a:ext uri="{DDFE6FA5-CDA9-443C-9868-1687E45C47C4}">
+                <a16:creationId xmlns:a16="http://schemas.microsoft.com/office/drawing/2010/main" id="{C7431B59-7B38-4A23-9DBA-9710BE93111A}"/>
               </a:ext>
             </a:extLst>
           </p:cNvPr>
@@ -13390,8 +13391,8 @@
         <p:nvSpPr>
           <p:cNvPr id="9" name="Text Placeholder 13">
             <a:extLst>
-              <a:ext uri="{5CFB12A7-342F-436E-A77A-2C0174503AB6}">
-                <a16:creationId xmlns:a16="http://schemas.microsoft.com/office/drawing/2010/main" id="{2C44854D-EF50-44B1-B5A8-81903E8EB18A}"/>
+              <a:ext uri="{7815CE02-3A20-4F56-96C8-5DC4E2A4DFC3}">
+                <a16:creationId xmlns:a16="http://schemas.microsoft.com/office/drawing/2010/main" id="{55873BB9-9E7B-4C58-88DE-AE0606072F17}"/>
               </a:ext>
             </a:extLst>
           </p:cNvPr>
@@ -13466,8 +13467,8 @@
         <p:nvSpPr>
           <p:cNvPr id="10" name="Text Placeholder 13">
             <a:extLst>
-              <a:ext uri="{DB4C9642-18B5-4EA7-89FF-66C490673F74}">
-                <a16:creationId xmlns:a16="http://schemas.microsoft.com/office/drawing/2010/main" id="{A504EB66-75A9-4491-A701-F0F2E324F6B5}"/>
+              <a:ext uri="{CF83238F-DF84-4589-8EB1-2607775ED9DC}">
+                <a16:creationId xmlns:a16="http://schemas.microsoft.com/office/drawing/2010/main" id="{57AAE4DA-5891-4599-B03D-FD35FD95B618}"/>
               </a:ext>
             </a:extLst>
           </p:cNvPr>
@@ -13542,8 +13543,8 @@
         <p:nvSpPr>
           <p:cNvPr id="11" name="Text Placeholder 4">
             <a:extLst>
-              <a:ext uri="{3E82BC5F-1605-4F51-B723-F89AD4F38616}">
-                <a16:creationId xmlns:a16="http://schemas.microsoft.com/office/drawing/2010/main" id="{BEF068E8-0CE3-41EC-B687-32C34049C63F}"/>
+              <a:ext uri="{415D002E-5F98-4F90-ACBB-6741D2902995}">
+                <a16:creationId xmlns:a16="http://schemas.microsoft.com/office/drawing/2010/main" id="{17847D55-8038-4AC9-9085-7936C65764D2}"/>
               </a:ext>
             </a:extLst>
           </p:cNvPr>
@@ -13626,8 +13627,8 @@
         <p:nvSpPr>
           <p:cNvPr id="12" name="Oval 24">
             <a:extLst>
-              <a:ext uri="{586A5360-1775-48CE-9E02-0903A4E0E6C8}">
-                <a16:creationId xmlns:a16="http://schemas.microsoft.com/office/drawing/2010/main" id="{989897FC-792A-4B9E-A45B-A63038086E05}"/>
+              <a:ext uri="{6365E116-51BB-4E7C-AFE1-21AC64F01E42}">
+                <a16:creationId xmlns:a16="http://schemas.microsoft.com/office/drawing/2010/main" id="{DA626B6A-7445-40EB-BF70-66C6ED7188B2}"/>
               </a:ext>
             </a:extLst>
           </p:cNvPr>
@@ -13683,8 +13684,8 @@
         <p:nvSpPr>
           <p:cNvPr id="13" name="Oval 26">
             <a:extLst>
-              <a:ext uri="{20AFB3B9-FCC3-463F-9CF8-E1D124650AA0}">
-                <a16:creationId xmlns:a16="http://schemas.microsoft.com/office/drawing/2010/main" id="{D4F131E7-85A8-4D26-B33D-1AC35F81CE8A}"/>
+              <a:ext uri="{1E26E623-CB93-412C-BD6F-0E1B4C478C10}">
+                <a16:creationId xmlns:a16="http://schemas.microsoft.com/office/drawing/2010/main" id="{6A357053-CF88-4DB1-8B4C-72F6733C69B1}"/>
               </a:ext>
             </a:extLst>
           </p:cNvPr>
@@ -13740,8 +13741,8 @@
         <p:nvSpPr>
           <p:cNvPr id="14" name="Oval 29">
             <a:extLst>
-              <a:ext uri="{14B8B759-4BD3-408F-A758-2CD6C5C1B732}">
-                <a16:creationId xmlns:a16="http://schemas.microsoft.com/office/drawing/2010/main" id="{8CD8485E-A439-4648-BB69-66DF6DA1ECF7}"/>
+              <a:ext uri="{C1541B34-9421-40F7-B142-C7EBCB544237}">
+                <a16:creationId xmlns:a16="http://schemas.microsoft.com/office/drawing/2010/main" id="{364F1E9E-E08A-466A-8A16-05C0BD7C7D25}"/>
               </a:ext>
             </a:extLst>
           </p:cNvPr>
@@ -13797,8 +13798,8 @@
         <p:nvSpPr>
           <p:cNvPr hidden="false" id="15" name="Date Placeholder 1">
             <a:extLst>
-              <a:ext uri="{9DB10FE6-1190-474E-A1C2-32B88DBB664B}">
-                <a16:creationId xmlns:a16="http://schemas.microsoft.com/office/drawing/2010/main" id="{3240C417-1D83-4BBC-92BA-4AB2A7F27608}"/>
+              <a:ext uri="{DC765AC3-2B98-4772-8251-E5CB3055C124}">
+                <a16:creationId xmlns:a16="http://schemas.microsoft.com/office/drawing/2010/main" id="{F17608DE-AE9C-4D67-B7E4-39444CDF11C1}"/>
               </a:ext>
             </a:extLst>
           </p:cNvPr>
@@ -13846,8 +13847,8 @@
         <p:nvSpPr>
           <p:cNvPr hidden="false" id="16" name="Footer Placeholder 1">
             <a:extLst>
-              <a:ext uri="{F300F5CB-D7BE-4212-AA25-E031E1F92EC6}">
-                <a16:creationId xmlns:a16="http://schemas.microsoft.com/office/drawing/2010/main" id="{AB719385-2639-4A71-B4D7-0C4FB68EEDEF}"/>
+              <a:ext uri="{37DED487-7900-4DF0-B448-13FC8CE35722}">
+                <a16:creationId xmlns:a16="http://schemas.microsoft.com/office/drawing/2010/main" id="{CB6D4CA7-12D2-4BB9-80EC-0EF3551CB0C5}"/>
               </a:ext>
             </a:extLst>
           </p:cNvPr>
@@ -13893,8 +13894,8 @@
       </p:sp>
     </p:spTree>
     <p:extLst>
-      <p:ext uri="{B1DB2ED9-A43B-415F-BE7B-7A622E70CED9}">
-        <p14:creationId xmlns:p14="http://schemas.microsoft.com/office/powerpoint/2010/main" val="1713420158705"/>
+      <p:ext uri="{C6A2AAF2-3954-46ED-B077-EEE8449E7172}">
+        <p14:creationId xmlns:p14="http://schemas.microsoft.com/office/powerpoint/2010/main" val="1713440222468"/>
       </p:ext>
     </p:extLst>
   </p:cSld>
@@ -13925,8 +13926,8 @@
         <p:nvSpPr>
           <p:cNvPr id="2" name="Rectangle 21">
             <a:extLst>
-              <a:ext uri="{40FD7130-BD74-4FE8-87F1-673714DAD885}">
-                <a16:creationId xmlns:a16="http://schemas.microsoft.com/office/drawing/2010/main" id="{DEDC00E0-BFCC-4AAC-B148-8EC0FBD243B2}"/>
+              <a:ext uri="{0E5EB8B3-5B14-453A-9F4A-CF734095B4A9}">
+                <a16:creationId xmlns:a16="http://schemas.microsoft.com/office/drawing/2010/main" id="{DDBD458C-B454-4148-87CE-64A1A8910796}"/>
               </a:ext>
             </a:extLst>
           </p:cNvPr>
@@ -13982,8 +13983,8 @@
         <p:nvPicPr>
           <p:cNvPr id="3" name="Picture 20">
             <a:extLst>
-              <a:ext uri="{829B9051-E579-4BB3-8492-06F8C8B50506}">
-                <a16:creationId xmlns:a16="http://schemas.microsoft.com/office/drawing/2010/main" id="{B47DDE4C-9493-4B34-A709-BAACC51E6E88}"/>
+              <a:ext uri="{682662BE-D729-47ED-B872-6D5C6BF8FBEB}">
+                <a16:creationId xmlns:a16="http://schemas.microsoft.com/office/drawing/2010/main" id="{E7DFF849-0B0C-4079-B815-F6FE1032D581}"/>
               </a:ext>
             </a:extLst>
           </p:cNvPr>
@@ -14016,8 +14017,8 @@
         <p:nvSpPr>
           <p:cNvPr hidden="false" id="4" name="Title 1">
             <a:extLst>
-              <a:ext uri="{118CD8BC-5539-4000-BCE7-7231AC143B9D}">
-                <a16:creationId xmlns:a16="http://schemas.microsoft.com/office/drawing/2010/main" id="{3CA7C04E-2EF5-4B0B-A034-A42026F9A50A}"/>
+              <a:ext uri="{A94D5181-2921-4DBE-87C5-52698015ED1B}">
+                <a16:creationId xmlns:a16="http://schemas.microsoft.com/office/drawing/2010/main" id="{1F9D9C77-7AB5-4981-8872-5FE2E617B961}"/>
               </a:ext>
             </a:extLst>
           </p:cNvPr>
@@ -14060,8 +14061,8 @@
         <p:nvSpPr>
           <p:cNvPr id="5" name="Slide Number Placeholder 5">
             <a:extLst>
-              <a:ext uri="{893FD205-FA53-4AF3-BF85-D566DF3C9E7B}">
-                <a16:creationId xmlns:a16="http://schemas.microsoft.com/office/drawing/2010/main" id="{D9EEF5A9-676D-44CE-BF3B-328A44711618}"/>
+              <a:ext uri="{D8F9B30E-0261-4BA0-BFF4-AB9D5AD0DA67}">
+                <a16:creationId xmlns:a16="http://schemas.microsoft.com/office/drawing/2010/main" id="{32B42744-69AA-412F-9358-40BD341487C1}"/>
               </a:ext>
             </a:extLst>
           </p:cNvPr>
@@ -14094,7 +14095,7 @@
           </a:lstStyle>
           <a:p>
             <a:pPr/>
-            <a:fld id="{0901C34A-840B-4558-A0D7-BD3BE2B78622}" type="slidenum"/>
+            <a:fld id="{C7627316-EBDB-45EE-A525-6D435EB0368C}" type="slidenum"/>
             <a:endParaRPr dirty="0" lang="en-US"/>
           </a:p>
         </p:txBody>
@@ -14103,8 +14104,8 @@
         <p:nvSpPr>
           <p:cNvPr id="6" name="Text Placeholder 15">
             <a:extLst>
-              <a:ext uri="{070F1E3F-F6D3-4610-85EC-0514E2D706CA}">
-                <a16:creationId xmlns:a16="http://schemas.microsoft.com/office/drawing/2010/main" id="{79D85A8E-85F8-4C34-A4FA-D6B06C7F04AB}"/>
+              <a:ext uri="{7B0BA133-66C5-4851-8ECC-395FF704CD02}">
+                <a16:creationId xmlns:a16="http://schemas.microsoft.com/office/drawing/2010/main" id="{74D07CA2-9DCE-4029-B3C5-768557BA3359}"/>
               </a:ext>
             </a:extLst>
           </p:cNvPr>
@@ -14162,8 +14163,8 @@
         <p:nvSpPr>
           <p:cNvPr id="7" name="Text Placeholder 15">
             <a:extLst>
-              <a:ext uri="{39E84EE6-5B6E-46C1-AAD7-C392E12A4ED7}">
-                <a16:creationId xmlns:a16="http://schemas.microsoft.com/office/drawing/2010/main" id="{81FE0E7B-9776-4F95-95B5-31F1F2A4F306}"/>
+              <a:ext uri="{19EB5D93-FA5E-44CA-8599-A3FA4E75D031}">
+                <a16:creationId xmlns:a16="http://schemas.microsoft.com/office/drawing/2010/main" id="{67E728C0-9F78-42BE-958A-A7C2862A10E4}"/>
               </a:ext>
             </a:extLst>
           </p:cNvPr>
@@ -14221,8 +14222,8 @@
         <p:nvSpPr>
           <p:cNvPr id="8" name="Text Placeholder 15">
             <a:extLst>
-              <a:ext uri="{96408719-9CF2-4E71-B50C-8039F9C66592}">
-                <a16:creationId xmlns:a16="http://schemas.microsoft.com/office/drawing/2010/main" id="{00D4A455-5031-44A0-9E27-C63D86BD190E}"/>
+              <a:ext uri="{58A6D00E-2073-4318-A862-E707FD5337B1}">
+                <a16:creationId xmlns:a16="http://schemas.microsoft.com/office/drawing/2010/main" id="{736A7649-64BD-4611-884B-AD7A5122EEBD}"/>
               </a:ext>
             </a:extLst>
           </p:cNvPr>
@@ -14280,8 +14281,8 @@
         <p:nvPicPr>
           <p:cNvPr id="9" name="Picture 34">
             <a:extLst>
-              <a:ext uri="{E8552B26-0C81-4422-BA41-D60465AF6AE1}">
-                <a16:creationId xmlns:a16="http://schemas.microsoft.com/office/drawing/2010/main" id="{5460FA5B-AA91-491C-A538-883B78EA6653}"/>
+              <a:ext uri="{02779196-390B-46EF-8A46-8569210C8D32}">
+                <a16:creationId xmlns:a16="http://schemas.microsoft.com/office/drawing/2010/main" id="{0FA51124-5DBF-4556-99F0-A3FF82BC4D52}"/>
               </a:ext>
             </a:extLst>
           </p:cNvPr>
@@ -14314,8 +14315,8 @@
         <p:nvSpPr>
           <p:cNvPr id="10" name="Text Placeholder 4">
             <a:extLst>
-              <a:ext uri="{13BE70CA-0543-46E1-8649-EB445D2CFEBD}">
-                <a16:creationId xmlns:a16="http://schemas.microsoft.com/office/drawing/2010/main" id="{E3B4F2B9-8BE1-4C8A-85C1-E0F754A243AA}"/>
+              <a:ext uri="{25238D42-70E3-4ADD-8C60-BF3425B9B248}">
+                <a16:creationId xmlns:a16="http://schemas.microsoft.com/office/drawing/2010/main" id="{C4A8DEBA-8ADD-488A-A9AF-A5EC1FBCCC46}"/>
               </a:ext>
             </a:extLst>
           </p:cNvPr>
@@ -14390,8 +14391,8 @@
         <p:nvSpPr>
           <p:cNvPr id="11" name="Picture Placeholder 3">
             <a:extLst>
-              <a:ext uri="{6941EE77-93C4-4E56-87CC-4FCBEC28D44F}">
-                <a16:creationId xmlns:a16="http://schemas.microsoft.com/office/drawing/2010/main" id="{7B41F517-0637-4AD4-8792-03ED1E90FA57}"/>
+              <a:ext uri="{6F151FFA-CF09-4FFB-BB9A-10EB3F4481B6}">
+                <a16:creationId xmlns:a16="http://schemas.microsoft.com/office/drawing/2010/main" id="{BFF1C330-B5D1-4380-97A3-DB492B3AC633}"/>
               </a:ext>
             </a:extLst>
           </p:cNvPr>
@@ -14430,8 +14431,8 @@
         <p:nvSpPr>
           <p:cNvPr id="12" name="Picture Placeholder 3">
             <a:extLst>
-              <a:ext uri="{1CA6851D-21F2-44D6-8AB6-373AA48D64A9}">
-                <a16:creationId xmlns:a16="http://schemas.microsoft.com/office/drawing/2010/main" id="{2FE18FB4-3EF9-4C1D-AA14-043B40294CC0}"/>
+              <a:ext uri="{6AF1C319-F17C-4D2F-8293-AEA74EDC2D01}">
+                <a16:creationId xmlns:a16="http://schemas.microsoft.com/office/drawing/2010/main" id="{7E3FAA18-F581-4EB9-A4FC-F216376053E3}"/>
               </a:ext>
             </a:extLst>
           </p:cNvPr>
@@ -14470,8 +14471,8 @@
         <p:nvSpPr>
           <p:cNvPr id="13" name="Picture Placeholder 3">
             <a:extLst>
-              <a:ext uri="{CC4E58E8-1FB7-4A35-BF6B-C02E3EE5ACB1}">
-                <a16:creationId xmlns:a16="http://schemas.microsoft.com/office/drawing/2010/main" id="{5C44A7CB-B5A4-48F7-8A3C-984BF4A2953B}"/>
+              <a:ext uri="{FB23E10A-A35F-49BB-B596-BA90BBBDA3BC}">
+                <a16:creationId xmlns:a16="http://schemas.microsoft.com/office/drawing/2010/main" id="{86478EE1-8AE6-4690-A429-463861238901}"/>
               </a:ext>
             </a:extLst>
           </p:cNvPr>
@@ -14510,8 +14511,8 @@
         <p:nvSpPr>
           <p:cNvPr hidden="false" id="14" name="Date Placeholder 1">
             <a:extLst>
-              <a:ext uri="{C4DA36D7-3A47-42F9-9664-7B056D749D28}">
-                <a16:creationId xmlns:a16="http://schemas.microsoft.com/office/drawing/2010/main" id="{2B21079D-8840-4F79-9A58-BF3BF6D0F42B}"/>
+              <a:ext uri="{E7D0293A-763D-48CD-82F1-117F352ABFFA}">
+                <a16:creationId xmlns:a16="http://schemas.microsoft.com/office/drawing/2010/main" id="{6D21898E-D606-455D-8CB9-4117B956FADC}"/>
               </a:ext>
             </a:extLst>
           </p:cNvPr>
@@ -14559,8 +14560,8 @@
         <p:nvSpPr>
           <p:cNvPr hidden="false" id="15" name="Footer Placeholder 1">
             <a:extLst>
-              <a:ext uri="{A12ACC66-CAF3-4F8E-B1A3-B6A4C4D0C291}">
-                <a16:creationId xmlns:a16="http://schemas.microsoft.com/office/drawing/2010/main" id="{ABAC5889-B9ED-4B5D-A5F3-A731FB469DF8}"/>
+              <a:ext uri="{9A547A41-F565-4DF3-8B56-EBA1BFF5BCB6}">
+                <a16:creationId xmlns:a16="http://schemas.microsoft.com/office/drawing/2010/main" id="{018A7D12-9B58-499E-ABE7-23C8B89CB93A}"/>
               </a:ext>
             </a:extLst>
           </p:cNvPr>
@@ -14606,8 +14607,8 @@
       </p:sp>
     </p:spTree>
     <p:extLst>
-      <p:ext uri="{C77C21A9-F589-4AA4-84CC-8ECD1E0862B9}">
-        <p14:creationId xmlns:p14="http://schemas.microsoft.com/office/powerpoint/2010/main" val="1713420158709"/>
+      <p:ext uri="{6E2D3082-8F3C-4B37-A80F-FEA3E0348CBA}">
+        <p14:creationId xmlns:p14="http://schemas.microsoft.com/office/powerpoint/2010/main" val="1713440222471"/>
       </p:ext>
     </p:extLst>
   </p:cSld>
@@ -14638,8 +14639,8 @@
         <p:nvPicPr>
           <p:cNvPr id="2" name="Picture 7">
             <a:extLst>
-              <a:ext uri="{6DD638C5-6D92-4DDC-9AEE-76BDC617DED8}">
-                <a16:creationId xmlns:a16="http://schemas.microsoft.com/office/drawing/2010/main" id="{974404FA-A2DB-44B8-9F6D-D21096518656}"/>
+              <a:ext uri="{D6E42581-58C2-4C44-8537-0E54BB1F86D6}">
+                <a16:creationId xmlns:a16="http://schemas.microsoft.com/office/drawing/2010/main" id="{1AAEB7B7-61CD-443B-84C2-B3C6B9B2E0F1}"/>
               </a:ext>
             </a:extLst>
           </p:cNvPr>
@@ -14672,8 +14673,8 @@
         <p:nvPicPr>
           <p:cNvPr id="3" name="Picture 6">
             <a:extLst>
-              <a:ext uri="{CD3A0CD3-4041-4586-A8E1-F130C11BFF44}">
-                <a16:creationId xmlns:a16="http://schemas.microsoft.com/office/drawing/2010/main" id="{E5DE68C6-E725-40C5-8455-70391D541022}"/>
+              <a:ext uri="{D2E52559-B4BD-4BCE-955D-ED7267D4D11F}">
+                <a16:creationId xmlns:a16="http://schemas.microsoft.com/office/drawing/2010/main" id="{BC317EE8-0AD2-4390-8EB9-7E7340E84088}"/>
               </a:ext>
             </a:extLst>
           </p:cNvPr>
@@ -14706,8 +14707,8 @@
         <p:nvSpPr>
           <p:cNvPr hidden="false" id="4" name="Title 1">
             <a:extLst>
-              <a:ext uri="{D0D1C834-60F6-47CD-91ED-129BE8A6F412}">
-                <a16:creationId xmlns:a16="http://schemas.microsoft.com/office/drawing/2010/main" id="{3F1915E5-D5E7-42B2-81F8-8F2B12FA8CC1}"/>
+              <a:ext uri="{306956A0-0BEF-44DD-B42C-037F522C9E7A}">
+                <a16:creationId xmlns:a16="http://schemas.microsoft.com/office/drawing/2010/main" id="{4E99C3AC-5C4C-4DFF-B80C-36CC0FDDD08A}"/>
               </a:ext>
             </a:extLst>
           </p:cNvPr>
@@ -14756,8 +14757,8 @@
         <p:nvSpPr>
           <p:cNvPr id="5" name="Slide Number Placeholder 5">
             <a:extLst>
-              <a:ext uri="{D817733F-8539-4F90-8F9B-5EFBEA42236B}">
-                <a16:creationId xmlns:a16="http://schemas.microsoft.com/office/drawing/2010/main" id="{01A0303A-75B8-4EB6-814F-CB78BF593005}"/>
+              <a:ext uri="{FF0066DF-3489-4115-8640-81E0FE59DF10}">
+                <a16:creationId xmlns:a16="http://schemas.microsoft.com/office/drawing/2010/main" id="{E5497B2C-EC10-46F6-8D3D-E7C935B8BB25}"/>
               </a:ext>
             </a:extLst>
           </p:cNvPr>
@@ -14790,7 +14791,7 @@
           </a:lstStyle>
           <a:p>
             <a:pPr/>
-            <a:fld id="{D063ABD6-14B8-44E1-B564-DE4EEF9215E4}" type="slidenum"/>
+            <a:fld id="{89142A62-EE2A-4015-8B0F-333683D68536}" type="slidenum"/>
             <a:endParaRPr dirty="0" lang="en-US"/>
           </a:p>
         </p:txBody>
@@ -14799,8 +14800,8 @@
         <p:nvGrpSpPr>
           <p:cNvPr id="6" name="Group 8">
             <a:extLst>
-              <a:ext uri="{6854EFEA-2551-45E5-8735-0854717D2286}">
-                <a16:creationId xmlns:a16="http://schemas.microsoft.com/office/drawing/2010/main" id="{14DFC3CD-1387-4686-A1E6-AB1991963B62}"/>
+              <a:ext uri="{4EF2E716-03E3-4B50-B744-9793C528AB8D}">
+                <a16:creationId xmlns:a16="http://schemas.microsoft.com/office/drawing/2010/main" id="{B5A747E0-861B-4617-9857-D6687FA8D3CA}"/>
               </a:ext>
             </a:extLst>
           </p:cNvPr>
@@ -14819,8 +14820,8 @@
           <p:nvCxnSpPr>
             <p:cNvPr id="7" name="Straight Connector 14">
               <a:extLst>
-                <a:ext uri="{EC668E1B-511F-44F9-9703-8547CA1ED9BD}">
-                  <a16:creationId xmlns:a16="http://schemas.microsoft.com/office/drawing/2010/main" id="{4BF2C72F-3655-48F5-9FFB-92024CAA157E}"/>
+                <a:ext uri="{FB6641EC-2092-4D95-8A5D-44B1F64C4FE0}">
+                  <a16:creationId xmlns:a16="http://schemas.microsoft.com/office/drawing/2010/main" id="{AB1FBECC-CE28-48A1-A156-97D8202DFAE1}"/>
                 </a:ext>
               </a:extLst>
             </p:cNvPr>
@@ -14862,8 +14863,8 @@
           <p:nvSpPr>
             <p:cNvPr id="8" name="Freeform: Shape 15">
               <a:extLst>
-                <a:ext uri="{143318CB-25D6-47BD-997F-5BA8D30DBE7E}">
-                  <a16:creationId xmlns:a16="http://schemas.microsoft.com/office/drawing/2010/main" id="{A6D0E25A-FE8C-4BED-B385-E9F130C39ECF}"/>
+                <a:ext uri="{B9A25CAD-F98E-4125-B021-176E00AA643C}">
+                  <a16:creationId xmlns:a16="http://schemas.microsoft.com/office/drawing/2010/main" id="{1F5283E5-53CE-47A2-8FB9-44E7A94F7090}"/>
                 </a:ext>
               </a:extLst>
             </p:cNvPr>
@@ -14938,8 +14939,8 @@
           <p:nvSpPr>
             <p:cNvPr id="9" name="Oval 16">
               <a:extLst>
-                <a:ext uri="{A5F88CF8-4D14-43AA-B8D2-479EC296A713}">
-                  <a16:creationId xmlns:a16="http://schemas.microsoft.com/office/drawing/2010/main" id="{C9E2A376-5423-4F1B-918F-930CE39FEA2B}"/>
+                <a:ext uri="{A001CA44-1BD5-4A12-BC56-74E9DC67FF4C}">
+                  <a16:creationId xmlns:a16="http://schemas.microsoft.com/office/drawing/2010/main" id="{3021BE8F-9A47-4C0F-8289-1A70F08ACBE7}"/>
                 </a:ext>
               </a:extLst>
             </p:cNvPr>
@@ -14999,8 +15000,8 @@
           <p:nvSpPr>
             <p:cNvPr id="10" name="Oval 18">
               <a:extLst>
-                <a:ext uri="{F0094AAF-95FF-4C83-99CD-BFB087DCE78F}">
-                  <a16:creationId xmlns:a16="http://schemas.microsoft.com/office/drawing/2010/main" id="{F7F424F2-2997-4989-AD45-BCC254A0158D}"/>
+                <a:ext uri="{E224BDEC-33E2-4F4D-BCBB-826DCF4D0E34}">
+                  <a16:creationId xmlns:a16="http://schemas.microsoft.com/office/drawing/2010/main" id="{69763388-08E2-43B7-9C43-407F81C64F95}"/>
                 </a:ext>
               </a:extLst>
             </p:cNvPr>
@@ -15060,8 +15061,8 @@
           <p:nvSpPr>
             <p:cNvPr id="11" name="Oval 20">
               <a:extLst>
-                <a:ext uri="{65AB54AA-1B69-48ED-A278-7C9882A95F6C}">
-                  <a16:creationId xmlns:a16="http://schemas.microsoft.com/office/drawing/2010/main" id="{0A0C8079-C927-4BAC-9E3F-BE51D3329F1D}"/>
+                <a:ext uri="{F1E0EEBF-9E02-4AC8-9EAE-52E5B7482817}">
+                  <a16:creationId xmlns:a16="http://schemas.microsoft.com/office/drawing/2010/main" id="{B67F3B7D-E90A-4898-9475-4FAD453808EA}"/>
                 </a:ext>
               </a:extLst>
             </p:cNvPr>
@@ -15121,8 +15122,8 @@
           <p:nvSpPr>
             <p:cNvPr id="12" name="Oval 21">
               <a:extLst>
-                <a:ext uri="{EC3CC416-FFC0-46FC-9242-5AA1B49B1FA0}">
-                  <a16:creationId xmlns:a16="http://schemas.microsoft.com/office/drawing/2010/main" id="{DE6B412E-2B89-4E38-ABFD-7A75886A399E}"/>
+                <a:ext uri="{0E7C9624-5239-414A-9325-52FA898E1452}">
+                  <a16:creationId xmlns:a16="http://schemas.microsoft.com/office/drawing/2010/main" id="{6FA8AA47-5862-4EB3-97FE-C3467638BD19}"/>
                 </a:ext>
               </a:extLst>
             </p:cNvPr>
@@ -15182,8 +15183,8 @@
           <p:nvPicPr>
             <p:cNvPr descr="A close up of a logo&#10;&#10;Description automatically generated" id="13" name="Picture 12">
               <a:extLst>
-                <a:ext uri="{4B503A36-FED5-476A-9678-FEB6B14EDBC7}">
-                  <a16:creationId xmlns:a16="http://schemas.microsoft.com/office/drawing/2010/main" id="{98760602-0622-4A25-8B74-3918F7A16229}"/>
+                <a:ext uri="{AF524E03-14E3-45A2-94E5-5A98878BEDFF}">
+                  <a16:creationId xmlns:a16="http://schemas.microsoft.com/office/drawing/2010/main" id="{49739A61-E3E6-42A0-A10B-7A191BCBF139}"/>
                 </a:ext>
               </a:extLst>
             </p:cNvPr>
@@ -15213,8 +15214,8 @@
           <p:nvPicPr>
             <p:cNvPr descr="A close up of a logo&#10;&#10;Description automatically generated" id="14" name="Picture 11">
               <a:extLst>
-                <a:ext uri="{B92B96E7-A507-469B-9246-EACEB35D5C77}">
-                  <a16:creationId xmlns:a16="http://schemas.microsoft.com/office/drawing/2010/main" id="{EE975772-18B6-4662-97BB-77A9A35481A7}"/>
+                <a:ext uri="{D4048C5F-6D3E-4944-83A8-B947299D6B2A}">
+                  <a16:creationId xmlns:a16="http://schemas.microsoft.com/office/drawing/2010/main" id="{CFDCEF96-28FE-4A52-A3CE-CB34F807514E}"/>
                 </a:ext>
               </a:extLst>
             </p:cNvPr>
@@ -15245,8 +15246,8 @@
         <p:nvSpPr>
           <p:cNvPr id="15" name="Text Placeholder 13">
             <a:extLst>
-              <a:ext uri="{EB07F421-A3A0-44C9-9FC3-6536479293E5}">
-                <a16:creationId xmlns:a16="http://schemas.microsoft.com/office/drawing/2010/main" id="{AE4532E8-3803-41C4-B108-D5BB25EC6D38}"/>
+              <a:ext uri="{90E95D6D-B127-4C15-8754-F998E383DEC9}">
+                <a16:creationId xmlns:a16="http://schemas.microsoft.com/office/drawing/2010/main" id="{1F47FD2A-213D-43B8-B884-59EA306985F5}"/>
               </a:ext>
             </a:extLst>
           </p:cNvPr>
@@ -15321,8 +15322,8 @@
         <p:nvSpPr>
           <p:cNvPr id="16" name="Text Placeholder 13">
             <a:extLst>
-              <a:ext uri="{98934433-EA4D-4CB2-99ED-EEDCFB999EDD}">
-                <a16:creationId xmlns:a16="http://schemas.microsoft.com/office/drawing/2010/main" id="{B228A4DF-D082-4B9E-BEF7-AE11A074A575}"/>
+              <a:ext uri="{163F89EB-EA43-4B16-98E8-0D265D99B6E6}">
+                <a16:creationId xmlns:a16="http://schemas.microsoft.com/office/drawing/2010/main" id="{32291242-6A70-4E8A-B8D9-885144600C58}"/>
               </a:ext>
             </a:extLst>
           </p:cNvPr>
@@ -15397,8 +15398,8 @@
         <p:nvSpPr>
           <p:cNvPr id="17" name="Text Placeholder 13">
             <a:extLst>
-              <a:ext uri="{ADFA0B8E-C22A-4CDA-8135-714402CE8433}">
-                <a16:creationId xmlns:a16="http://schemas.microsoft.com/office/drawing/2010/main" id="{9182B727-3FED-47B9-8503-1AE5B644BB6D}"/>
+              <a:ext uri="{38CEDD52-6FA3-40A3-85F0-22E86B0FDF37}">
+                <a16:creationId xmlns:a16="http://schemas.microsoft.com/office/drawing/2010/main" id="{DB134B43-F781-4051-8438-96DADD1A6BB1}"/>
               </a:ext>
             </a:extLst>
           </p:cNvPr>
@@ -15473,8 +15474,8 @@
         <p:nvSpPr>
           <p:cNvPr id="18" name="Text Placeholder 4">
             <a:extLst>
-              <a:ext uri="{0703BB60-11E2-4560-B3DD-EA724A224E8A}">
-                <a16:creationId xmlns:a16="http://schemas.microsoft.com/office/drawing/2010/main" id="{FDA539C7-F071-4E81-B77B-1243505947F8}"/>
+              <a:ext uri="{27812B08-8B44-4567-863F-2014F8F5B0CD}">
+                <a16:creationId xmlns:a16="http://schemas.microsoft.com/office/drawing/2010/main" id="{7DD00EED-4CFD-4ADD-9AEA-D1300AEB8E49}"/>
               </a:ext>
             </a:extLst>
           </p:cNvPr>
@@ -15557,8 +15558,8 @@
         <p:nvSpPr>
           <p:cNvPr id="19" name="Picture Placeholder 3">
             <a:extLst>
-              <a:ext uri="{F58A0DD0-F201-4A51-8C7F-F414B7AEBB92}">
-                <a16:creationId xmlns:a16="http://schemas.microsoft.com/office/drawing/2010/main" id="{D8BED626-744B-4BF2-83C3-73253095DB30}"/>
+              <a:ext uri="{7C4712D5-EBDB-4A97-BD32-CBC7B4B5FE90}">
+                <a16:creationId xmlns:a16="http://schemas.microsoft.com/office/drawing/2010/main" id="{BE75ADE1-723B-40E6-9CE1-95FED66E0C17}"/>
               </a:ext>
             </a:extLst>
           </p:cNvPr>
@@ -15597,8 +15598,8 @@
         <p:nvSpPr>
           <p:cNvPr id="20" name="Picture Placeholder 3">
             <a:extLst>
-              <a:ext uri="{1E25AAD6-83B8-4701-B68F-72CAC7B72D6D}">
-                <a16:creationId xmlns:a16="http://schemas.microsoft.com/office/drawing/2010/main" id="{099CEBC3-225E-4226-9699-09C9009ACA34}"/>
+              <a:ext uri="{051E24FE-6DC6-4F4B-AA3C-210F2040BF8A}">
+                <a16:creationId xmlns:a16="http://schemas.microsoft.com/office/drawing/2010/main" id="{E8C8A721-685B-4130-BC13-CE04CB05ED2C}"/>
               </a:ext>
             </a:extLst>
           </p:cNvPr>
@@ -15637,8 +15638,8 @@
         <p:nvSpPr>
           <p:cNvPr id="21" name="Picture Placeholder 3">
             <a:extLst>
-              <a:ext uri="{6A14B6E9-33DB-4B24-91C3-8AAC2AF0FF90}">
-                <a16:creationId xmlns:a16="http://schemas.microsoft.com/office/drawing/2010/main" id="{0684832C-5D9F-4FD0-ABA4-DF923C88A1F3}"/>
+              <a:ext uri="{64349E1A-2D2A-43AA-BA9D-24A94F62125B}">
+                <a16:creationId xmlns:a16="http://schemas.microsoft.com/office/drawing/2010/main" id="{D6C8FD83-FCAA-4C33-95FB-35CAB65F9C4E}"/>
               </a:ext>
             </a:extLst>
           </p:cNvPr>
@@ -15677,8 +15678,8 @@
         <p:nvSpPr>
           <p:cNvPr hidden="false" id="22" name="Date Placeholder 1">
             <a:extLst>
-              <a:ext uri="{E9869CD5-F687-44CA-B28E-00739FF50FC4}">
-                <a16:creationId xmlns:a16="http://schemas.microsoft.com/office/drawing/2010/main" id="{55BCD270-138E-4873-A9BE-9D9FBFDCB3BE}"/>
+              <a:ext uri="{299FB461-2529-47C7-A091-C2F78018D40E}">
+                <a16:creationId xmlns:a16="http://schemas.microsoft.com/office/drawing/2010/main" id="{1BCEF43C-9DD6-4757-8D86-21A79F77D8D8}"/>
               </a:ext>
             </a:extLst>
           </p:cNvPr>
@@ -15726,8 +15727,8 @@
         <p:nvSpPr>
           <p:cNvPr hidden="false" id="23" name="Footer Placeholder 1">
             <a:extLst>
-              <a:ext uri="{700EA548-893D-4F36-AC20-7E55733DFD83}">
-                <a16:creationId xmlns:a16="http://schemas.microsoft.com/office/drawing/2010/main" id="{74240CA8-2BA5-420B-B5A7-DA42DF417C13}"/>
+              <a:ext uri="{CFCCE74B-690C-46A5-A782-6FC17E3BB60C}">
+                <a16:creationId xmlns:a16="http://schemas.microsoft.com/office/drawing/2010/main" id="{057D9493-C095-4940-9016-A885DF2108E2}"/>
               </a:ext>
             </a:extLst>
           </p:cNvPr>
@@ -15773,8 +15774,8 @@
       </p:sp>
     </p:spTree>
     <p:extLst>
-      <p:ext uri="{2B9388CB-CB3D-4901-A35B-3BC78C093DDE}">
-        <p14:creationId xmlns:p14="http://schemas.microsoft.com/office/powerpoint/2010/main" val="1713420158713"/>
+      <p:ext uri="{05F91F8C-FCDC-49A6-B802-EEE2F35E94BC}">
+        <p14:creationId xmlns:p14="http://schemas.microsoft.com/office/powerpoint/2010/main" val="1713440222474"/>
       </p:ext>
     </p:extLst>
   </p:cSld>
@@ -15813,8 +15814,8 @@
         <p:nvPicPr>
           <p:cNvPr id="2" name="Picture 20">
             <a:extLst>
-              <a:ext uri="{8E226E0F-71EA-4B07-B9AD-80B134B5E355}">
-                <a16:creationId xmlns:a16="http://schemas.microsoft.com/office/drawing/2010/main" id="{26594F94-51B4-4CA1-A948-99CC7DEFC7AF}"/>
+              <a:ext uri="{FF780587-FD63-40A8-8558-5475307AC2DC}">
+                <a16:creationId xmlns:a16="http://schemas.microsoft.com/office/drawing/2010/main" id="{D45CCD08-43AA-4B79-AB28-D90F536D5220}"/>
               </a:ext>
             </a:extLst>
           </p:cNvPr>
@@ -15847,8 +15848,8 @@
         <p:nvSpPr>
           <p:cNvPr id="3" name="Title 1">
             <a:extLst>
-              <a:ext uri="{C1594126-2CBE-4E76-B6B5-7065B3702B64}">
-                <a16:creationId xmlns:a16="http://schemas.microsoft.com/office/drawing/2010/main" id="{DC3F0B3D-3BD9-45C7-86C6-C1EA1D38E28F}"/>
+              <a:ext uri="{181CA365-E620-457F-862D-2EBCD1C5DBCE}">
+                <a16:creationId xmlns:a16="http://schemas.microsoft.com/office/drawing/2010/main" id="{B9A2734B-370A-4014-877D-019670B4C35D}"/>
               </a:ext>
             </a:extLst>
           </p:cNvPr>
@@ -15891,8 +15892,8 @@
         <p:nvSpPr>
           <p:cNvPr id="4" name="Slide Number Placeholder 5">
             <a:extLst>
-              <a:ext uri="{6D486A4F-2733-43AD-9428-30EC4C030375}">
-                <a16:creationId xmlns:a16="http://schemas.microsoft.com/office/drawing/2010/main" id="{A4439E8D-E86B-4D63-A6EE-1FF4C7E534DB}"/>
+              <a:ext uri="{473CF4C0-328E-4A84-AB00-002DB2827596}">
+                <a16:creationId xmlns:a16="http://schemas.microsoft.com/office/drawing/2010/main" id="{DA4EC2A5-72B3-4F9A-B8B3-A1093B1DBF15}"/>
               </a:ext>
             </a:extLst>
           </p:cNvPr>
@@ -15925,7 +15926,7 @@
           </a:lstStyle>
           <a:p>
             <a:pPr/>
-            <a:fld id="{8805F66E-0D9F-4D48-BC04-C0363765B14B}" type="slidenum"/>
+            <a:fld id="{4B9A7D42-8141-4150-97BA-91FEB01EFDD5}" type="slidenum"/>
             <a:endParaRPr dirty="0" lang="en-US"/>
           </a:p>
         </p:txBody>
@@ -15934,8 +15935,8 @@
         <p:nvSpPr>
           <p:cNvPr id="5" name="Rectangle 3">
             <a:extLst>
-              <a:ext uri="{3CE320C7-D635-44C8-90CF-B9471B663306}">
-                <a16:creationId xmlns:a16="http://schemas.microsoft.com/office/drawing/2010/main" id="{B8764271-6644-484B-8710-7EC90073ECF6}"/>
+              <a:ext uri="{8FC86928-435E-4570-8854-C97035BC091C}">
+                <a16:creationId xmlns:a16="http://schemas.microsoft.com/office/drawing/2010/main" id="{270BBBBE-6A39-4767-857F-5AEAF9C59E79}"/>
               </a:ext>
             </a:extLst>
           </p:cNvPr>
@@ -15991,8 +15992,8 @@
         <p:nvPicPr>
           <p:cNvPr id="6" name="Picture 34">
             <a:extLst>
-              <a:ext uri="{338059B8-914D-456C-B951-933655938EBB}">
-                <a16:creationId xmlns:a16="http://schemas.microsoft.com/office/drawing/2010/main" id="{304A150C-55C6-4AC4-8DCD-5C805DED6784}"/>
+              <a:ext uri="{31BB0F6F-E88A-40A7-9170-E9E32B44B629}">
+                <a16:creationId xmlns:a16="http://schemas.microsoft.com/office/drawing/2010/main" id="{0CD266B9-C02A-4528-BC9F-3F52F1769B9B}"/>
               </a:ext>
             </a:extLst>
           </p:cNvPr>
@@ -16025,8 +16026,8 @@
         <p:nvSpPr>
           <p:cNvPr id="7" name="Chart Placeholder 6">
             <a:extLst>
-              <a:ext uri="{5EE222F6-524A-464F-9237-CE2FDDFCAFEF}">
-                <a16:creationId xmlns:a16="http://schemas.microsoft.com/office/drawing/2010/main" id="{C5064E0D-15DD-4F85-805C-682A277E72D6}"/>
+              <a:ext uri="{9AE2E1BC-A041-44B5-ABC3-2EA0ED5564DC}">
+                <a16:creationId xmlns:a16="http://schemas.microsoft.com/office/drawing/2010/main" id="{DD550CF8-9976-499E-96E3-B6E783C53E6D}"/>
               </a:ext>
             </a:extLst>
           </p:cNvPr>
@@ -16060,8 +16061,8 @@
         <p:nvSpPr>
           <p:cNvPr id="8" name="Text Placeholder 4">
             <a:extLst>
-              <a:ext uri="{84C140B5-0E29-4B2C-93C2-D063FBDC0DC5}">
-                <a16:creationId xmlns:a16="http://schemas.microsoft.com/office/drawing/2010/main" id="{E38F8CCA-BFF2-4B41-A346-6E9C2C875EC7}"/>
+              <a:ext uri="{C883D326-C633-4734-8338-4F8233D51E0F}">
+                <a16:creationId xmlns:a16="http://schemas.microsoft.com/office/drawing/2010/main" id="{9BE8C7D8-A08D-4967-9898-18689F97CDD5}"/>
               </a:ext>
             </a:extLst>
           </p:cNvPr>
@@ -16164,8 +16165,8 @@
         <p:nvSpPr>
           <p:cNvPr hidden="false" id="9" name="Date Placeholder 1">
             <a:extLst>
-              <a:ext uri="{AB419D63-5064-41DC-9748-40F4BD1CDD92}">
-                <a16:creationId xmlns:a16="http://schemas.microsoft.com/office/drawing/2010/main" id="{F813694D-A261-49C7-9985-765FC9DBF421}"/>
+              <a:ext uri="{C31886ED-CE93-4D48-9F84-A6BD1E47026D}">
+                <a16:creationId xmlns:a16="http://schemas.microsoft.com/office/drawing/2010/main" id="{540083B9-D2AB-4A95-9B76-6F6D561086EF}"/>
               </a:ext>
             </a:extLst>
           </p:cNvPr>
@@ -16213,8 +16214,8 @@
         <p:nvSpPr>
           <p:cNvPr hidden="false" id="10" name="Footer Placeholder 1">
             <a:extLst>
-              <a:ext uri="{3EBD2B4C-B85B-4E9D-B243-4ADAE5F7E764}">
-                <a16:creationId xmlns:a16="http://schemas.microsoft.com/office/drawing/2010/main" id="{8FDFD6AD-ED34-4AAC-90E5-C2E30411B7AB}"/>
+              <a:ext uri="{BA9FF3CC-30B3-44C5-8173-AE96AFE97680}">
+                <a16:creationId xmlns:a16="http://schemas.microsoft.com/office/drawing/2010/main" id="{C353F2BF-307F-4289-99C9-E62A20A0AA61}"/>
               </a:ext>
             </a:extLst>
           </p:cNvPr>
@@ -16260,8 +16261,8 @@
       </p:sp>
     </p:spTree>
     <p:extLst>
-      <p:ext uri="{2401E4A2-688B-430C-B131-B7602AE25C76}">
-        <p14:creationId xmlns:p14="http://schemas.microsoft.com/office/powerpoint/2010/main" val="1713420158717"/>
+      <p:ext uri="{79EAE1EF-4EE1-46E4-9AD6-A10F0CEB2442}">
+        <p14:creationId xmlns:p14="http://schemas.microsoft.com/office/powerpoint/2010/main" val="1713440222476"/>
       </p:ext>
     </p:extLst>
   </p:cSld>
@@ -16292,8 +16293,8 @@
         <p:nvPicPr>
           <p:cNvPr id="2" name="Picture 6">
             <a:extLst>
-              <a:ext uri="{05DB0344-B6CC-4DE9-AA19-C5225B984DFB}">
-                <a16:creationId xmlns:a16="http://schemas.microsoft.com/office/drawing/2010/main" id="{0D389161-092D-42FF-BB43-856DC6DABF68}"/>
+              <a:ext uri="{3DB8D270-2E3C-4965-8956-28C603514E15}">
+                <a16:creationId xmlns:a16="http://schemas.microsoft.com/office/drawing/2010/main" id="{E864CC47-5198-4716-B4D0-531A8E2A83EA}"/>
               </a:ext>
             </a:extLst>
           </p:cNvPr>
@@ -16326,8 +16327,8 @@
         <p:nvPicPr>
           <p:cNvPr id="3" name="Picture 7">
             <a:extLst>
-              <a:ext uri="{80ED1B23-1CC4-40C0-A7EF-9625485490F8}">
-                <a16:creationId xmlns:a16="http://schemas.microsoft.com/office/drawing/2010/main" id="{828EE293-E29E-4907-9F06-19AE7D4B7B1D}"/>
+              <a:ext uri="{2F27F652-F3FB-49F4-A80D-8FC7F8C04F24}">
+                <a16:creationId xmlns:a16="http://schemas.microsoft.com/office/drawing/2010/main" id="{532E4861-3A27-4328-99F3-831E632EB8BC}"/>
               </a:ext>
             </a:extLst>
           </p:cNvPr>
@@ -16360,8 +16361,8 @@
         <p:nvSpPr>
           <p:cNvPr id="4" name="Title 1">
             <a:extLst>
-              <a:ext uri="{B1566FAF-CFCC-46AC-8981-3EBF5C5BF0CA}">
-                <a16:creationId xmlns:a16="http://schemas.microsoft.com/office/drawing/2010/main" id="{904ECD04-415F-4E33-A729-EAC0D3B429A9}"/>
+              <a:ext uri="{879C946E-5DA8-4243-8460-F6D93E764AB9}">
+                <a16:creationId xmlns:a16="http://schemas.microsoft.com/office/drawing/2010/main" id="{05B0F121-BBFF-454F-A84B-3A8AA11342B3}"/>
               </a:ext>
             </a:extLst>
           </p:cNvPr>
@@ -16401,8 +16402,8 @@
         <p:nvSpPr>
           <p:cNvPr id="5" name="Slide Number Placeholder 5">
             <a:extLst>
-              <a:ext uri="{9F1F0FAF-5497-4F07-AE63-3F9161FE423E}">
-                <a16:creationId xmlns:a16="http://schemas.microsoft.com/office/drawing/2010/main" id="{E72D80A6-98A6-4B5A-B037-161F09C4B54C}"/>
+              <a:ext uri="{94EEBB12-9ADE-48EC-AB79-DF1468026BBD}">
+                <a16:creationId xmlns:a16="http://schemas.microsoft.com/office/drawing/2010/main" id="{6311BA37-D706-4C68-995B-97006AFF4E07}"/>
               </a:ext>
             </a:extLst>
           </p:cNvPr>
@@ -16427,7 +16428,7 @@
           <a:lstStyle/>
           <a:p>
             <a:pPr/>
-            <a:fld id="{BB1F015F-D787-4429-996E-DE643A19B1A3}" type="slidenum"/>
+            <a:fld id="{EC012486-2C6F-410C-B860-516A6BE7960A}" type="slidenum"/>
             <a:endParaRPr dirty="0" lang="en-US"/>
           </a:p>
         </p:txBody>
@@ -16436,8 +16437,8 @@
         <p:nvCxnSpPr>
           <p:cNvPr id="6" name="Straight Connector 9">
             <a:extLst>
-              <a:ext uri="{5F6EB860-1C56-4CF6-B24F-949E7898108A}">
-                <a16:creationId xmlns:a16="http://schemas.microsoft.com/office/drawing/2010/main" id="{40BFD8AB-BEFD-4E6B-8426-D9D36A613727}"/>
+              <a:ext uri="{05B62695-ADED-47D1-950A-240A0576B6A0}">
+                <a16:creationId xmlns:a16="http://schemas.microsoft.com/office/drawing/2010/main" id="{18BC6F4B-8408-4022-84EA-402181323E56}"/>
               </a:ext>
             </a:extLst>
           </p:cNvPr>
@@ -16478,8 +16479,8 @@
         <p:nvSpPr>
           <p:cNvPr id="7" name="Text Placeholder 17">
             <a:extLst>
-              <a:ext uri="{B141C20B-71F4-4CBA-818F-B4488F0FC841}">
-                <a16:creationId xmlns:a16="http://schemas.microsoft.com/office/drawing/2010/main" id="{D160CC76-3A83-49A2-A4BF-9E60A211E27E}"/>
+              <a:ext uri="{14E449EA-62BA-4476-8009-0018D62CA30B}">
+                <a16:creationId xmlns:a16="http://schemas.microsoft.com/office/drawing/2010/main" id="{89D0C715-8753-47C5-B1DD-769099A5EC31}"/>
               </a:ext>
             </a:extLst>
           </p:cNvPr>
@@ -16534,8 +16535,8 @@
         <p:nvSpPr>
           <p:cNvPr id="8" name="Text Placeholder 17">
             <a:extLst>
-              <a:ext uri="{4A45EAC1-4AF6-4A3D-B602-5F8BBB799231}">
-                <a16:creationId xmlns:a16="http://schemas.microsoft.com/office/drawing/2010/main" id="{946995D6-3A57-4400-A2F8-017306360DBC}"/>
+              <a:ext uri="{DECB7030-C1F0-413B-A9B8-7B375CCD5DE9}">
+                <a16:creationId xmlns:a16="http://schemas.microsoft.com/office/drawing/2010/main" id="{74DA7B68-A38F-4011-87FB-83A8B7FF9E1A}"/>
               </a:ext>
             </a:extLst>
           </p:cNvPr>
@@ -16590,8 +16591,8 @@
         <p:nvSpPr>
           <p:cNvPr id="9" name="Freeform: Shape 21">
             <a:extLst>
-              <a:ext uri="{F563FBA7-A938-4CE0-BD2A-597CFADF16B2}">
-                <a16:creationId xmlns:a16="http://schemas.microsoft.com/office/drawing/2010/main" id="{71EBCA60-C543-4FC6-809F-90F605D9B4C6}"/>
+              <a:ext uri="{BEFB71D2-DCCA-4CB2-8502-FD44862949F9}">
+                <a16:creationId xmlns:a16="http://schemas.microsoft.com/office/drawing/2010/main" id="{C6DA70B0-0169-451F-8760-CCAE37AEC577}"/>
               </a:ext>
             </a:extLst>
           </p:cNvPr>
@@ -16666,8 +16667,8 @@
         <p:nvSpPr>
           <p:cNvPr id="10" name="Oval 22">
             <a:extLst>
-              <a:ext uri="{F73B403D-4A2F-4849-8E03-89997341000B}">
-                <a16:creationId xmlns:a16="http://schemas.microsoft.com/office/drawing/2010/main" id="{7F790143-135A-4889-B5ED-ACC89A80A61D}"/>
+              <a:ext uri="{0B240B5D-0871-48B4-A225-1B6E00753C46}">
+                <a16:creationId xmlns:a16="http://schemas.microsoft.com/office/drawing/2010/main" id="{B4736ADB-269D-4922-904E-53312A944F33}"/>
               </a:ext>
             </a:extLst>
           </p:cNvPr>
@@ -16727,8 +16728,8 @@
         <p:nvPicPr>
           <p:cNvPr descr="A close up of a logo&#10;&#10;Description automatically generated" id="11" name="Picture 11">
             <a:extLst>
-              <a:ext uri="{32E2CB33-7CDA-40DF-B50F-09A46138A773}">
-                <a16:creationId xmlns:a16="http://schemas.microsoft.com/office/drawing/2010/main" id="{9B4EE6DC-D05E-4319-AAA2-7B86AB450AA4}"/>
+              <a:ext uri="{19745DD8-0D9D-48F9-A737-66C423D8331C}">
+                <a16:creationId xmlns:a16="http://schemas.microsoft.com/office/drawing/2010/main" id="{C3480553-36DF-4564-878F-692B04314E2B}"/>
               </a:ext>
             </a:extLst>
           </p:cNvPr>
@@ -16758,8 +16759,8 @@
         <p:nvSpPr>
           <p:cNvPr id="12" name="Text Placeholder 17">
             <a:extLst>
-              <a:ext uri="{BFBD4D4C-774D-4088-AC04-D80C70EFF37A}">
-                <a16:creationId xmlns:a16="http://schemas.microsoft.com/office/drawing/2010/main" id="{C5F4C963-3F2A-4F18-BA11-75385376ACF9}"/>
+              <a:ext uri="{14E4FADF-B0CB-4909-9E05-FBDD7D791788}">
+                <a16:creationId xmlns:a16="http://schemas.microsoft.com/office/drawing/2010/main" id="{4B240B0B-DD53-4C96-90D9-E87FDEC2BB9E}"/>
               </a:ext>
             </a:extLst>
           </p:cNvPr>
@@ -16814,8 +16815,8 @@
         <p:nvSpPr>
           <p:cNvPr id="13" name="Text Placeholder 17">
             <a:extLst>
-              <a:ext uri="{766E8306-E868-4567-BE59-599C414532DE}">
-                <a16:creationId xmlns:a16="http://schemas.microsoft.com/office/drawing/2010/main" id="{DA2538DB-E3A0-43B9-AAEB-EE58763076BE}"/>
+              <a:ext uri="{61287BD2-787D-4F3C-BB5B-E21730C8741A}">
+                <a16:creationId xmlns:a16="http://schemas.microsoft.com/office/drawing/2010/main" id="{C9DF3B63-F1C4-49D1-9E4C-2117D6A8E2AA}"/>
               </a:ext>
             </a:extLst>
           </p:cNvPr>
@@ -16870,8 +16871,8 @@
         <p:nvSpPr>
           <p:cNvPr id="14" name="Freeform: Shape 25">
             <a:extLst>
-              <a:ext uri="{2ED36526-1A0C-4E4B-B66F-E74794727B04}">
-                <a16:creationId xmlns:a16="http://schemas.microsoft.com/office/drawing/2010/main" id="{8C4F1B6E-90D1-46BE-A10B-249A1A88A880}"/>
+              <a:ext uri="{36A62A21-2BEB-4CED-8C92-1AFF5271B391}">
+                <a16:creationId xmlns:a16="http://schemas.microsoft.com/office/drawing/2010/main" id="{5E3F7BF6-47D0-436E-AD7C-A3061991231C}"/>
               </a:ext>
             </a:extLst>
           </p:cNvPr>
@@ -16946,8 +16947,8 @@
         <p:nvSpPr>
           <p:cNvPr id="15" name="Oval 26">
             <a:extLst>
-              <a:ext uri="{79C726CD-02AC-4BAD-8C84-FE9926D7AD2F}">
-                <a16:creationId xmlns:a16="http://schemas.microsoft.com/office/drawing/2010/main" id="{7E787E07-24CC-4AF8-B4A9-930E27E8D437}"/>
+              <a:ext uri="{20F7FDC4-A728-495D-8EDE-6064F38A697B}">
+                <a16:creationId xmlns:a16="http://schemas.microsoft.com/office/drawing/2010/main" id="{5C9E05DC-CA2B-4428-9DDB-436593E6FB0F}"/>
               </a:ext>
             </a:extLst>
           </p:cNvPr>
@@ -17007,8 +17008,8 @@
         <p:nvPicPr>
           <p:cNvPr descr="A close up of a logo&#10;&#10;Description automatically generated" id="16" name="Picture 27">
             <a:extLst>
-              <a:ext uri="{5CD8B5FB-58CA-4982-BBD5-4F88CE470D03}">
-                <a16:creationId xmlns:a16="http://schemas.microsoft.com/office/drawing/2010/main" id="{B7E8928C-E309-41E1-BF4D-0887346D4679}"/>
+              <a:ext uri="{EC450E7F-255C-4E93-844A-81F94D461731}">
+                <a16:creationId xmlns:a16="http://schemas.microsoft.com/office/drawing/2010/main" id="{E6E2F771-CBDB-40DF-92AC-7E6E67B7959B}"/>
               </a:ext>
             </a:extLst>
           </p:cNvPr>
@@ -17038,8 +17039,8 @@
         <p:nvSpPr>
           <p:cNvPr id="17" name="Text Placeholder 17">
             <a:extLst>
-              <a:ext uri="{A62A60BC-C3DA-42C9-9867-C049B2B063DA}">
-                <a16:creationId xmlns:a16="http://schemas.microsoft.com/office/drawing/2010/main" id="{2CA9BDDE-D39D-43A8-B983-86D1D9571BED}"/>
+              <a:ext uri="{E55439DB-2DA1-4CB8-9671-E1AAEE8EF98F}">
+                <a16:creationId xmlns:a16="http://schemas.microsoft.com/office/drawing/2010/main" id="{9BD5FE4E-0F2C-41DB-8107-2D053B4916A8}"/>
               </a:ext>
             </a:extLst>
           </p:cNvPr>
@@ -17094,8 +17095,8 @@
         <p:nvSpPr>
           <p:cNvPr id="18" name="Text Placeholder 17">
             <a:extLst>
-              <a:ext uri="{7083EDB6-A428-4997-B41C-D4FDA80AF245}">
-                <a16:creationId xmlns:a16="http://schemas.microsoft.com/office/drawing/2010/main" id="{137797D5-0B5A-4BCF-B952-47AB00DB6DAE}"/>
+              <a:ext uri="{13AB3D7D-498D-4CFA-85BD-19D39A194394}">
+                <a16:creationId xmlns:a16="http://schemas.microsoft.com/office/drawing/2010/main" id="{F708D014-204C-4D55-BE52-A3EBE85AE878}"/>
               </a:ext>
             </a:extLst>
           </p:cNvPr>
@@ -17150,8 +17151,8 @@
         <p:nvSpPr>
           <p:cNvPr id="19" name="Freeform: Shape 30">
             <a:extLst>
-              <a:ext uri="{A0578BFE-17BE-4F45-97D4-6557C96479EA}">
-                <a16:creationId xmlns:a16="http://schemas.microsoft.com/office/drawing/2010/main" id="{4B8057F0-3A7E-4379-9663-96F4676C3442}"/>
+              <a:ext uri="{6FEABAC4-0254-46B7-ACDD-8E6B9D46D531}">
+                <a16:creationId xmlns:a16="http://schemas.microsoft.com/office/drawing/2010/main" id="{75265221-84E3-475C-8CB1-C3D2D67EAFAB}"/>
               </a:ext>
             </a:extLst>
           </p:cNvPr>
@@ -17226,8 +17227,8 @@
         <p:nvSpPr>
           <p:cNvPr id="20" name="Oval 31">
             <a:extLst>
-              <a:ext uri="{61ADC923-1285-4EDC-8988-605A355D5679}">
-                <a16:creationId xmlns:a16="http://schemas.microsoft.com/office/drawing/2010/main" id="{259F5BDC-48C7-424B-9AC6-3405C0508242}"/>
+              <a:ext uri="{AB2983FE-7552-49DD-A8A8-5B622C43C64A}">
+                <a16:creationId xmlns:a16="http://schemas.microsoft.com/office/drawing/2010/main" id="{2A4EBDF9-FD56-4B95-A5A4-314482DE9C25}"/>
               </a:ext>
             </a:extLst>
           </p:cNvPr>
@@ -17287,8 +17288,8 @@
         <p:nvPicPr>
           <p:cNvPr descr="A close up of a logo&#10;&#10;Description automatically generated" id="21" name="Picture 32">
             <a:extLst>
-              <a:ext uri="{4C6C99F6-EC7C-4C17-8B05-2ADAFB60B034}">
-                <a16:creationId xmlns:a16="http://schemas.microsoft.com/office/drawing/2010/main" id="{9C7EE2D2-5A3C-4999-91C9-3D70B2CD9356}"/>
+              <a:ext uri="{1349B24C-8181-49A5-B540-E4D0F335A454}">
+                <a16:creationId xmlns:a16="http://schemas.microsoft.com/office/drawing/2010/main" id="{DE4CAB87-3749-498F-A6DB-04F13BBCF587}"/>
               </a:ext>
             </a:extLst>
           </p:cNvPr>
@@ -17318,8 +17319,8 @@
         <p:nvSpPr>
           <p:cNvPr id="22" name="Text Placeholder 4">
             <a:extLst>
-              <a:ext uri="{F16A9082-384C-44E8-8983-7EC3C5C6C119}">
-                <a16:creationId xmlns:a16="http://schemas.microsoft.com/office/drawing/2010/main" id="{F88D31BE-1992-46E9-9860-D25977D79E20}"/>
+              <a:ext uri="{D8E8C6A4-1ACD-4C4C-99FF-A4E2C308BAE8}">
+                <a16:creationId xmlns:a16="http://schemas.microsoft.com/office/drawing/2010/main" id="{3783220F-974C-4EA5-B75C-B670746D14D6}"/>
               </a:ext>
             </a:extLst>
           </p:cNvPr>
@@ -17374,8 +17375,8 @@
         <p:nvSpPr>
           <p:cNvPr hidden="false" id="23" name="Date Placeholder 1">
             <a:extLst>
-              <a:ext uri="{C06F0B51-4AEE-40BD-A2AA-C4D0FD5DF750}">
-                <a16:creationId xmlns:a16="http://schemas.microsoft.com/office/drawing/2010/main" id="{0B1790A6-452E-420B-8B7E-2AEA36F311F4}"/>
+              <a:ext uri="{F6ABCFA8-D43A-429A-8D27-6289D950E648}">
+                <a16:creationId xmlns:a16="http://schemas.microsoft.com/office/drawing/2010/main" id="{A10CFCE5-6E28-41EF-A4EE-B0DC0656773A}"/>
               </a:ext>
             </a:extLst>
           </p:cNvPr>
@@ -17423,8 +17424,8 @@
         <p:nvSpPr>
           <p:cNvPr hidden="false" id="24" name="Footer Placeholder 1">
             <a:extLst>
-              <a:ext uri="{77578CC6-BBEB-4C93-8F0F-8F26784BB41E}">
-                <a16:creationId xmlns:a16="http://schemas.microsoft.com/office/drawing/2010/main" id="{A1D0D2F6-484A-4C35-A19C-229E418D3477}"/>
+              <a:ext uri="{605145DA-FF91-434E-8157-F2E72FDDF60C}">
+                <a16:creationId xmlns:a16="http://schemas.microsoft.com/office/drawing/2010/main" id="{783B05F6-9A7F-4C8D-9139-9EAE39361480}"/>
               </a:ext>
             </a:extLst>
           </p:cNvPr>
@@ -17470,8 +17471,8 @@
       </p:sp>
     </p:spTree>
     <p:extLst>
-      <p:ext uri="{02A33DBB-8FC0-40A7-A9EB-7B5D3B315FDF}">
-        <p14:creationId xmlns:p14="http://schemas.microsoft.com/office/powerpoint/2010/main" val="1713420158721"/>
+      <p:ext uri="{40731E1B-81B5-4F69-854E-BE943B7D7790}">
+        <p14:creationId xmlns:p14="http://schemas.microsoft.com/office/powerpoint/2010/main" val="1713440222479"/>
       </p:ext>
     </p:extLst>
   </p:cSld>
@@ -17502,8 +17503,8 @@
         <p:nvSpPr>
           <p:cNvPr id="2" name="Rectangle 6">
             <a:extLst>
-              <a:ext uri="{DDF5A39C-0D17-486F-88C5-79FEE68827B6}">
-                <a16:creationId xmlns:a16="http://schemas.microsoft.com/office/drawing/2010/main" id="{4292A3C0-4F64-4F43-B7A0-BB7B4C1A0DAD}"/>
+              <a:ext uri="{34C26C01-3557-438F-B666-8535CFF2D4B5}">
+                <a16:creationId xmlns:a16="http://schemas.microsoft.com/office/drawing/2010/main" id="{B5536673-179B-4011-AD6F-9003E1F08B8D}"/>
               </a:ext>
             </a:extLst>
           </p:cNvPr>
@@ -17559,8 +17560,8 @@
         <p:nvPicPr>
           <p:cNvPr descr="A picture containing animal, light&#10;&#10;Description automatically generated" id="3" name="Picture 24">
             <a:extLst>
-              <a:ext uri="{9AD40C17-AB70-417A-A358-F0324431B476}">
-                <a16:creationId xmlns:a16="http://schemas.microsoft.com/office/drawing/2010/main" id="{8B0D2B2D-A003-466E-B2F0-4200D2D9B4BA}"/>
+              <a:ext uri="{614A5FE5-396C-4651-9957-A5363B3FF5AC}">
+                <a16:creationId xmlns:a16="http://schemas.microsoft.com/office/drawing/2010/main" id="{C168927C-EEB8-4520-88C6-46D73EF26255}"/>
               </a:ext>
             </a:extLst>
           </p:cNvPr>
@@ -17593,8 +17594,8 @@
         <p:nvPicPr>
           <p:cNvPr id="4" name="Picture 9">
             <a:extLst>
-              <a:ext uri="{6D78BD16-97C5-4ACA-AD85-5FA31430E91D}">
-                <a16:creationId xmlns:a16="http://schemas.microsoft.com/office/drawing/2010/main" id="{834A34F2-5261-40DF-904B-CCFB8D1783A4}"/>
+              <a:ext uri="{DFBA5F3C-4737-4443-B829-496E957C5CE5}">
+                <a16:creationId xmlns:a16="http://schemas.microsoft.com/office/drawing/2010/main" id="{A34DCF40-9442-4222-AA8C-590918E510DE}"/>
               </a:ext>
             </a:extLst>
           </p:cNvPr>
@@ -17627,8 +17628,8 @@
         <p:nvGrpSpPr>
           <p:cNvPr id="5" name="Group 10">
             <a:extLst>
-              <a:ext uri="{0328D900-C181-4BF7-B28D-F2CA6131A279}">
-                <a16:creationId xmlns:a16="http://schemas.microsoft.com/office/drawing/2010/main" id="{9FB6FB88-02DC-45A2-860D-7593115DABD7}"/>
+              <a:ext uri="{E7783047-41BD-4569-A667-D1DD787770C0}">
+                <a16:creationId xmlns:a16="http://schemas.microsoft.com/office/drawing/2010/main" id="{BE3F4F2A-DF03-43B1-9692-5DE05B965116}"/>
               </a:ext>
             </a:extLst>
           </p:cNvPr>
@@ -17647,8 +17648,8 @@
           <p:nvCxnSpPr>
             <p:cNvPr id="6" name="Straight Connector 11">
               <a:extLst>
-                <a:ext uri="{302D4555-8073-4411-A997-DDAD2CF025ED}">
-                  <a16:creationId xmlns:a16="http://schemas.microsoft.com/office/drawing/2010/main" id="{A5674781-91D6-439F-A7F9-67E91758BD63}"/>
+                <a:ext uri="{506AFC09-D9BE-42D7-949E-ED9C8D0298DC}">
+                  <a16:creationId xmlns:a16="http://schemas.microsoft.com/office/drawing/2010/main" id="{5229B1E0-B9C6-45AE-962C-95687154C7CC}"/>
                 </a:ext>
               </a:extLst>
             </p:cNvPr>
@@ -17690,8 +17691,8 @@
           <p:nvSpPr>
             <p:cNvPr id="7" name="Freeform: Shape 12">
               <a:extLst>
-                <a:ext uri="{B589C835-9A69-418D-AE1C-934F3D32803C}">
-                  <a16:creationId xmlns:a16="http://schemas.microsoft.com/office/drawing/2010/main" id="{BB97810D-83DA-4C90-B985-E6EB1754333B}"/>
+                <a:ext uri="{C99BE05D-EB18-4543-87C3-EB69CEB392D7}">
+                  <a16:creationId xmlns:a16="http://schemas.microsoft.com/office/drawing/2010/main" id="{435EE020-A47E-4A27-8A0B-22EEE3033F64}"/>
                 </a:ext>
               </a:extLst>
             </p:cNvPr>
@@ -17766,8 +17767,8 @@
           <p:nvSpPr>
             <p:cNvPr id="8" name="Oval 13">
               <a:extLst>
-                <a:ext uri="{8496F221-F796-4B9D-A887-CED7A0CF1D23}">
-                  <a16:creationId xmlns:a16="http://schemas.microsoft.com/office/drawing/2010/main" id="{BF8CBC6D-81EF-413E-AB21-7EE632FEC474}"/>
+                <a:ext uri="{EED1B2C2-DEDC-4E61-8C81-CF3B28B4AD39}">
+                  <a16:creationId xmlns:a16="http://schemas.microsoft.com/office/drawing/2010/main" id="{0C68D637-1F06-4490-8460-A05A1E92E9F9}"/>
                 </a:ext>
               </a:extLst>
             </p:cNvPr>
@@ -17827,8 +17828,8 @@
           <p:nvSpPr>
             <p:cNvPr id="9" name="Oval 14">
               <a:extLst>
-                <a:ext uri="{793A3C58-9D3B-4AC2-9067-94A5EF00EA3C}">
-                  <a16:creationId xmlns:a16="http://schemas.microsoft.com/office/drawing/2010/main" id="{ED270DC3-678F-4D5B-947C-0AA3ADBEF076}"/>
+                <a:ext uri="{F67D3872-3DFF-4A04-90F9-6AC4697114ED}">
+                  <a16:creationId xmlns:a16="http://schemas.microsoft.com/office/drawing/2010/main" id="{64EBAF9E-D3E4-4C13-A108-0C5C14AEC9BC}"/>
                 </a:ext>
               </a:extLst>
             </p:cNvPr>
@@ -17888,8 +17889,8 @@
           <p:nvSpPr>
             <p:cNvPr id="10" name="Oval 15">
               <a:extLst>
-                <a:ext uri="{CD2C6707-2D8D-4B91-B3BC-EDE5BDEC6692}">
-                  <a16:creationId xmlns:a16="http://schemas.microsoft.com/office/drawing/2010/main" id="{269E88E3-E637-4A9A-AD93-E56A6EAFA728}"/>
+                <a:ext uri="{99A20CA0-2178-49E0-9D37-A6F23A998A09}">
+                  <a16:creationId xmlns:a16="http://schemas.microsoft.com/office/drawing/2010/main" id="{3B6A8D75-09E3-4B74-977E-CFCE930D2CB8}"/>
                 </a:ext>
               </a:extLst>
             </p:cNvPr>
@@ -17949,8 +17950,8 @@
           <p:nvSpPr>
             <p:cNvPr id="11" name="Freeform: Shape 16">
               <a:extLst>
-                <a:ext uri="{1A84D111-7F94-4237-9591-AC0D04BDC855}">
-                  <a16:creationId xmlns:a16="http://schemas.microsoft.com/office/drawing/2010/main" id="{1BF0CED1-EBA9-4713-B8B6-C0FA9160D8C7}"/>
+                <a:ext uri="{FA46DF90-07CA-4EDF-A27E-EA2E41D54B7F}">
+                  <a16:creationId xmlns:a16="http://schemas.microsoft.com/office/drawing/2010/main" id="{0938DBDD-2179-4B44-B4C7-9019B1FF62BD}"/>
                 </a:ext>
               </a:extLst>
             </p:cNvPr>
@@ -18025,8 +18026,8 @@
           <p:nvSpPr>
             <p:cNvPr id="12" name="Oval 17">
               <a:extLst>
-                <a:ext uri="{771F2679-A07C-491B-9511-A104A8AD3634}">
-                  <a16:creationId xmlns:a16="http://schemas.microsoft.com/office/drawing/2010/main" id="{A6119BD6-D15B-4924-92B0-FA51EFC9924E}"/>
+                <a:ext uri="{26CE2591-AED4-4079-BA8B-AD4987CF2931}">
+                  <a16:creationId xmlns:a16="http://schemas.microsoft.com/office/drawing/2010/main" id="{A3342777-ACFB-4335-B775-AF72D3DD786C}"/>
                 </a:ext>
               </a:extLst>
             </p:cNvPr>
@@ -18086,8 +18087,8 @@
           <p:nvSpPr>
             <p:cNvPr id="13" name="Oval 18">
               <a:extLst>
-                <a:ext uri="{EE55766F-00D3-4ECC-B3BF-55BECDC32F39}">
-                  <a16:creationId xmlns:a16="http://schemas.microsoft.com/office/drawing/2010/main" id="{BE28F466-C9C1-4D07-BC5A-0E799C6487EB}"/>
+                <a:ext uri="{AAF44136-24FE-4843-91BF-FE181D896D21}">
+                  <a16:creationId xmlns:a16="http://schemas.microsoft.com/office/drawing/2010/main" id="{D70B6025-AAA9-4B3B-B133-BF2FA28A0033}"/>
                 </a:ext>
               </a:extLst>
             </p:cNvPr>
@@ -18147,8 +18148,8 @@
           <p:nvSpPr>
             <p:cNvPr id="14" name="Oval 19">
               <a:extLst>
-                <a:ext uri="{F3030965-2F28-463B-B04F-BC64345D59FB}">
-                  <a16:creationId xmlns:a16="http://schemas.microsoft.com/office/drawing/2010/main" id="{0E3DA8E0-1580-4935-BC97-CFDADB12C886}"/>
+                <a:ext uri="{3DC150CE-5A13-4A99-92D6-EA3EF1DC6390}">
+                  <a16:creationId xmlns:a16="http://schemas.microsoft.com/office/drawing/2010/main" id="{D53F6582-FBCB-45B3-B661-03B8463B1C49}"/>
                 </a:ext>
               </a:extLst>
             </p:cNvPr>
@@ -18209,8 +18210,8 @@
         <p:nvSpPr>
           <p:cNvPr id="15" name="Title 1">
             <a:extLst>
-              <a:ext uri="{C3F9CE34-7BFA-4828-A4AB-5FC1E9A6CD76}">
-                <a16:creationId xmlns:a16="http://schemas.microsoft.com/office/drawing/2010/main" id="{F945EA1C-86AC-4979-99EE-A23DFC44653D}"/>
+              <a:ext uri="{CE193914-8755-451F-B05A-49F80E087F66}">
+                <a16:creationId xmlns:a16="http://schemas.microsoft.com/office/drawing/2010/main" id="{E684C8CF-9A8F-4530-AE1D-058CC8152DDC}"/>
               </a:ext>
             </a:extLst>
           </p:cNvPr>
@@ -18255,8 +18256,8 @@
         <p:nvSpPr>
           <p:cNvPr id="16" name="Text Placeholder 22">
             <a:extLst>
-              <a:ext uri="{D6655E50-A79E-4DBB-B8F7-6BBC3A4E73A1}">
-                <a16:creationId xmlns:a16="http://schemas.microsoft.com/office/drawing/2010/main" id="{F5B3E2D1-C460-42C0-87BD-3E1E44BD3D9B}"/>
+              <a:ext uri="{62E28738-D86A-4306-9F63-3A90350FB1F9}">
+                <a16:creationId xmlns:a16="http://schemas.microsoft.com/office/drawing/2010/main" id="{AFF5BAF8-84EF-4DA6-B648-8D4504F0E133}"/>
               </a:ext>
             </a:extLst>
           </p:cNvPr>
@@ -18347,8 +18348,8 @@
         <p:nvSpPr>
           <p:cNvPr id="17" name="Slide Number Placeholder 2">
             <a:extLst>
-              <a:ext uri="{B600842F-7989-460D-AB56-45277A545022}">
-                <a16:creationId xmlns:a16="http://schemas.microsoft.com/office/drawing/2010/main" id="{1E10B217-C4AF-4C9B-A326-9AE2EA4287F4}"/>
+              <a:ext uri="{8CB6C331-9027-4A03-A0E9-BCE2578070A5}">
+                <a16:creationId xmlns:a16="http://schemas.microsoft.com/office/drawing/2010/main" id="{E505D264-FC8F-4B0C-8234-B0A2AA1F887E}"/>
               </a:ext>
             </a:extLst>
           </p:cNvPr>
@@ -18373,7 +18374,7 @@
           <a:lstStyle/>
           <a:p>
             <a:pPr/>
-            <a:fld id="{5C7C7B79-034D-4256-B3F5-AE69459466DA}" type="slidenum"/>
+            <a:fld id="{F58BE0C4-8F0D-48F7-93D3-2C6D791E682B}" type="slidenum"/>
             <a:endParaRPr dirty="0" lang="en-US"/>
           </a:p>
         </p:txBody>
@@ -18382,8 +18383,8 @@
         <p:nvPicPr>
           <p:cNvPr descr="A picture containing clock&#10;&#10;Description automatically generated" id="18" name="Picture 4">
             <a:extLst>
-              <a:ext uri="{29F36DD7-A736-484C-9303-F6024566E346}">
-                <a16:creationId xmlns:a16="http://schemas.microsoft.com/office/drawing/2010/main" id="{C8ACE1A5-E6F5-46BC-A4F2-D9BF263C09AF}"/>
+              <a:ext uri="{CB723C0D-4CB4-4673-81E9-E4D48E10D236}">
+                <a16:creationId xmlns:a16="http://schemas.microsoft.com/office/drawing/2010/main" id="{F312F6D8-FC13-4154-9834-9EB0B6568208}"/>
               </a:ext>
             </a:extLst>
           </p:cNvPr>
@@ -18413,8 +18414,8 @@
         <p:nvPicPr>
           <p:cNvPr id="19" name="Picture 23">
             <a:extLst>
-              <a:ext uri="{B83E4FA9-B4BC-4EC4-A011-E6566F94E074}">
-                <a16:creationId xmlns:a16="http://schemas.microsoft.com/office/drawing/2010/main" id="{E5196A2B-F2FA-428A-8D5C-35A64F0719E1}"/>
+              <a:ext uri="{BDF519F0-6FF6-44F9-9A29-DD2E0A631F57}">
+                <a16:creationId xmlns:a16="http://schemas.microsoft.com/office/drawing/2010/main" id="{585CD936-E5AE-4F14-8E0C-6840488F3304}"/>
               </a:ext>
             </a:extLst>
           </p:cNvPr>
@@ -18447,8 +18448,8 @@
         <p:nvSpPr>
           <p:cNvPr id="20" name="Text Placeholder 22">
             <a:extLst>
-              <a:ext uri="{770B191C-12BA-4C04-8D4D-30CD7EA2639D}">
-                <a16:creationId xmlns:a16="http://schemas.microsoft.com/office/drawing/2010/main" id="{A941A501-A029-4A9B-887C-23653E39B065}"/>
+              <a:ext uri="{9B0208FE-066F-48C9-AE7A-793E793FF9D2}">
+                <a16:creationId xmlns:a16="http://schemas.microsoft.com/office/drawing/2010/main" id="{96337959-6A20-44F7-B05E-C4C3A17DD558}"/>
               </a:ext>
             </a:extLst>
           </p:cNvPr>
@@ -18541,8 +18542,8 @@
         <p:nvSpPr>
           <p:cNvPr id="21" name="Text Placeholder 22">
             <a:extLst>
-              <a:ext uri="{1803BF89-988B-4378-B51B-18DB2F824F0D}">
-                <a16:creationId xmlns:a16="http://schemas.microsoft.com/office/drawing/2010/main" id="{3EB19A3F-E1D5-49E0-B25C-49F38ED2762A}"/>
+              <a:ext uri="{584AFDCA-F2BE-41E8-B88E-64C0017666E1}">
+                <a16:creationId xmlns:a16="http://schemas.microsoft.com/office/drawing/2010/main" id="{E075F2B4-8C30-4EA5-8024-412017F13803}"/>
               </a:ext>
             </a:extLst>
           </p:cNvPr>
@@ -18633,8 +18634,8 @@
         <p:nvSpPr>
           <p:cNvPr id="22" name="Text Placeholder 22">
             <a:extLst>
-              <a:ext uri="{AAF3EC39-4C1A-43E2-9569-FC42744BF23A}">
-                <a16:creationId xmlns:a16="http://schemas.microsoft.com/office/drawing/2010/main" id="{F06A681D-3458-4191-9B62-64B377AFDA47}"/>
+              <a:ext uri="{ABA98B4F-D4B2-4F0D-9047-BDE4B7267795}">
+                <a16:creationId xmlns:a16="http://schemas.microsoft.com/office/drawing/2010/main" id="{BB108BB8-318C-471F-B87A-07780DF20A75}"/>
               </a:ext>
             </a:extLst>
           </p:cNvPr>
@@ -18725,8 +18726,8 @@
         <p:nvSpPr>
           <p:cNvPr id="23" name="Text Placeholder 22">
             <a:extLst>
-              <a:ext uri="{3FCEB047-3391-4FEF-A90E-1CB8A2E7107E}">
-                <a16:creationId xmlns:a16="http://schemas.microsoft.com/office/drawing/2010/main" id="{A4EB71D9-1168-4820-A637-ABB55805F809}"/>
+              <a:ext uri="{C9248194-BB2E-45F8-9818-A08388A6F3ED}">
+                <a16:creationId xmlns:a16="http://schemas.microsoft.com/office/drawing/2010/main" id="{61233030-3D0C-447E-A3CF-E297CF2A0BE2}"/>
               </a:ext>
             </a:extLst>
           </p:cNvPr>
@@ -18817,8 +18818,8 @@
         <p:nvSpPr>
           <p:cNvPr id="24" name="Text Placeholder 22">
             <a:extLst>
-              <a:ext uri="{A8C209E8-FA2C-407E-B8DE-0A7D706C6D23}">
-                <a16:creationId xmlns:a16="http://schemas.microsoft.com/office/drawing/2010/main" id="{F4C4C24D-3D14-4551-A8E8-7053D1FA4D54}"/>
+              <a:ext uri="{ADEEACDF-46CE-4B9F-B7CF-7B91E08AC1BB}">
+                <a16:creationId xmlns:a16="http://schemas.microsoft.com/office/drawing/2010/main" id="{F0C0993D-8105-462A-80FA-16227A017441}"/>
               </a:ext>
             </a:extLst>
           </p:cNvPr>
@@ -18909,8 +18910,8 @@
         <p:nvSpPr>
           <p:cNvPr hidden="false" id="25" name="Date Placeholder 1">
             <a:extLst>
-              <a:ext uri="{B5F5C487-00ED-4E14-91FF-69354974A008}">
-                <a16:creationId xmlns:a16="http://schemas.microsoft.com/office/drawing/2010/main" id="{7481CA78-311F-4B0E-B451-EAE16FF2F282}"/>
+              <a:ext uri="{3BFA0C21-BF74-4AA8-9534-968276FBDF3E}">
+                <a16:creationId xmlns:a16="http://schemas.microsoft.com/office/drawing/2010/main" id="{9ECB6737-AF74-4B92-97B2-522CD569982E}"/>
               </a:ext>
             </a:extLst>
           </p:cNvPr>
@@ -18958,8 +18959,8 @@
         <p:nvSpPr>
           <p:cNvPr hidden="false" id="26" name="Footer Placeholder 1">
             <a:extLst>
-              <a:ext uri="{931D5126-3F4F-47D9-9315-379018A4D2B5}">
-                <a16:creationId xmlns:a16="http://schemas.microsoft.com/office/drawing/2010/main" id="{9E63D1F0-CFAF-4A52-B03C-ED5D3A93A547}"/>
+              <a:ext uri="{C121DB08-0665-43CC-8023-5B7B3899332A}">
+                <a16:creationId xmlns:a16="http://schemas.microsoft.com/office/drawing/2010/main" id="{791F862C-5580-43D2-A8E0-E0F6B0D8FDA9}"/>
               </a:ext>
             </a:extLst>
           </p:cNvPr>
@@ -19005,8 +19006,8 @@
       </p:sp>
     </p:spTree>
     <p:extLst>
-      <p:ext uri="{8949C86A-48D8-483D-8563-B897443B1476}">
-        <p14:creationId xmlns:p14="http://schemas.microsoft.com/office/powerpoint/2010/main" val="1713420158725"/>
+      <p:ext uri="{30F3D26F-9083-48B7-9890-C2797F22C549}">
+        <p14:creationId xmlns:p14="http://schemas.microsoft.com/office/powerpoint/2010/main" val="1713440222482"/>
       </p:ext>
     </p:extLst>
   </p:cSld>
@@ -19042,8 +19043,8 @@
         <p:nvSpPr>
           <p:cNvPr id="2" name="Title Placeholder 1">
             <a:extLst>
-              <a:ext uri="{5342C46E-71B7-4697-B14C-36767755E12B}">
-                <a16:creationId xmlns:a16="http://schemas.microsoft.com/office/drawing/2010/main" id="{BF78C156-800A-4E1C-8E08-D66AF332E5FE}"/>
+              <a:ext uri="{57C9E67E-7EAA-411A-9C8C-4DF83AF82A05}">
+                <a16:creationId xmlns:a16="http://schemas.microsoft.com/office/drawing/2010/main" id="{721B7D65-A081-4873-AD47-294EF5A9ECAF}"/>
               </a:ext>
             </a:extLst>
           </p:cNvPr>
@@ -19082,8 +19083,8 @@
         <p:nvSpPr>
           <p:cNvPr id="3" name="Text Placeholder 2">
             <a:extLst>
-              <a:ext uri="{90822C8A-EFF0-4A20-B8F8-AB15701907A2}">
-                <a16:creationId xmlns:a16="http://schemas.microsoft.com/office/drawing/2010/main" id="{0C2FEC48-2B42-4572-9DA5-8CFE12FE7483}"/>
+              <a:ext uri="{B08CFE30-CDA3-4033-AC19-4DCDEDC7DA6E}">
+                <a16:creationId xmlns:a16="http://schemas.microsoft.com/office/drawing/2010/main" id="{8D88766E-BA05-4663-9E93-125E1249F588}"/>
               </a:ext>
             </a:extLst>
           </p:cNvPr>
@@ -19150,8 +19151,8 @@
         <p:nvSpPr>
           <p:cNvPr id="4" name="Slide Number Placeholder 7">
             <a:extLst>
-              <a:ext uri="{50A36447-E2EA-423D-BA5E-4B38D9C10030}">
-                <a16:creationId xmlns:a16="http://schemas.microsoft.com/office/drawing/2010/main" id="{FB520A58-8F6E-42B3-AFEB-9C025F04AC2F}"/>
+              <a:ext uri="{E9A35ACF-35C9-4DEB-B614-44728010A9F9}">
+                <a16:creationId xmlns:a16="http://schemas.microsoft.com/office/drawing/2010/main" id="{AB39DF61-ADB8-4362-A830-E5025F3A6BE0}"/>
               </a:ext>
             </a:extLst>
           </p:cNvPr>
@@ -19184,7 +19185,7 @@
           </a:lstStyle>
           <a:p>
             <a:pPr/>
-            <a:fld id="{9BD0F6C9-A5EE-48E5-86D8-2DF4B664AE27}" type="slidenum"/>
+            <a:fld id="{02813F81-40C6-4444-944C-68DE9439BEAA}" type="slidenum"/>
             <a:endParaRPr dirty="0" lang="en-US"/>
           </a:p>
         </p:txBody>
@@ -19193,8 +19194,8 @@
         <p:nvSpPr>
           <p:cNvPr hidden="false" id="5" name="Footer Placeholder 1">
             <a:extLst>
-              <a:ext uri="{EC28D7AE-A705-4F9E-B42E-4585BF8B1796}">
-                <a16:creationId xmlns:a16="http://schemas.microsoft.com/office/drawing/2010/main" id="{88F31E64-E1DF-4E03-B7A7-3ABDF42D7885}"/>
+              <a:ext uri="{F6EFA972-7C04-4C9E-BAC2-C1167B5323C4}">
+                <a16:creationId xmlns:a16="http://schemas.microsoft.com/office/drawing/2010/main" id="{92A68814-222E-4942-9840-462D677322F8}"/>
               </a:ext>
             </a:extLst>
           </p:cNvPr>
@@ -19242,8 +19243,8 @@
         <p:nvSpPr>
           <p:cNvPr hidden="false" id="6" name="Date Placeholder 1">
             <a:extLst>
-              <a:ext uri="{CD5EF5D7-BCDA-4098-B598-CC43EDE5014A}">
-                <a16:creationId xmlns:a16="http://schemas.microsoft.com/office/drawing/2010/main" id="{58F04809-101B-4F8E-BCB3-FED652EA9761}"/>
+              <a:ext uri="{2FDC4F1E-0A8D-423E-A51B-4808DF1B272A}">
+                <a16:creationId xmlns:a16="http://schemas.microsoft.com/office/drawing/2010/main" id="{124A7E35-CF7C-41FA-9E16-3850B80C49D6}"/>
               </a:ext>
             </a:extLst>
           </p:cNvPr>
@@ -19582,8 +19583,8 @@
         <p:nvSpPr>
           <p:cNvPr id="2" name="Title 112">
             <a:extLst>
-              <a:ext uri="{48049208-3385-4A14-9A49-AF5104816155}">
-                <a16:creationId xmlns:a16="http://schemas.microsoft.com/office/drawing/2010/main" id="{B137AD58-7F42-45C3-B666-6337F0482726}"/>
+              <a:ext uri="{6BCA93C9-6F8B-4448-BC1E-55CA0C2FAFF2}">
+                <a16:creationId xmlns:a16="http://schemas.microsoft.com/office/drawing/2010/main" id="{94E2ED5E-FF96-456F-8F32-B88569575CB5}"/>
               </a:ext>
             </a:extLst>
           </p:cNvPr>
@@ -19631,8 +19632,8 @@
         <p:nvSpPr>
           <p:cNvPr id="3" name="Subtitle 113">
             <a:extLst>
-              <a:ext uri="{6769C670-D9A7-4ABE-8807-80411EFC1868}">
-                <a16:creationId xmlns:a16="http://schemas.microsoft.com/office/drawing/2010/main" id="{A190C9AB-AD57-45EA-AA66-D5998AD5713D}"/>
+              <a:ext uri="{9693065C-EB41-4134-B70F-7097C33042F1}">
+                <a16:creationId xmlns:a16="http://schemas.microsoft.com/office/drawing/2010/main" id="{6899D4B6-1026-466B-9A18-1DD649CD65CB}"/>
               </a:ext>
             </a:extLst>
           </p:cNvPr>
@@ -19706,8 +19707,8 @@
         <p:nvSpPr>
           <p:cNvPr id="4" name="Text Placeholder 114">
             <a:extLst>
-              <a:ext uri="{CE615729-2DAF-4F1B-9FE6-903C7B327F1C}">
-                <a16:creationId xmlns:a16="http://schemas.microsoft.com/office/drawing/2010/main" id="{C89604D8-1FFE-4868-A414-C12015FDE13A}"/>
+              <a:ext uri="{44CDC7EB-B6DC-4F98-8900-B26A317091D3}">
+                <a16:creationId xmlns:a16="http://schemas.microsoft.com/office/drawing/2010/main" id="{96F1660F-B96B-4CB3-B51F-3D2DE1B4D2EA}"/>
               </a:ext>
             </a:extLst>
           </p:cNvPr>
@@ -19734,8 +19735,108 @@
       </p:sp>
     </p:spTree>
     <p:extLst>
-      <p:ext uri="{E3AC5CBE-C29F-4AE3-B957-2223527C953F}">
-        <p14:creationId xmlns:p14="http://schemas.microsoft.com/office/powerpoint/2010/main" val="1713420158761"/>
+      <p:ext uri="{E7369D07-AC01-4D21-B7DA-3BA29EBB2F28}">
+        <p14:creationId xmlns:p14="http://schemas.microsoft.com/office/powerpoint/2010/main" val="1713440222512"/>
+      </p:ext>
+    </p:extLst>
+  </p:cSld>
+  <p:clrMapOvr>
+    <a:masterClrMapping/>
+  </p:clrMapOvr>
+</p:sld>
+</file>
+
+<file path=ppt/slides/slide10.xml><?xml version="1.0" encoding="utf-8"?>
+<p:sld xmlns:p="http://schemas.openxmlformats.org/presentationml/2006/main" xmlns:a="http://schemas.openxmlformats.org/drawingml/2006/main" xmlns:c="http://schemas.openxmlformats.org/drawingml/2006/chart" xmlns:cs="http://schemas.microsoft.com/office/drawing/2012/chartStyle" xmlns:ns1="http://schemas.openxmlformats.org/officeDocument/2006/extended-properties" xmlns:r="http://schemas.openxmlformats.org/officeDocument/2006/relationships" xmlns:vt="http://schemas.openxmlformats.org/officeDocument/2006/docPropsVTypes">
+  <p:cSld name="slide13">
+    <p:spTree>
+      <p:nvGrpSpPr>
+        <p:cNvPr id="1" name=""/>
+        <p:cNvGrpSpPr/>
+        <p:nvPr/>
+      </p:nvGrpSpPr>
+      <p:grpSpPr>
+        <a:xfrm>
+          <a:off x="0" y="0"/>
+          <a:ext cx="0" cy="0"/>
+          <a:chOff x="0" y="0"/>
+          <a:chExt cx="0" cy="0"/>
+        </a:xfrm>
+      </p:grpSpPr>
+      <p:sp>
+        <p:nvSpPr>
+          <p:cNvPr id="2" name="Title 1">
+            <a:extLst>
+              <a:ext uri="{F59B4C19-9C7D-4B70-9CFC-9CB149D28BAE}">
+                <a16:creationId xmlns:a16="http://schemas.microsoft.com/office/drawing/2010/main" id="{ED1DDC53-88EA-49F3-A157-B992BF86FD2C}"/>
+              </a:ext>
+            </a:extLst>
+          </p:cNvPr>
+          <p:cNvSpPr>
+            <a:spLocks noGrp="true"/>
+          </p:cNvSpPr>
+          <p:nvPr>
+            <p:ph idx="10" type="title"/>
+          </p:nvPr>
+        </p:nvSpPr>
+        <p:spPr>
+          <a:xfrm rot="0">
+            <a:off x="3755231" y="1477489"/>
+            <a:ext cx="4760116" cy="901510"/>
+          </a:xfrm>
+        </p:spPr>
+        <p:txBody>
+          <a:bodyPr rtlCol="0"/>
+          <a:lstStyle/>
+          <a:p>
+            <a:pPr algn="ctr"/>
+            <a:r>
+              <a:rPr dirty="0" lang="en-US" sz="4000"/>
+              <a:t>QA</a:t>
+            </a:r>
+            <a:endParaRPr dirty="0" lang="en-US" sz="4000"/>
+          </a:p>
+        </p:txBody>
+      </p:sp>
+      <p:sp>
+        <p:nvSpPr>
+          <p:cNvPr id="3" name="Content Placeholder 2">
+            <a:extLst>
+              <a:ext uri="{9DEDC2BF-7C3A-4BEF-8EBF-C8851F44D56D}">
+                <a16:creationId xmlns:a16="http://schemas.microsoft.com/office/drawing/2010/main" id="{F3C13ED4-F18C-41EC-BB14-FE5E6CB5AF4C}"/>
+              </a:ext>
+            </a:extLst>
+          </p:cNvPr>
+          <p:cNvSpPr>
+            <a:spLocks noGrp="true"/>
+          </p:cNvSpPr>
+          <p:nvPr>
+            <p:ph idx="11" type="subTitle"/>
+          </p:nvPr>
+        </p:nvSpPr>
+        <p:spPr>
+          <a:xfrm rot="0">
+            <a:off x="3754964" y="2607163"/>
+            <a:ext cx="4760640" cy="858578"/>
+          </a:xfrm>
+        </p:spPr>
+        <p:txBody>
+          <a:bodyPr rtlCol="0"/>
+          <a:lstStyle/>
+          <a:p>
+            <a:pPr algn="ctr"/>
+            <a:r>
+              <a:rPr dirty="0" lang="en-US"/>
+              <a:t>\\\---- THE END ----\\\</a:t>
+            </a:r>
+            <a:endParaRPr dirty="0" lang="en-US"/>
+          </a:p>
+        </p:txBody>
+      </p:sp>
+    </p:spTree>
+    <p:extLst>
+      <p:ext uri="{2D2CEFEC-EAE5-44EF-8151-5CA2DCBE8764}">
+        <p14:creationId xmlns:p14="http://schemas.microsoft.com/office/powerpoint/2010/main" val="1713440222535"/>
       </p:ext>
     </p:extLst>
   </p:cSld>
@@ -19766,8 +19867,8 @@
         <p:nvSpPr>
           <p:cNvPr id="2" name="Title 20">
             <a:extLst>
-              <a:ext uri="{5BF79850-EDBA-462D-9FCE-803EA5102FDE}">
-                <a16:creationId xmlns:a16="http://schemas.microsoft.com/office/drawing/2010/main" id="{057E2531-A07C-4B80-B231-E866CFF70772}"/>
+              <a:ext uri="{FFCE0638-B0C7-4E6A-9F87-2F493F59204A}">
+                <a16:creationId xmlns:a16="http://schemas.microsoft.com/office/drawing/2010/main" id="{256FEA24-4059-4346-A18F-B0908D837ED2}"/>
               </a:ext>
             </a:extLst>
           </p:cNvPr>
@@ -19800,8 +19901,8 @@
         <p:nvSpPr>
           <p:cNvPr id="3" name="Text Placeholder 21">
             <a:extLst>
-              <a:ext uri="{549A99E9-7B59-49E4-A606-5F1AB6850B6B}">
-                <a16:creationId xmlns:a16="http://schemas.microsoft.com/office/drawing/2010/main" id="{863DB505-762F-445F-B239-2F1282F3C486}"/>
+              <a:ext uri="{72B6C95B-63AD-436C-9E4E-1B73A20E547B}">
+                <a16:creationId xmlns:a16="http://schemas.microsoft.com/office/drawing/2010/main" id="{FEDC4B75-BD08-402A-99B4-D34ED8750B9B}"/>
               </a:ext>
             </a:extLst>
           </p:cNvPr>
@@ -19930,8 +20031,8 @@
         <p:nvSpPr>
           <p:cNvPr id="4" name="Slide Number Placeholder 2">
             <a:extLst>
-              <a:ext uri="{75ACE399-71B8-4F66-B186-4231EF0E8F1E}">
-                <a16:creationId xmlns:a16="http://schemas.microsoft.com/office/drawing/2010/main" id="{71C9981E-014B-46EF-929B-72BA6AD2E871}"/>
+              <a:ext uri="{0CFB4E26-5875-4F5A-B2A1-0E80BCE3EBE4}">
+                <a16:creationId xmlns:a16="http://schemas.microsoft.com/office/drawing/2010/main" id="{0829AE04-EFB5-4D25-B3E3-6F5C471FD2FA}"/>
               </a:ext>
             </a:extLst>
           </p:cNvPr>
@@ -19956,15 +20057,15 @@
           <a:lstStyle/>
           <a:p>
             <a:pPr/>
-            <a:fld id="{87B468C0-F5B4-4FED-9CF9-FAA1734F8330}" type="slidenum"/>
+            <a:fld id="{5DC98DDA-4C2B-415F-B419-55E733CBFA7E}" type="slidenum"/>
             <a:endParaRPr dirty="0" lang="en-US"/>
           </a:p>
         </p:txBody>
       </p:sp>
     </p:spTree>
     <p:extLst>
-      <p:ext uri="{53D03485-D17E-47E7-9215-F88790B58D3D}">
-        <p14:creationId xmlns:p14="http://schemas.microsoft.com/office/powerpoint/2010/main" val="1713420158763"/>
+      <p:ext uri="{D1186345-EF84-4D43-BDB7-F28825717305}">
+        <p14:creationId xmlns:p14="http://schemas.microsoft.com/office/powerpoint/2010/main" val="1713440222514"/>
       </p:ext>
     </p:extLst>
   </p:cSld>
@@ -19995,8 +20096,8 @@
         <p:nvSpPr>
           <p:cNvPr id="2" name="Title 1">
             <a:extLst>
-              <a:ext uri="{05DE37D5-83E4-45A6-8ABE-93BFEFA8412B}">
-                <a16:creationId xmlns:a16="http://schemas.microsoft.com/office/drawing/2010/main" id="{1FD5D438-F4D5-4E34-87E0-A99E25C62DF7}"/>
+              <a:ext uri="{427DF3DB-73E4-4B31-A299-84887F081051}">
+                <a16:creationId xmlns:a16="http://schemas.microsoft.com/office/drawing/2010/main" id="{0541FAB7-7FD1-457B-A7DA-3AC0FB6AAFF3}"/>
               </a:ext>
             </a:extLst>
           </p:cNvPr>
@@ -20038,8 +20139,8 @@
         <p:nvSpPr>
           <p:cNvPr id="3" name="Content Placeholder 2">
             <a:extLst>
-              <a:ext uri="{853649AE-387D-4563-9C50-9FD8B4F9ECB4}">
-                <a16:creationId xmlns:a16="http://schemas.microsoft.com/office/drawing/2010/main" id="{C4839EED-5CB2-4310-94ED-2E929F42EC95}"/>
+              <a:ext uri="{CD15BF50-BB74-4A9D-AB4C-C34760F77706}">
+                <a16:creationId xmlns:a16="http://schemas.microsoft.com/office/drawing/2010/main" id="{0D1CB8D7-0061-4828-9723-B2D945FB634B}"/>
               </a:ext>
             </a:extLst>
           </p:cNvPr>
@@ -20077,8 +20178,8 @@
         <p:nvSpPr>
           <p:cNvPr id="4" name="Slide Number Placeholder 5">
             <a:extLst>
-              <a:ext uri="{BF69BB15-65FE-4055-B6C2-0DE50577E8FD}">
-                <a16:creationId xmlns:a16="http://schemas.microsoft.com/office/drawing/2010/main" id="{467423C0-43E7-442B-884D-D9E706AA082C}"/>
+              <a:ext uri="{6EA99A0B-3545-4B1B-8962-5513B9B94094}">
+                <a16:creationId xmlns:a16="http://schemas.microsoft.com/office/drawing/2010/main" id="{9175849C-B35A-4C56-BC61-2D5856EFA5E2}"/>
               </a:ext>
             </a:extLst>
           </p:cNvPr>
@@ -20111,7 +20212,7 @@
           </a:lstStyle>
           <a:p>
             <a:pPr/>
-            <a:fld id="{EEE3A033-BA81-495D-B092-CF57853BBD34}" type="slidenum"/>
+            <a:fld id="{24E09F64-D12F-4EB7-8ACF-53315AB24CC3}" type="slidenum"/>
             <a:endParaRPr dirty="0" lang="en-US"/>
           </a:p>
         </p:txBody>
@@ -20120,8 +20221,8 @@
         <p:nvPicPr>
           <p:cNvPr id="5" name="">
             <a:extLst>
-              <a:ext uri="{DF4583F7-E571-4C57-85CA-8563A326E5C1}">
-                <a16:creationId xmlns:a16="http://schemas.microsoft.com/office/drawing/2010/main" id="{6AD899C4-1429-4049-9CB4-E1BEC0DFB2F0}"/>
+              <a:ext uri="{37E16183-97BE-4C2D-B8AC-E0910BFC8DE8}">
+                <a16:creationId xmlns:a16="http://schemas.microsoft.com/office/drawing/2010/main" id="{60540998-7ADD-4FAB-BC09-E50A4122D5F1}"/>
               </a:ext>
             </a:extLst>
           </p:cNvPr>
@@ -20149,8 +20250,8 @@
       </p:pic>
     </p:spTree>
     <p:extLst>
-      <p:ext uri="{10DDCFA0-D6DC-492E-ADFC-B194EFFD0C6A}">
-        <p14:creationId xmlns:p14="http://schemas.microsoft.com/office/powerpoint/2010/main" val="1713420158766"/>
+      <p:ext uri="{8C50C399-6CA8-4DD3-AA6A-0656B5380613}">
+        <p14:creationId xmlns:p14="http://schemas.microsoft.com/office/powerpoint/2010/main" val="1713440222516"/>
       </p:ext>
     </p:extLst>
   </p:cSld>
@@ -20181,8 +20282,8 @@
         <p:nvSpPr>
           <p:cNvPr id="2" name="Title 1">
             <a:extLst>
-              <a:ext uri="{FCDC635A-3AB8-42A7-8124-42DCBD3F656A}">
-                <a16:creationId xmlns:a16="http://schemas.microsoft.com/office/drawing/2010/main" id="{AD3D6CE9-ECE1-49D1-AE16-7049BE1F9E46}"/>
+              <a:ext uri="{9E679ADD-9613-44A3-B0ED-51AB7BA2DB24}">
+                <a16:creationId xmlns:a16="http://schemas.microsoft.com/office/drawing/2010/main" id="{68FA6F31-95E6-44B0-AAD7-8AA6E29B98F2}"/>
               </a:ext>
             </a:extLst>
           </p:cNvPr>
@@ -20232,8 +20333,8 @@
         <p:nvSpPr>
           <p:cNvPr id="3" name="Text Placeholder 5">
             <a:extLst>
-              <a:ext uri="{C1401626-90EB-4880-B26A-08C3F73FCBE1}">
-                <a16:creationId xmlns:a16="http://schemas.microsoft.com/office/drawing/2010/main" id="{AE17FE9E-21A1-4073-8F2E-CB2995AC92F6}"/>
+              <a:ext uri="{D6A14525-96C7-47B1-BCDC-C1C9ED933925}">
+                <a16:creationId xmlns:a16="http://schemas.microsoft.com/office/drawing/2010/main" id="{986B53D3-5319-4E4A-80A6-B671178C743D}"/>
               </a:ext>
             </a:extLst>
           </p:cNvPr>
@@ -20627,8 +20728,8 @@
         <p:nvSpPr>
           <p:cNvPr id="4" name="Content Placeholder 2">
             <a:extLst>
-              <a:ext uri="{B3C9F25D-EE6E-45E3-B564-9D5F952F0544}">
-                <a16:creationId xmlns:a16="http://schemas.microsoft.com/office/drawing/2010/main" id="{7DE4A9CA-A15E-440D-A195-9A52F7C084BC}"/>
+              <a:ext uri="{1955A903-23DC-4D93-A973-B07DE300F4A0}">
+                <a16:creationId xmlns:a16="http://schemas.microsoft.com/office/drawing/2010/main" id="{00F4D46B-AD53-430F-9D92-09E1EBAA396D}"/>
               </a:ext>
             </a:extLst>
           </p:cNvPr>
@@ -20678,8 +20779,8 @@
         <p:nvSpPr>
           <p:cNvPr id="5" name="Slide Number Placeholder 5">
             <a:extLst>
-              <a:ext uri="{3FEAAA1B-6703-4D43-9511-AD89CB8E32A6}">
-                <a16:creationId xmlns:a16="http://schemas.microsoft.com/office/drawing/2010/main" id="{EF905A28-7FF8-40E8-9E60-DC5A0B4F1D51}"/>
+              <a:ext uri="{B790C3BE-5A5A-4153-83AE-1C26EDAB3800}">
+                <a16:creationId xmlns:a16="http://schemas.microsoft.com/office/drawing/2010/main" id="{DC805172-8EF4-4CA7-BA77-87FE47C54DE4}"/>
               </a:ext>
             </a:extLst>
           </p:cNvPr>
@@ -20712,15 +20813,15 @@
           </a:lstStyle>
           <a:p>
             <a:pPr/>
-            <a:fld id="{2DC31156-83B4-4BD6-85EC-8BDEF102231A}" type="slidenum"/>
+            <a:fld id="{69B3F20A-CE24-4ACC-B90C-B78E17F2E6C8}" type="slidenum"/>
             <a:endParaRPr dirty="0" lang="en-US"/>
           </a:p>
         </p:txBody>
       </p:sp>
     </p:spTree>
     <p:extLst>
-      <p:ext uri="{C8312308-D58B-474B-8BC7-D649BA05A9EF}">
-        <p14:creationId xmlns:p14="http://schemas.microsoft.com/office/powerpoint/2010/main" val="1713420158768"/>
+      <p:ext uri="{BF3D924E-80C3-4E4C-9C7C-67C5F5093FE1}">
+        <p14:creationId xmlns:p14="http://schemas.microsoft.com/office/powerpoint/2010/main" val="1713440222518"/>
       </p:ext>
     </p:extLst>
   </p:cSld>
@@ -20751,8 +20852,8 @@
         <p:nvSpPr>
           <p:cNvPr id="2" name="Title 1">
             <a:extLst>
-              <a:ext uri="{9C491631-9A9F-47E1-9EAF-F66177BFA515}">
-                <a16:creationId xmlns:a16="http://schemas.microsoft.com/office/drawing/2010/main" id="{1AE4A8BC-AE8D-4AAF-9D2A-E2C85BBFD548}"/>
+              <a:ext uri="{1B069F04-2667-4D70-8DAA-5B0FFE3AF888}">
+                <a16:creationId xmlns:a16="http://schemas.microsoft.com/office/drawing/2010/main" id="{6971933B-C0B0-4538-BF80-E9575544377E}"/>
               </a:ext>
             </a:extLst>
           </p:cNvPr>
@@ -20802,8 +20903,8 @@
         <p:nvSpPr>
           <p:cNvPr id="3" name="Text Placeholder 5">
             <a:extLst>
-              <a:ext uri="{D2AEED45-B0ED-4EA8-8169-EABECD667B46}">
-                <a16:creationId xmlns:a16="http://schemas.microsoft.com/office/drawing/2010/main" id="{4AF1196D-7394-4C97-9ABE-9CB881D277B8}"/>
+              <a:ext uri="{43F94FFB-5C8E-4AED-8EB6-E44CB3DB852A}">
+                <a16:creationId xmlns:a16="http://schemas.microsoft.com/office/drawing/2010/main" id="{44B29BBA-702E-4583-BF52-CB87F25C2DF6}"/>
               </a:ext>
             </a:extLst>
           </p:cNvPr>
@@ -21201,8 +21302,8 @@
         <p:nvSpPr>
           <p:cNvPr id="4" name="Content Placeholder 2">
             <a:extLst>
-              <a:ext uri="{482578CC-82B5-466E-BD2B-F1800C9DADFF}">
-                <a16:creationId xmlns:a16="http://schemas.microsoft.com/office/drawing/2010/main" id="{C17FCFDB-B790-411E-A294-8E6D7B76DD42}"/>
+              <a:ext uri="{33D05541-370E-41D8-ACEF-B4DCEA557575}">
+                <a16:creationId xmlns:a16="http://schemas.microsoft.com/office/drawing/2010/main" id="{F1AFCE91-23B1-4BC9-9334-171D9A7E669C}"/>
               </a:ext>
             </a:extLst>
           </p:cNvPr>
@@ -21252,8 +21353,8 @@
         <p:nvSpPr>
           <p:cNvPr id="5" name="Slide Number Placeholder 5">
             <a:extLst>
-              <a:ext uri="{39808B48-1DCC-45CA-9D3C-C04AF9080774}">
-                <a16:creationId xmlns:a16="http://schemas.microsoft.com/office/drawing/2010/main" id="{C6959A14-BEFC-447F-96AA-28B615BCCC4B}"/>
+              <a:ext uri="{17668C6C-5B3C-4F59-AD76-F31B115AE87A}">
+                <a16:creationId xmlns:a16="http://schemas.microsoft.com/office/drawing/2010/main" id="{4930EE6C-6A94-4DE2-A795-B25C33D4D6A4}"/>
               </a:ext>
             </a:extLst>
           </p:cNvPr>
@@ -21286,15 +21387,15 @@
           </a:lstStyle>
           <a:p>
             <a:pPr/>
-            <a:fld id="{607AADB3-7F37-4A83-A958-1DADB69C849E}" type="slidenum"/>
+            <a:fld id="{9A9D4E1B-F02E-40F1-A21A-C2D3CB81FF13}" type="slidenum"/>
             <a:endParaRPr dirty="0" lang="en-US"/>
           </a:p>
         </p:txBody>
       </p:sp>
     </p:spTree>
     <p:extLst>
-      <p:ext uri="{7DC82D36-7010-4CDD-9CEF-8C1261BD8B7A}">
-        <p14:creationId xmlns:p14="http://schemas.microsoft.com/office/powerpoint/2010/main" val="1713420158772"/>
+      <p:ext uri="{56C77AB0-52A3-4B8D-B327-3A5EDB69EF9C}">
+        <p14:creationId xmlns:p14="http://schemas.microsoft.com/office/powerpoint/2010/main" val="1713440222521"/>
       </p:ext>
     </p:extLst>
   </p:cSld>
@@ -21325,8 +21426,8 @@
         <p:nvSpPr>
           <p:cNvPr id="2" name="Title 1">
             <a:extLst>
-              <a:ext uri="{9678A3A1-13ED-4557-B62D-9E5048B3B1B2}">
-                <a16:creationId xmlns:a16="http://schemas.microsoft.com/office/drawing/2010/main" id="{B891746B-8102-4E7C-B761-0EA5DD6EF0DB}"/>
+              <a:ext uri="{4C814FB7-CCB0-45B7-9591-1B4BEEF8F2E9}">
+                <a16:creationId xmlns:a16="http://schemas.microsoft.com/office/drawing/2010/main" id="{01F61F95-1826-475F-9DEE-64059A7B67BC}"/>
               </a:ext>
             </a:extLst>
           </p:cNvPr>
@@ -21364,8 +21465,8 @@
         <p:nvSpPr>
           <p:cNvPr id="3" name="Text Placeholder 5">
             <a:extLst>
-              <a:ext uri="{600DC4F3-BA61-401B-8FC0-EB6A9153842E}">
-                <a16:creationId xmlns:a16="http://schemas.microsoft.com/office/drawing/2010/main" id="{731F99E6-3A6A-49B7-9DEA-9479F022F4FB}"/>
+              <a:ext uri="{0E37D182-690B-4F73-B547-FD70CB490182}">
+                <a16:creationId xmlns:a16="http://schemas.microsoft.com/office/drawing/2010/main" id="{9C4A2B76-F5B5-4A62-9004-86BA85F92B0C}"/>
               </a:ext>
             </a:extLst>
           </p:cNvPr>
@@ -22643,8 +22744,8 @@
         <p:nvSpPr>
           <p:cNvPr id="4" name="Content Placeholder 2">
             <a:extLst>
-              <a:ext uri="{C50961C9-BCE5-44AB-B031-ED4915C507BB}">
-                <a16:creationId xmlns:a16="http://schemas.microsoft.com/office/drawing/2010/main" id="{806822B4-21B8-4D07-B659-CDC0FCD3FC17}"/>
+              <a:ext uri="{899C66D3-B96D-4573-B92A-3BF7D6614661}">
+                <a16:creationId xmlns:a16="http://schemas.microsoft.com/office/drawing/2010/main" id="{EB09AEFB-98D4-4245-B7BE-335451A05B1D}"/>
               </a:ext>
             </a:extLst>
           </p:cNvPr>
@@ -22706,8 +22807,8 @@
         <p:nvSpPr>
           <p:cNvPr id="5" name="Slide Number Placeholder 5">
             <a:extLst>
-              <a:ext uri="{ACDF841D-289E-4FBF-905F-CC91550D6FCC}">
-                <a16:creationId xmlns:a16="http://schemas.microsoft.com/office/drawing/2010/main" id="{CD229338-BC19-4A24-AF9E-B41C9F2DA0BF}"/>
+              <a:ext uri="{EF5BF74A-EF28-4DE2-82AE-BC067E04F9FA}">
+                <a16:creationId xmlns:a16="http://schemas.microsoft.com/office/drawing/2010/main" id="{23DDB692-DAFD-431C-8D38-90DE7BC11B44}"/>
               </a:ext>
             </a:extLst>
           </p:cNvPr>
@@ -22740,15 +22841,15 @@
           </a:lstStyle>
           <a:p>
             <a:pPr/>
-            <a:fld id="{62B8556E-1203-4AEC-A58C-DCF60B31AC29}" type="slidenum"/>
+            <a:fld id="{CB7DB3BB-70CE-4EB5-9380-D185974DFEE7}" type="slidenum"/>
             <a:endParaRPr dirty="0" lang="en-US"/>
           </a:p>
         </p:txBody>
       </p:sp>
     </p:spTree>
     <p:extLst>
-      <p:ext uri="{115DE7BD-5E4B-42AA-842D-6BD4BE23D7DD}">
-        <p14:creationId xmlns:p14="http://schemas.microsoft.com/office/powerpoint/2010/main" val="1713420158777"/>
+      <p:ext uri="{CB5C7D9C-3080-4336-A9F2-763C5E781C65}">
+        <p14:creationId xmlns:p14="http://schemas.microsoft.com/office/powerpoint/2010/main" val="1713440222525"/>
       </p:ext>
     </p:extLst>
   </p:cSld>
@@ -22779,8 +22880,8 @@
         <p:nvSpPr>
           <p:cNvPr id="2" name="Title 1">
             <a:extLst>
-              <a:ext uri="{1ED0B5B7-5094-4B4C-8DB0-379C7128C1D2}">
-                <a16:creationId xmlns:a16="http://schemas.microsoft.com/office/drawing/2010/main" id="{CE95AE77-E098-4836-8406-CCFCEE86C0B5}"/>
+              <a:ext uri="{7C6ED186-1103-455B-8B9A-2F7307D9EB61}">
+                <a16:creationId xmlns:a16="http://schemas.microsoft.com/office/drawing/2010/main" id="{9B4897DB-68B9-46A5-A0A6-BC8028EC103B}"/>
               </a:ext>
             </a:extLst>
           </p:cNvPr>
@@ -22828,8 +22929,8 @@
         <p:nvSpPr>
           <p:cNvPr id="3" name="Content Placeholder 2">
             <a:extLst>
-              <a:ext uri="{F4FCD9A4-3F70-4D73-8C5F-01BC2FED5915}">
-                <a16:creationId xmlns:a16="http://schemas.microsoft.com/office/drawing/2010/main" id="{886939F8-E59D-4E18-8DFA-9374735D6727}"/>
+              <a:ext uri="{9BE5CB80-22D1-4F18-B581-DBE0EE9774D3}">
+                <a16:creationId xmlns:a16="http://schemas.microsoft.com/office/drawing/2010/main" id="{A003CC51-F102-46DA-B368-6CEB8BC7BD07}"/>
               </a:ext>
             </a:extLst>
           </p:cNvPr>
@@ -22886,8 +22987,8 @@
         <p:nvSpPr>
           <p:cNvPr id="4" name="Slide Number Placeholder 5">
             <a:extLst>
-              <a:ext uri="{15F5071B-364E-4EEE-BE90-4656FC267C58}">
-                <a16:creationId xmlns:a16="http://schemas.microsoft.com/office/drawing/2010/main" id="{142DB8F6-7A3B-4DDF-99AA-A48AA32E47DA}"/>
+              <a:ext uri="{106D1E3D-EADE-4890-BF41-E18FAEDFA617}">
+                <a16:creationId xmlns:a16="http://schemas.microsoft.com/office/drawing/2010/main" id="{6DC51DE9-9E08-4B5C-B7FA-658275ADB7BD}"/>
               </a:ext>
             </a:extLst>
           </p:cNvPr>
@@ -22920,15 +23021,15 @@
           </a:lstStyle>
           <a:p>
             <a:pPr/>
-            <a:fld id="{E4F901E7-BF59-4FB7-AB6C-12797ABF2EF8}" type="slidenum"/>
+            <a:fld id="{A95A76DE-3F1E-4EDC-9214-0C2954CBE43B}" type="slidenum"/>
             <a:endParaRPr dirty="0" lang="en-US"/>
           </a:p>
         </p:txBody>
       </p:sp>
     </p:spTree>
     <p:extLst>
-      <p:ext uri="{37D3DA4D-5B48-4F6B-8A23-CC623E54B0B7}">
-        <p14:creationId xmlns:p14="http://schemas.microsoft.com/office/powerpoint/2010/main" val="1713420158781"/>
+      <p:ext uri="{FAD5C4B4-E791-41BF-A467-765809D0C421}">
+        <p14:creationId xmlns:p14="http://schemas.microsoft.com/office/powerpoint/2010/main" val="1713440222527"/>
       </p:ext>
     </p:extLst>
   </p:cSld>
@@ -22959,8 +23060,8 @@
         <p:nvSpPr>
           <p:cNvPr id="2" name="Title 1">
             <a:extLst>
-              <a:ext uri="{68845950-7683-4634-A8A0-129EB1203784}">
-                <a16:creationId xmlns:a16="http://schemas.microsoft.com/office/drawing/2010/main" id="{82E7C9E9-858C-48FC-94E3-5EE29A11625A}"/>
+              <a:ext uri="{40A36719-305A-4D5B-87F9-033B945916DC}">
+                <a16:creationId xmlns:a16="http://schemas.microsoft.com/office/drawing/2010/main" id="{1ABB1B69-207C-482E-BFDD-BB0CEF7A0573}"/>
               </a:ext>
             </a:extLst>
           </p:cNvPr>
@@ -22994,8 +23095,8 @@
         <p:nvSpPr>
           <p:cNvPr id="3" name="Content Placeholder 2">
             <a:extLst>
-              <a:ext uri="{529D472A-CA9C-4B0B-9BD3-065B352CEA46}">
-                <a16:creationId xmlns:a16="http://schemas.microsoft.com/office/drawing/2010/main" id="{05562887-8FC5-42DE-AC81-A8ACF1D3FB99}"/>
+              <a:ext uri="{4207130C-54C9-4D54-8264-15894E2DB1AE}">
+                <a16:creationId xmlns:a16="http://schemas.microsoft.com/office/drawing/2010/main" id="{19E5DAB7-0717-46A1-A660-2D56B40CDAF7}"/>
               </a:ext>
             </a:extLst>
           </p:cNvPr>
@@ -23109,8 +23210,8 @@
         <p:nvPicPr>
           <p:cNvPr descr="A person using a computer&#10;&#10;Description automatically generated" id="4" name="Picture Placeholder 11">
             <a:extLst>
-              <a:ext uri="{92958FAA-1991-4E01-A402-23106BAE4879}">
-                <a16:creationId xmlns:a16="http://schemas.microsoft.com/office/drawing/2010/main" id="{008A5ED7-5F73-470A-8F7A-BD4D57EAEEB1}"/>
+              <a:ext uri="{731FE564-C83F-4D1F-8139-80D153B76964}">
+                <a16:creationId xmlns:a16="http://schemas.microsoft.com/office/drawing/2010/main" id="{5C36DF04-E688-4B98-872A-886AF4B49028}"/>
               </a:ext>
             </a:extLst>
           </p:cNvPr>
@@ -23140,8 +23241,8 @@
         <p:nvSpPr>
           <p:cNvPr id="5" name="Slide Number Placeholder 5">
             <a:extLst>
-              <a:ext uri="{09263F9E-3166-48B9-A91A-5C77452A4712}">
-                <a16:creationId xmlns:a16="http://schemas.microsoft.com/office/drawing/2010/main" id="{8F149CB9-CCD9-433C-A1C7-095067E99B47}"/>
+              <a:ext uri="{B14AE51E-64B2-45A7-9E18-1064CBB1F051}">
+                <a16:creationId xmlns:a16="http://schemas.microsoft.com/office/drawing/2010/main" id="{CCE7A6FE-AA6A-4697-952F-1F7C0EBB4B14}"/>
               </a:ext>
             </a:extLst>
           </p:cNvPr>
@@ -23174,15 +23275,15 @@
           </a:lstStyle>
           <a:p>
             <a:pPr/>
-            <a:fld id="{CCAFAC7C-E088-40EE-A4F1-CB7D801A9DFA}" type="slidenum"/>
+            <a:fld id="{55326A0B-4F1B-485D-BC92-E15865AE1931}" type="slidenum"/>
             <a:endParaRPr dirty="0" lang="en-US"/>
           </a:p>
         </p:txBody>
       </p:sp>
     </p:spTree>
     <p:extLst>
-      <p:ext uri="{7E820D83-F92A-4CC4-8B2D-807684197E8F}">
-        <p14:creationId xmlns:p14="http://schemas.microsoft.com/office/powerpoint/2010/main" val="1713420158783"/>
+      <p:ext uri="{F0C1107C-87CD-43F2-833B-6EB2F047A4FB}">
+        <p14:creationId xmlns:p14="http://schemas.microsoft.com/office/powerpoint/2010/main" val="1713440222529"/>
       </p:ext>
     </p:extLst>
   </p:cSld>
@@ -23194,7 +23295,7 @@
 
 <file path=ppt/slides/slide9.xml><?xml version="1.0" encoding="utf-8"?>
 <p:sld xmlns:p="http://schemas.openxmlformats.org/presentationml/2006/main" xmlns:a="http://schemas.openxmlformats.org/drawingml/2006/main" xmlns:c="http://schemas.openxmlformats.org/drawingml/2006/chart" xmlns:cs="http://schemas.microsoft.com/office/drawing/2012/chartStyle" xmlns:ns1="http://schemas.openxmlformats.org/officeDocument/2006/extended-properties" xmlns:r="http://schemas.openxmlformats.org/officeDocument/2006/relationships" xmlns:vt="http://schemas.openxmlformats.org/officeDocument/2006/docPropsVTypes">
-  <p:cSld name="slide13">
+  <p:cSld name="slide2">
     <p:spTree>
       <p:nvGrpSpPr>
         <p:cNvPr id="1" name=""/>
@@ -23211,10 +23312,10 @@
       </p:grpSpPr>
       <p:sp>
         <p:nvSpPr>
-          <p:cNvPr id="2" name="Title 1">
-            <a:extLst>
-              <a:ext uri="{CE7B6354-0729-4A32-AD10-033EC04899AD}">
-                <a16:creationId xmlns:a16="http://schemas.microsoft.com/office/drawing/2010/main" id="{B51CE4E2-F511-4AE7-B6C8-A31F39F99F87}"/>
+          <p:cNvPr id="2" name="Title 20">
+            <a:extLst>
+              <a:ext uri="{78C46779-8F71-41E3-AFE9-BC790247027D}">
+                <a16:creationId xmlns:a16="http://schemas.microsoft.com/office/drawing/2010/main" id="{A8BD2025-DA3D-4159-A307-D7DFACC89397}"/>
               </a:ext>
             </a:extLst>
           </p:cNvPr>
@@ -23225,31 +23326,30 @@
             <p:ph idx="10" type="title"/>
           </p:nvPr>
         </p:nvSpPr>
-        <p:spPr>
-          <a:xfrm rot="0">
-            <a:off x="3755231" y="1477489"/>
-            <a:ext cx="4760116" cy="901510"/>
-          </a:xfrm>
-        </p:spPr>
+        <p:spPr/>
         <p:txBody>
           <a:bodyPr rtlCol="0"/>
           <a:lstStyle/>
           <a:p>
-            <a:pPr algn="ctr"/>
-            <a:r>
-              <a:rPr dirty="0" lang="en-US" sz="4000"/>
-              <a:t>QA</a:t>
-            </a:r>
-            <a:endParaRPr dirty="0" lang="en-US" sz="4000"/>
+            <a:pPr/>
+            <a:r>
+              <a:rPr b="1" dirty="0" lang="en-US">
+                <a:latin typeface="Arial"/>
+              </a:rPr>
+              <a:t>Developers Information</a:t>
+            </a:r>
+            <a:endParaRPr b="1" dirty="0" lang="en-US">
+              <a:latin typeface="Arial"/>
+            </a:endParaRPr>
           </a:p>
         </p:txBody>
       </p:sp>
       <p:sp>
         <p:nvSpPr>
-          <p:cNvPr id="3" name="Content Placeholder 2">
-            <a:extLst>
-              <a:ext uri="{884A1A5F-EC3D-4C83-9B3B-28271548C51D}">
-                <a16:creationId xmlns:a16="http://schemas.microsoft.com/office/drawing/2010/main" id="{004B8327-2C4B-4C0F-A4DC-C86E0611A11A}"/>
+          <p:cNvPr id="3" name="Text Placeholder 21">
+            <a:extLst>
+              <a:ext uri="{39A20CB8-6B71-48C0-B734-9347CB9B8240}">
+                <a16:creationId xmlns:a16="http://schemas.microsoft.com/office/drawing/2010/main" id="{06D9EC20-FFC7-404D-B899-3F8BCB489C06}"/>
               </a:ext>
             </a:extLst>
           </p:cNvPr>
@@ -23257,32 +23357,361 @@
             <a:spLocks noGrp="true"/>
           </p:cNvSpPr>
           <p:nvPr>
-            <p:ph idx="11" type="subTitle"/>
+            <p:ph idx="11" type="body"/>
           </p:nvPr>
         </p:nvSpPr>
         <p:spPr>
           <a:xfrm rot="0">
-            <a:off x="3754964" y="2607163"/>
-            <a:ext cx="4760640" cy="858578"/>
+            <a:off x="5084331" y="1444485"/>
+            <a:ext cx="3077556" cy="3071222"/>
           </a:xfrm>
         </p:spPr>
         <p:txBody>
           <a:bodyPr rtlCol="0"/>
           <a:lstStyle/>
           <a:p>
-            <a:pPr algn="ctr"/>
-            <a:r>
-              <a:rPr dirty="0" lang="en-US"/>
-              <a:t>\\\---- THE END ----\\\</a:t>
-            </a:r>
+            <a:pPr/>
+            <a:r>
+              <a:rPr b="1" dirty="0" lang="en-US" sz="1000">
+                <a:solidFill>
+                  <a:srgbClr val="ffc000"/>
+                </a:solidFill>
+                <a:latin typeface="Arial"/>
+              </a:rPr>
+              <a:t>Name:</a:t>
+            </a:r>
+            <a:r>
+              <a:rPr dirty="0" lang="en-US" sz="1000">
+                <a:solidFill>
+                  <a:srgbClr val="ffc000"/>
+                </a:solidFill>
+                <a:latin typeface="Arial"/>
+              </a:rPr>
+              <a:t> MD: JANNAT </a:t>
+            </a:r>
+            <a:r>
+              <a:rPr dirty="0" err="1" lang="en-US" sz="1000">
+                <a:solidFill>
+                  <a:srgbClr val="ffc000"/>
+                </a:solidFill>
+                <a:latin typeface="Arial"/>
+              </a:rPr>
+              <a:t>FERDAUS</a:t>
+            </a:r>
+          </a:p>
+          <a:p>
+            <a:pPr indent="0" lvl="1" marL="457200"/>
+            <a:r>
+              <a:rPr dirty="0" lang="en-US" sz="1000">
+                <a:latin typeface="Arial"/>
+              </a:rPr>
+              <a:t> </a:t>
+            </a:r>
+            <a:r>
+              <a:rPr dirty="0" lang="en-US" sz="1000">
+                <a:latin typeface="Arial"/>
+              </a:rPr>
+              <a:t>ID: 42230301042</a:t>
+            </a:r>
+          </a:p>
+          <a:p>
+            <a:pPr indent="0" lvl="1" marL="457200"/>
+            <a:r>
+              <a:rPr dirty="0" lang="en-US" sz="1000">
+                <a:latin typeface="Arial"/>
+              </a:rPr>
+              <a:t> Section: 2A</a:t>
+            </a:r>
+          </a:p>
+          <a:p>
+            <a:pPr/>
+            <a:r>
+              <a:rPr b="1" dirty="0" lang="en-US" sz="1000">
+                <a:solidFill>
+                  <a:srgbClr val="ffc000"/>
+                </a:solidFill>
+                <a:latin typeface="Arial"/>
+              </a:rPr>
+              <a:t>Name:</a:t>
+            </a:r>
+            <a:r>
+              <a:rPr dirty="0" lang="en-US" sz="1000">
+                <a:solidFill>
+                  <a:srgbClr val="ffc000"/>
+                </a:solidFill>
+                <a:latin typeface="Arial"/>
+              </a:rPr>
+              <a:t> MD: </a:t>
+            </a:r>
+            <a:r>
+              <a:rPr dirty="0" err="1" lang="en-US" sz="1000">
+                <a:solidFill>
+                  <a:srgbClr val="ffc000"/>
+                </a:solidFill>
+                <a:latin typeface="Arial"/>
+              </a:rPr>
+              <a:t>NAHID</a:t>
+            </a:r>
+            <a:r>
+              <a:rPr dirty="0" lang="en-US" sz="1000">
+                <a:solidFill>
+                  <a:srgbClr val="ffc000"/>
+                </a:solidFill>
+                <a:latin typeface="Arial"/>
+              </a:rPr>
+              <a:t> HASAN </a:t>
+            </a:r>
+            <a:r>
+              <a:rPr dirty="0" err="1" lang="en-US" sz="1000">
+                <a:solidFill>
+                  <a:srgbClr val="ffc000"/>
+                </a:solidFill>
+                <a:latin typeface="Arial"/>
+              </a:rPr>
+              <a:t>ROKY</a:t>
+            </a:r>
+          </a:p>
+          <a:p>
+            <a:pPr lvl="1"/>
+            <a:r>
+              <a:rPr dirty="0" lang="en-US" sz="1000">
+                <a:latin typeface="Arial"/>
+              </a:rPr>
+              <a:t> </a:t>
+            </a:r>
+            <a:r>
+              <a:rPr dirty="0" lang="en-US" sz="1000">
+                <a:latin typeface="Arial"/>
+              </a:rPr>
+              <a:t>ID</a:t>
+            </a:r>
+            <a:r>
+              <a:rPr dirty="0" err="1" lang="en-US" sz="1000">
+                <a:latin typeface="Arial"/>
+              </a:rPr>
+              <a:t>: </a:t>
+            </a:r>
+            <a:r>
+              <a:rPr dirty="0" lang="en-US" sz="1000">
+                <a:latin typeface="Arial"/>
+              </a:rPr>
+              <a:t>42230301040</a:t>
+            </a:r>
+          </a:p>
+          <a:p>
+            <a:pPr indent="0" lvl="1" marL="457200"/>
+            <a:r>
+              <a:rPr dirty="0" lang="en-US" sz="1000">
+                <a:latin typeface="Arial"/>
+              </a:rPr>
+              <a:t> </a:t>
+            </a:r>
+            <a:r>
+              <a:rPr dirty="0" lang="en-US" sz="1000">
+                <a:latin typeface="Arial"/>
+              </a:rPr>
+              <a:t>Section</a:t>
+            </a:r>
+            <a:r>
+              <a:rPr dirty="0" err="1" lang="en-US" sz="1000">
+                <a:latin typeface="Arial"/>
+              </a:rPr>
+              <a:t>: </a:t>
+            </a:r>
+            <a:r>
+              <a:rPr dirty="0" lang="en-US" sz="1000">
+                <a:latin typeface="Arial"/>
+              </a:rPr>
+              <a:t>2A</a:t>
+            </a:r>
+          </a:p>
+          <a:p>
+            <a:pPr/>
+            <a:r>
+              <a:rPr dirty="0" lang="en-US" sz="1000">
+                <a:latin typeface="Arial"/>
+              </a:rPr>
+              <a:t> </a:t>
+            </a:r>
+            <a:r>
+              <a:rPr b="1" dirty="0" lang="en-US" sz="1000">
+                <a:solidFill>
+                  <a:srgbClr val="ffc000"/>
+                </a:solidFill>
+                <a:latin typeface="Arial"/>
+              </a:rPr>
+              <a:t>Name:</a:t>
+            </a:r>
+            <a:r>
+              <a:rPr dirty="0" lang="en-US" sz="1000">
+                <a:solidFill>
+                  <a:srgbClr val="ffc000"/>
+                </a:solidFill>
+                <a:latin typeface="Arial"/>
+              </a:rPr>
+              <a:t> ABDUL </a:t>
+            </a:r>
+            <a:r>
+              <a:rPr dirty="0" err="1" lang="en-US" sz="1000">
+                <a:solidFill>
+                  <a:srgbClr val="ffc000"/>
+                </a:solidFill>
+                <a:latin typeface="Arial"/>
+              </a:rPr>
+              <a:t>MOMIN</a:t>
+            </a:r>
+          </a:p>
+          <a:p>
+            <a:pPr indent="0" lvl="1" marL="457200"/>
+            <a:r>
+              <a:rPr dirty="0" lang="en-US" sz="1000">
+                <a:latin typeface="Arial"/>
+              </a:rPr>
+              <a:t> </a:t>
+            </a:r>
+            <a:r>
+              <a:rPr dirty="0" lang="en-US" sz="1000">
+                <a:latin typeface="Arial"/>
+              </a:rPr>
+              <a:t>ID:</a:t>
+            </a:r>
+            <a:r>
+              <a:rPr dirty="0" lang="en-US" sz="1000">
+                <a:latin typeface="Arial"/>
+              </a:rPr>
+              <a:t> 42230301041</a:t>
+            </a:r>
+          </a:p>
+          <a:p>
+            <a:pPr indent="0" lvl="1" marL="457200"/>
+            <a:r>
+              <a:rPr dirty="0" lang="en-US" sz="1000">
+                <a:latin typeface="Arial"/>
+              </a:rPr>
+              <a:t> </a:t>
+            </a:r>
+            <a:r>
+              <a:rPr dirty="0" lang="en-US" sz="1000">
+                <a:latin typeface="Arial"/>
+              </a:rPr>
+              <a:t>Section: 2A</a:t>
+            </a:r>
+            <a:r>
+              <a:rPr dirty="0" lang="en-US" sz="1000">
+                <a:latin typeface="Arial"/>
+              </a:rPr>
+              <a:t> </a:t>
+            </a:r>
+            <a:endParaRPr dirty="0" lang="en-US" sz="1000">
+              <a:latin typeface="Arial"/>
+            </a:endParaRPr>
+          </a:p>
+        </p:txBody>
+      </p:sp>
+      <p:sp>
+        <p:nvSpPr>
+          <p:cNvPr id="4" name="Slide Number Placeholder 2">
+            <a:extLst>
+              <a:ext uri="{B6AF1003-D05A-4815-AF42-9F4C7F4ADF57}">
+                <a16:creationId xmlns:a16="http://schemas.microsoft.com/office/drawing/2010/main" id="{407E0D12-38D4-4452-BC72-2A5ED95B5072}"/>
+              </a:ext>
+            </a:extLst>
+          </p:cNvPr>
+          <p:cNvSpPr>
+            <a:spLocks noGrp="true"/>
+          </p:cNvSpPr>
+          <p:nvPr>
+            <p:ph idx="12" sz="quarter" type="sldNum"/>
+          </p:nvPr>
+        </p:nvSpPr>
+        <p:spPr>
+          <a:xfrm rot="0">
+            <a:off x="6457950" y="4767262"/>
+            <a:ext cx="2057400" cy="273843"/>
+          </a:xfrm>
+          <a:prstGeom prst="rect">
+            <a:avLst/>
+          </a:prstGeom>
+        </p:spPr>
+        <p:txBody>
+          <a:bodyPr rtlCol="0"/>
+          <a:lstStyle/>
+          <a:p>
+            <a:pPr/>
+            <a:fld id="{234ED761-1184-4A28-8A89-8E675B1E6244}" type="slidenum"/>
             <a:endParaRPr dirty="0" lang="en-US"/>
+          </a:p>
+        </p:txBody>
+      </p:sp>
+      <p:sp>
+        <p:nvSpPr>
+          <p:cNvPr id="5" name="">
+            <a:extLst>
+              <a:ext uri="{16C3BEA3-5365-43AB-BB8A-CFC0368DFC40}">
+                <a16:creationId xmlns:a16="http://schemas.microsoft.com/office/drawing/2010/main" id="{2689EDC3-AE1C-43B6-A0F6-6C334499D00F}"/>
+              </a:ext>
+            </a:extLst>
+          </p:cNvPr>
+          <p:cNvSpPr txBox="1"/>
+          <p:nvPr>
+            <p:custDataLst>
+              <p:tags r:id="rId2"/>
+            </p:custDataLst>
+          </p:nvPr>
+        </p:nvSpPr>
+        <p:spPr>
+          <a:xfrm flipH="false" flipV="false" rot="0">
+            <a:off x="5342610" y="421547"/>
+            <a:ext cx="1915087" cy="771382"/>
+          </a:xfrm>
+          <a:solidFill>
+            <a:schemeClr val="accent1"/>
+          </a:solidFill>
+          <a:ln cap="flat" w="25400">
+            <a:solidFill>
+              <a:schemeClr val="accent1"/>
+            </a:solidFill>
+            <a:prstDash val="solid"/>
+            <a:round/>
+          </a:ln>
+        </p:spPr>
+        <p:txBody>
+          <a:bodyPr anchor="ctr" bIns="47625" lIns="95250" rIns="95250" rtlCol="0" tIns="47625">
+            <a:spAutoFit/>
+          </a:bodyPr>
+          <a:lstStyle/>
+          <a:p>
+            <a:pPr algn="ctr">
+              <a:defRPr dirty="0" lang="en-US" sz="1400"/>
+            </a:pPr>
+            <a:r>
+              <a:rPr dirty="0" err="1" lang="en-US">
+                <a:solidFill>
+                  <a:schemeClr val="bg1"/>
+                </a:solidFill>
+              </a:rPr>
+              <a:t>CGPA</a:t>
+            </a:r>
+            <a:r>
+              <a:rPr dirty="0" lang="en-US">
+                <a:solidFill>
+                  <a:schemeClr val="bg1"/>
+                </a:solidFill>
+              </a:rPr>
+              <a:t> CALCULATOR</a:t>
+            </a:r>
+            <a:endParaRPr dirty="0" lang="en-US">
+              <a:solidFill>
+                <a:schemeClr val="bg1"/>
+              </a:solidFill>
+            </a:endParaRPr>
           </a:p>
         </p:txBody>
       </p:sp>
     </p:spTree>
     <p:extLst>
-      <p:ext uri="{F41B5173-7F47-495D-B27E-7329EF184334}">
-        <p14:creationId xmlns:p14="http://schemas.microsoft.com/office/powerpoint/2010/main" val="1713420158786"/>
+      <p:ext uri="{2393A3F7-F4AA-446A-B86E-9434E073765F}">
+        <p14:creationId xmlns:p14="http://schemas.microsoft.com/office/powerpoint/2010/main" val="1713440222533"/>
       </p:ext>
     </p:extLst>
   </p:cSld>
@@ -23290,6 +23719,12 @@
     <a:masterClrMapping/>
   </p:clrMapOvr>
 </p:sld>
+</file>
+
+<file path=ppt/tags/tag1.xml><?xml version="1.0" encoding="utf-8"?>
+<p:tagLst xmlns:p="http://schemas.openxmlformats.org/presentationml/2006/main" xmlns:a="http://schemas.openxmlformats.org/drawingml/2006/main" xmlns:c="http://schemas.openxmlformats.org/drawingml/2006/chart" xmlns:cs="http://schemas.microsoft.com/office/drawing/2012/chartStyle" xmlns:ns1="http://schemas.openxmlformats.org/officeDocument/2006/extended-properties" xmlns:r="http://schemas.openxmlformats.org/officeDocument/2006/relationships" xmlns:vt="http://schemas.openxmlformats.org/officeDocument/2006/docPropsVTypes">
+  <p:tag name="presetShape" val="SQUARE_ON_CIRCLE_BOARD:"/>
+</p:tagLst>
 </file>
 
 <file path=ppt/theme/theme1.xml><?xml version="1.0" encoding="utf-8"?>
